--- a/decks/running-on-empty-lesson-v2.pptx
+++ b/decks/running-on-empty-lesson-v2.pptx
@@ -19,6 +19,7 @@
     <p:sldId id="267" r:id="rId19"/>
     <p:sldId id="268" r:id="rId20"/>
     <p:sldId id="269" r:id="rId21"/>
+    <p:sldId id="270" r:id="rId22"/>
   </p:sldIdLst>
   <p:sldSz cx="12192000" cy="6858000" type="screen4x3"/>
   <p:notesSz cx="6858000" cy="9144000"/>
@@ -515,7 +516,7 @@
           <a:lstStyle/>
           <a:p>
             <a:r>
-              <a:t>This page and the next three are hidden. They stay in the deck for you and are skipped when you present.</a:t>
+              <a:t>This page is hidden and skipped when you present. The full plan, care notes and research are on the hidden pages at the end of the deck, if you want them.</a:t>
             </a:r>
           </a:p>
         </p:txBody>
@@ -656,6 +657,76 @@
           <a:p>
             <a:r>
               <a:t>3 MINUTES. Collect anonymously if you want to see what the room picked. Share the take-home link on the slide (post it on your class page too). It has the levers, tools for nights that go sideways, a private check-in, and who to talk to. Remind students that a counselor or the school nurse can help if sleep has been rough for weeks.</a:t>
+            </a:r>
+          </a:p>
+        </p:txBody>
+      </p:sp>
+      <p:sp>
+        <p:nvSpPr>
+          <p:cNvPr id="4" name="Slide Number Placeholder 3"/>
+          <p:cNvSpPr>
+            <a:spLocks noGrp="1"/>
+          </p:cNvSpPr>
+          <p:nvPr>
+            <p:ph type="sldNum" idx="5" sz="quarter"/>
+          </p:nvPr>
+        </p:nvSpPr>
+        <p:spPr/>
+      </p:sp>
+    </p:spTree>
+  </p:cSld>
+  <p:clrMapOvr>
+    <a:masterClrMapping/>
+  </p:clrMapOvr>
+</p:notes>
+</file>
+
+<file path=ppt/notesSlides/notesSlide12.xml><?xml version="1.0" encoding="utf-8"?>
+<p:notes xmlns:a="http://schemas.openxmlformats.org/drawingml/2006/main" xmlns:p="http://schemas.openxmlformats.org/presentationml/2006/main" xmlns:r="http://schemas.openxmlformats.org/officeDocument/2006/relationships">
+  <p:cSld>
+    <p:spTree>
+      <p:nvGrpSpPr>
+        <p:cNvPr id="1" name=""/>
+        <p:cNvGrpSpPr/>
+        <p:nvPr/>
+      </p:nvGrpSpPr>
+      <p:grpSpPr>
+        <a:xfrm>
+          <a:off x="0" y="0"/>
+          <a:ext cx="0" cy="0"/>
+          <a:chOff x="0" y="0"/>
+          <a:chExt cx="0" cy="0"/>
+        </a:xfrm>
+      </p:grpSpPr>
+      <p:sp>
+        <p:nvSpPr>
+          <p:cNvPr id="2" name="Slide Image Placeholder 1"/>
+          <p:cNvSpPr>
+            <a:spLocks noGrp="1"/>
+          </p:cNvSpPr>
+          <p:nvPr>
+            <p:ph type="sldImg" idx="2"/>
+          </p:nvPr>
+        </p:nvSpPr>
+        <p:spPr/>
+      </p:sp>
+      <p:sp>
+        <p:nvSpPr>
+          <p:cNvPr id="3" name="Notes Placeholder 2"/>
+          <p:cNvSpPr>
+            <a:spLocks noGrp="1"/>
+          </p:cNvSpPr>
+          <p:nvPr>
+            <p:ph type="body" idx="3" sz="quarter"/>
+          </p:nvPr>
+        </p:nvSpPr>
+        <p:spPr/>
+        <p:txBody>
+          <a:bodyPr/>
+          <a:lstStyle/>
+          <a:p>
+            <a:r>
+              <a:t>If you want more: this page and the next three are hidden and skipped when you present.</a:t>
             </a:r>
           </a:p>
         </p:txBody>
@@ -4307,7 +4378,7 @@
                 </a:solidFill>
                 <a:latin typeface="Inter Tight"/>
               </a:rPr>
-              <a:t>TEACHER PAGE  ·  skipped when you present  ·  Lesson plan</a:t>
+              <a:t>TEACHER PAGE  ·  skipped when you present  ·  Before you start</a:t>
             </a:r>
           </a:p>
         </p:txBody>
@@ -4398,8 +4469,8 @@
         </p:nvSpPr>
         <p:spPr>
           <a:xfrm>
-            <a:off x="548640" y="1828800"/>
-            <a:ext cx="5120640" cy="4389120"/>
+            <a:off x="548640" y="2011680"/>
+            <a:ext cx="11064240" cy="4206240"/>
           </a:xfrm>
           <a:prstGeom prst="rect">
             <a:avLst/>
@@ -4414,43 +4485,43 @@
           <a:p>
             <a:pPr algn="l">
               <a:spcAft>
-                <a:spcPts val="675"/>
-              </a:spcAft>
-            </a:pPr>
-            <a:r>
-              <a:rPr sz="1100" b="1" i="0">
+                <a:spcPts val="810"/>
+              </a:spcAft>
+            </a:pPr>
+            <a:r>
+              <a:rPr sz="1200" b="1" i="0">
                 <a:solidFill>
                   <a:srgbClr val="0B2D5B"/>
                 </a:solidFill>
                 <a:latin typeface="Inter Tight"/>
               </a:rPr>
-              <a:t>GOAL</a:t>
-            </a:r>
-          </a:p>
-          <a:p>
-            <a:pPr algn="l">
-              <a:spcAft>
-                <a:spcPts val="675"/>
-              </a:spcAft>
-            </a:pPr>
-            <a:r>
-              <a:rPr sz="1500" b="0" i="0">
+              <a:t>BEFORE YOU START</a:t>
+            </a:r>
+          </a:p>
+          <a:p>
+            <a:pPr algn="l">
+              <a:spcAft>
+                <a:spcPts val="810"/>
+              </a:spcAft>
+            </a:pPr>
+            <a:r>
+              <a:rPr sz="1800" b="0" i="0">
                 <a:solidFill>
                   <a:srgbClr val="1C1B19"/>
                 </a:solidFill>
                 <a:latin typeface="Source Serif 4"/>
               </a:rPr>
-              <a:t>Students can explain why their sleep clock shifts later in puberty, name what a short night costs (memory, mood, judgment, safety), and pick one lever they control, like morning light, a wake-up anchor, a caffeine cutoff, or the phone's bedtime. Nobody should leave feeling lectured about being lazy.</a:t>
-            </a:r>
-          </a:p>
-          <a:p>
-            <a:pPr algn="l">
-              <a:spcAft>
-                <a:spcPts val="675"/>
-              </a:spcAft>
-            </a:pPr>
-            <a:r>
-              <a:rPr sz="1500" b="0" i="0">
+              <a:t>Students learn why their sleep clock shifts later in puberty, what a short night costs, and one lever they control, like morning light or a phone bedtime. Bring scrap paper, keep the hours tally anonymous, and don't recommend melatonin or pills.</a:t>
+            </a:r>
+          </a:p>
+          <a:p>
+            <a:pPr algn="l">
+              <a:spcAft>
+                <a:spcPts val="810"/>
+              </a:spcAft>
+            </a:pPr>
+            <a:r>
+              <a:rPr sz="1800" b="0" i="0">
                 <a:solidFill>
                   <a:srgbClr val="1C1B19"/>
                 </a:solidFill>
@@ -4462,346 +4533,75 @@
           <a:p>
             <a:pPr algn="l">
               <a:spcAft>
-                <a:spcPts val="675"/>
-              </a:spcAft>
-            </a:pPr>
-            <a:r>
-              <a:rPr sz="1100" b="1" i="0">
+                <a:spcPts val="810"/>
+              </a:spcAft>
+            </a:pPr>
+            <a:r>
+              <a:rPr sz="1200" b="1" i="0">
                 <a:solidFill>
                   <a:srgbClr val="0B2D5B"/>
                 </a:solidFill>
                 <a:latin typeface="Inter Tight"/>
               </a:rPr>
-              <a:t>MATERIALS</a:t>
-            </a:r>
-          </a:p>
-          <a:p>
-            <a:pPr algn="l">
-              <a:spcAft>
-                <a:spcPts val="675"/>
-              </a:spcAft>
-            </a:pPr>
-            <a:r>
-              <a:rPr sz="1500" b="0" i="0">
+              <a:t>EVERY STUDENT IN THE ROOM</a:t>
+            </a:r>
+          </a:p>
+          <a:p>
+            <a:pPr algn="l">
+              <a:spcAft>
+                <a:spcPts val="810"/>
+              </a:spcAft>
+            </a:pPr>
+            <a:r>
+              <a:rPr sz="1800" b="0" i="0">
                 <a:solidFill>
                   <a:srgbClr val="1C1B19"/>
                 </a:solidFill>
                 <a:latin typeface="Source Serif 4"/>
               </a:rPr>
-              <a:t>Scrap paper or index cards, one per student</a:t>
-            </a:r>
-          </a:p>
-          <a:p>
-            <a:pPr algn="l">
-              <a:spcAft>
-                <a:spcPts val="675"/>
-              </a:spcAft>
-            </a:pPr>
-            <a:r>
-              <a:rPr sz="1500" b="0" i="0">
+              <a:t>Many schedules aren't the student's to set (a job, siblings, a shared room, a late family dinner, prayer times), so present every lever as free and something to try within what they control.</a:t>
+            </a:r>
+          </a:p>
+          <a:p>
+            <a:pPr algn="l">
+              <a:spcAft>
+                <a:spcPts val="810"/>
+              </a:spcAft>
+            </a:pPr>
+            <a:r>
+              <a:rPr sz="1800" b="0" i="0">
                 <a:solidFill>
                   <a:srgbClr val="1C1B19"/>
                 </a:solidFill>
                 <a:latin typeface="Source Serif 4"/>
               </a:rPr>
-              <a:t>Board space for the weekend loop</a:t>
-            </a:r>
-          </a:p>
-          <a:p>
-            <a:pPr algn="l">
-              <a:spcAft>
-                <a:spcPts val="675"/>
-              </a:spcAft>
-            </a:pPr>
-            <a:r>
-              <a:rPr sz="1500" b="0" i="0">
-                <a:solidFill>
-                  <a:srgbClr val="1C1B19"/>
-                </a:solidFill>
-                <a:latin typeface="Source Serif 4"/>
-              </a:rPr>
-              <a:t>The take-home link (last slide) to share after class</a:t>
-            </a:r>
-          </a:p>
-        </p:txBody>
-      </p:sp>
-      <p:sp>
-        <p:nvSpPr>
-          <p:cNvPr id="7" name="TextBox 6"/>
-          <p:cNvSpPr txBox="1"/>
-          <p:nvPr/>
-        </p:nvSpPr>
-        <p:spPr>
-          <a:xfrm>
-            <a:off x="6126480" y="1828800"/>
-            <a:ext cx="5486400" cy="4389120"/>
-          </a:xfrm>
-          <a:prstGeom prst="rect">
-            <a:avLst/>
-          </a:prstGeom>
-          <a:noFill/>
-        </p:spPr>
-        <p:txBody>
-          <a:bodyPr wrap="square" anchor="t" lIns="0" rIns="0" tIns="0" bIns="0">
-            <a:spAutoFit/>
-          </a:bodyPr>
-          <a:lstStyle/>
-          <a:p>
-            <a:pPr algn="l">
-              <a:spcAft>
-                <a:spcPts val="630"/>
-              </a:spcAft>
-            </a:pPr>
-            <a:r>
-              <a:rPr sz="1100" b="1" i="0">
+              <a:t/>
+            </a:r>
+          </a:p>
+          <a:p>
+            <a:pPr algn="l">
+              <a:spcAft>
+                <a:spcPts val="810"/>
+              </a:spcAft>
+            </a:pPr>
+            <a:r>
+              <a:rPr sz="1200" b="1" i="0">
                 <a:solidFill>
                   <a:srgbClr val="0B2D5B"/>
                 </a:solidFill>
                 <a:latin typeface="Inter Tight"/>
               </a:rPr>
-              <a:t>FLOW</a:t>
-            </a:r>
-          </a:p>
-          <a:p>
-            <a:pPr algn="l">
-              <a:spcAft>
-                <a:spcPts val="630"/>
-              </a:spcAft>
-            </a:pPr>
-            <a:r>
-              <a:rPr sz="1300" b="1" i="0">
-                <a:solidFill>
-                  <a:srgbClr val="F47B20"/>
-                </a:solidFill>
-                <a:latin typeface="Inter Tight"/>
-              </a:rPr>
-              <a:t>5 min   </a:t>
-            </a:r>
-            <a:r>
-              <a:rPr sz="1400" b="0" i="0">
-                <a:solidFill>
-                  <a:srgbClr val="1C1B19"/>
-                </a:solidFill>
-                <a:latin typeface="Source Serif 4"/>
-              </a:rPr>
-              <a:t>Last night's sleep (anonymous tally)</a:t>
-            </a:r>
-          </a:p>
-          <a:p>
-            <a:pPr algn="l">
-              <a:spcAft>
-                <a:spcPts val="630"/>
-              </a:spcAft>
-            </a:pPr>
-            <a:r>
-              <a:rPr sz="1300" b="1" i="0">
-                <a:solidFill>
-                  <a:srgbClr val="F47B20"/>
-                </a:solidFill>
-                <a:latin typeface="Inter Tight"/>
-              </a:rPr>
-              <a:t>7 min   </a:t>
-            </a:r>
-            <a:r>
-              <a:rPr sz="1400" b="0" i="0">
-                <a:solidFill>
-                  <a:srgbClr val="1C1B19"/>
-                </a:solidFill>
-                <a:latin typeface="Source Serif 4"/>
-              </a:rPr>
-              <a:t>Your clock really did move</a:t>
-            </a:r>
-          </a:p>
-          <a:p>
-            <a:pPr algn="l">
-              <a:spcAft>
-                <a:spcPts val="630"/>
-              </a:spcAft>
-            </a:pPr>
-            <a:r>
-              <a:rPr sz="1300" b="1" i="0">
-                <a:solidFill>
-                  <a:srgbClr val="F47B20"/>
-                </a:solidFill>
-                <a:latin typeface="Inter Tight"/>
-              </a:rPr>
-              <a:t>8 min   </a:t>
-            </a:r>
-            <a:r>
-              <a:rPr sz="1400" b="0" i="0">
-                <a:solidFill>
-                  <a:srgbClr val="1C1B19"/>
-                </a:solidFill>
-                <a:latin typeface="Source Serif 4"/>
-              </a:rPr>
-              <a:t>What a short night costs, and why you stop noticing</a:t>
-            </a:r>
-          </a:p>
-          <a:p>
-            <a:pPr algn="l">
-              <a:spcAft>
-                <a:spcPts val="630"/>
-              </a:spcAft>
-            </a:pPr>
-            <a:r>
-              <a:rPr sz="1300" b="1" i="0">
-                <a:solidFill>
-                  <a:srgbClr val="F47B20"/>
-                </a:solidFill>
-                <a:latin typeface="Inter Tight"/>
-              </a:rPr>
-              <a:t>5 min   </a:t>
-            </a:r>
-            <a:r>
-              <a:rPr sz="1400" b="0" i="0">
-                <a:solidFill>
-                  <a:srgbClr val="1C1B19"/>
-                </a:solidFill>
-                <a:latin typeface="Source Serif 4"/>
-              </a:rPr>
-              <a:t>The weekend loop</a:t>
-            </a:r>
-          </a:p>
-          <a:p>
-            <a:pPr algn="l">
-              <a:spcAft>
-                <a:spcPts val="630"/>
-              </a:spcAft>
-            </a:pPr>
-            <a:r>
-              <a:rPr sz="1300" b="1" i="0">
-                <a:solidFill>
-                  <a:srgbClr val="F47B20"/>
-                </a:solidFill>
-                <a:latin typeface="Inter Tight"/>
-              </a:rPr>
-              <a:t>5 min   </a:t>
-            </a:r>
-            <a:r>
-              <a:rPr sz="1400" b="0" i="0">
-                <a:solidFill>
-                  <a:srgbClr val="1C1B19"/>
-                </a:solidFill>
-                <a:latin typeface="Source Serif 4"/>
-              </a:rPr>
-              <a:t>The levers you control</a:t>
-            </a:r>
-          </a:p>
-          <a:p>
-            <a:pPr algn="l">
-              <a:spcAft>
-                <a:spcPts val="630"/>
-              </a:spcAft>
-            </a:pPr>
-            <a:r>
-              <a:rPr sz="1300" b="1" i="0">
-                <a:solidFill>
-                  <a:srgbClr val="F47B20"/>
-                </a:solidFill>
-                <a:latin typeface="Inter Tight"/>
-              </a:rPr>
-              <a:t>8 min   </a:t>
-            </a:r>
-            <a:r>
-              <a:rPr sz="1400" b="0" i="0">
-                <a:solidFill>
-                  <a:srgbClr val="1C1B19"/>
-                </a:solidFill>
-                <a:latin typeface="Source Serif 4"/>
-              </a:rPr>
-              <a:t>Three tired students (small groups)</a:t>
-            </a:r>
-          </a:p>
-          <a:p>
-            <a:pPr algn="l">
-              <a:spcAft>
-                <a:spcPts val="630"/>
-              </a:spcAft>
-            </a:pPr>
-            <a:r>
-              <a:rPr sz="1300" b="1" i="0">
-                <a:solidFill>
-                  <a:srgbClr val="F47B20"/>
-                </a:solidFill>
-                <a:latin typeface="Inter Tight"/>
-              </a:rPr>
-              <a:t>4 min   </a:t>
-            </a:r>
-            <a:r>
-              <a:rPr sz="1400" b="0" i="0">
-                <a:solidFill>
-                  <a:srgbClr val="1C1B19"/>
-                </a:solidFill>
-                <a:latin typeface="Source Serif 4"/>
-              </a:rPr>
-              <a:t>Work backward from your alarm (private)</a:t>
-            </a:r>
-          </a:p>
-          <a:p>
-            <a:pPr algn="l">
-              <a:spcAft>
-                <a:spcPts val="630"/>
-              </a:spcAft>
-            </a:pPr>
-            <a:r>
-              <a:rPr sz="1300" b="1" i="0">
-                <a:solidFill>
-                  <a:srgbClr val="F47B20"/>
-                </a:solidFill>
-                <a:latin typeface="Inter Tight"/>
-              </a:rPr>
-              <a:t>3 min   </a:t>
-            </a:r>
-            <a:r>
-              <a:rPr sz="1400" b="0" i="0">
-                <a:solidFill>
-                  <a:srgbClr val="1C1B19"/>
-                </a:solidFill>
-                <a:latin typeface="Source Serif 4"/>
-              </a:rPr>
-              <a:t>Exit card and take-home link</a:t>
-            </a:r>
-          </a:p>
-          <a:p>
-            <a:pPr algn="l">
-              <a:spcAft>
-                <a:spcPts val="630"/>
-              </a:spcAft>
-            </a:pPr>
-            <a:r>
-              <a:rPr sz="1400" b="0" i="0">
-                <a:solidFill>
-                  <a:srgbClr val="1C1B19"/>
-                </a:solidFill>
-                <a:latin typeface="Source Serif 4"/>
-              </a:rPr>
-              <a:t/>
-            </a:r>
-          </a:p>
-          <a:p>
-            <a:pPr algn="l">
-              <a:spcAft>
-                <a:spcPts val="630"/>
-              </a:spcAft>
-            </a:pPr>
-            <a:r>
-              <a:rPr sz="1100" b="1" i="0">
-                <a:solidFill>
-                  <a:srgbClr val="0B2D5B"/>
-                </a:solidFill>
-                <a:latin typeface="Inter Tight"/>
-              </a:rPr>
               <a:t>SHORT ON TIME (20-MINUTE ADVISORY)</a:t>
             </a:r>
           </a:p>
           <a:p>
             <a:pPr algn="l">
               <a:spcAft>
-                <a:spcPts val="630"/>
-              </a:spcAft>
-            </a:pPr>
-            <a:r>
-              <a:rPr sz="1400" b="0" i="0">
+                <a:spcPts val="810"/>
+              </a:spcAft>
+            </a:pPr>
+            <a:r>
+              <a:rPr sz="1800" b="0" i="0">
                 <a:solidFill>
                   <a:srgbClr val="1C1B19"/>
                 </a:solidFill>
@@ -4916,7 +4716,7 @@
                 </a:solidFill>
                 <a:latin typeface="Inter Tight"/>
               </a:rPr>
-              <a:t>THE WEEKEND LOOP</a:t>
+              <a:t>WORK BACKWARD</a:t>
             </a:r>
           </a:p>
         </p:txBody>
@@ -4962,64 +4762,23 @@
       </p:sp>
       <p:sp>
         <p:nvSpPr>
-          <p:cNvPr id="5" name="TextBox 4"/>
-          <p:cNvSpPr txBox="1"/>
-          <p:nvPr/>
-        </p:nvSpPr>
-        <p:spPr>
-          <a:xfrm>
-            <a:off x="822960" y="1005840"/>
-            <a:ext cx="10515600" cy="914400"/>
-          </a:xfrm>
-          <a:prstGeom prst="rect">
-            <a:avLst/>
-          </a:prstGeom>
-          <a:noFill/>
-        </p:spPr>
-        <p:txBody>
-          <a:bodyPr wrap="square" anchor="t" lIns="0" rIns="0" tIns="0" bIns="0">
-            <a:spAutoFit/>
-          </a:bodyPr>
-          <a:lstStyle/>
-          <a:p>
-            <a:pPr algn="l">
-              <a:spcAft>
-                <a:spcPts val="1530"/>
-              </a:spcAft>
-            </a:pPr>
-            <a:r>
-              <a:rPr sz="3400" b="1" i="0">
-                <a:solidFill>
-                  <a:srgbClr val="1C1B19"/>
-                </a:solidFill>
-                <a:latin typeface="Source Serif 4"/>
-              </a:rPr>
-              <a:t>Why Monday feels like jet lag</a:t>
-            </a:r>
-          </a:p>
-        </p:txBody>
-      </p:sp>
-      <p:sp>
-        <p:nvSpPr>
-          <p:cNvPr id="6" name="Rectangle 5"/>
+          <p:cNvPr id="5" name="Rectangle 4"/>
           <p:cNvSpPr/>
           <p:nvPr/>
         </p:nvSpPr>
         <p:spPr>
           <a:xfrm>
-            <a:off x="822960" y="2743200"/>
-            <a:ext cx="1874519" cy="1005840"/>
+            <a:off x="822960" y="1371600"/>
+            <a:ext cx="73152" cy="3566160"/>
           </a:xfrm>
           <a:prstGeom prst="rect">
             <a:avLst/>
           </a:prstGeom>
           <a:solidFill>
-            <a:srgbClr val="FFFFFF"/>
+            <a:srgbClr val="F47B20"/>
           </a:solidFill>
-          <a:ln w="15875">
-            <a:solidFill>
-              <a:srgbClr val="0B2D5B"/>
-            </a:solidFill>
+          <a:ln>
+            <a:noFill/>
           </a:ln>
           <a:effectLst/>
         </p:spPr>
@@ -5047,14 +4806,14 @@
       </p:sp>
       <p:sp>
         <p:nvSpPr>
-          <p:cNvPr id="7" name="TextBox 6"/>
+          <p:cNvPr id="6" name="TextBox 5"/>
           <p:cNvSpPr txBox="1"/>
           <p:nvPr/>
         </p:nvSpPr>
         <p:spPr>
           <a:xfrm>
-            <a:off x="822960" y="2743200"/>
-            <a:ext cx="1874519" cy="1005840"/>
+            <a:off x="1188720" y="1371600"/>
+            <a:ext cx="10058400" cy="3566160"/>
           </a:xfrm>
           <a:prstGeom prst="rect">
             <a:avLst/>
@@ -5067,517 +4826,33 @@
           </a:bodyPr>
           <a:lstStyle/>
           <a:p>
-            <a:pPr algn="ctr">
-              <a:spcAft>
-                <a:spcPts val="900"/>
-              </a:spcAft>
-            </a:pPr>
-            <a:r>
-              <a:rPr sz="2000" b="1" i="0">
+            <a:pPr algn="l">
+              <a:spcAft>
+                <a:spcPts val="1800"/>
+              </a:spcAft>
+            </a:pPr>
+            <a:r>
+              <a:rPr sz="4000" b="0" i="1">
                 <a:solidFill>
                   <a:srgbClr val="1C1B19"/>
                 </a:solidFill>
                 <a:latin typeface="Source Serif 4"/>
               </a:rPr>
-              <a:t>Late Friday</a:t>
-            </a:r>
-          </a:p>
-        </p:txBody>
-      </p:sp>
-      <p:cxnSp>
-        <p:nvCxnSpPr>
-          <p:cNvPr id="8" name="Connector 7"/>
-          <p:cNvCxnSpPr/>
-          <p:nvPr/>
-        </p:nvCxnSpPr>
-        <p:spPr>
-          <a:xfrm>
-            <a:off x="2752344" y="3246120"/>
-            <a:ext cx="176021" cy="0"/>
-          </a:xfrm>
-          <a:prstGeom prst="line">
-            <a:avLst/>
-          </a:prstGeom>
-          <a:ln w="31750">
-            <a:solidFill>
-              <a:srgbClr val="F47B20"/>
-            </a:solidFill>
-            <a:tailEnd type="triangle"/>
-          </a:ln>
-        </p:spPr>
-        <p:style>
-          <a:lnRef idx="2">
-            <a:schemeClr val="accent1"/>
-          </a:lnRef>
-          <a:fillRef idx="0">
-            <a:schemeClr val="accent1"/>
-          </a:fillRef>
-          <a:effectRef idx="1">
-            <a:schemeClr val="accent1"/>
-          </a:effectRef>
-          <a:fontRef idx="minor">
-            <a:schemeClr val="tx1"/>
-          </a:fontRef>
-        </p:style>
-      </p:cxnSp>
-      <p:sp>
-        <p:nvSpPr>
-          <p:cNvPr id="9" name="Rectangle 8"/>
-          <p:cNvSpPr/>
-          <p:nvPr/>
-        </p:nvSpPr>
-        <p:spPr>
-          <a:xfrm>
-            <a:off x="2983229" y="2743200"/>
-            <a:ext cx="1874519" cy="1005840"/>
-          </a:xfrm>
-          <a:prstGeom prst="rect">
-            <a:avLst/>
-          </a:prstGeom>
-          <a:solidFill>
-            <a:srgbClr val="FFFFFF"/>
-          </a:solidFill>
-          <a:ln w="15875">
-            <a:solidFill>
-              <a:srgbClr val="0B2D5B"/>
-            </a:solidFill>
-          </a:ln>
-          <a:effectLst/>
-        </p:spPr>
-        <p:style>
-          <a:lnRef idx="1">
-            <a:schemeClr val="accent1"/>
-          </a:lnRef>
-          <a:fillRef idx="3">
-            <a:schemeClr val="accent1"/>
-          </a:fillRef>
-          <a:effectRef idx="2">
-            <a:schemeClr val="accent1"/>
-          </a:effectRef>
-          <a:fontRef idx="minor">
-            <a:schemeClr val="lt1"/>
-          </a:fontRef>
-        </p:style>
-        <p:txBody>
-          <a:bodyPr rtlCol="0" anchor="ctr"/>
-          <a:lstStyle/>
-          <a:p>
-            <a:pPr algn="ctr"/>
-          </a:p>
-        </p:txBody>
-      </p:sp>
-      <p:sp>
-        <p:nvSpPr>
-          <p:cNvPr id="10" name="TextBox 9"/>
+              <a:t>Your wake-up time, minus 9 hours: that's lights-out.</a:t>
+            </a:r>
+          </a:p>
+        </p:txBody>
+      </p:sp>
+      <p:sp>
+        <p:nvSpPr>
+          <p:cNvPr id="7" name="TextBox 6"/>
           <p:cNvSpPr txBox="1"/>
           <p:nvPr/>
         </p:nvSpPr>
         <p:spPr>
           <a:xfrm>
-            <a:off x="2983229" y="2743200"/>
-            <a:ext cx="1874519" cy="1005840"/>
-          </a:xfrm>
-          <a:prstGeom prst="rect">
-            <a:avLst/>
-          </a:prstGeom>
-          <a:noFill/>
-        </p:spPr>
-        <p:txBody>
-          <a:bodyPr wrap="square" anchor="ctr" lIns="0" rIns="0" tIns="0" bIns="0">
-            <a:spAutoFit/>
-          </a:bodyPr>
-          <a:lstStyle/>
-          <a:p>
-            <a:pPr algn="ctr">
-              <a:spcAft>
-                <a:spcPts val="900"/>
-              </a:spcAft>
-            </a:pPr>
-            <a:r>
-              <a:rPr sz="2000" b="1" i="0">
-                <a:solidFill>
-                  <a:srgbClr val="1C1B19"/>
-                </a:solidFill>
-                <a:latin typeface="Source Serif 4"/>
-              </a:rPr>
-              <a:t>Sleep until 1</a:t>
-            </a:r>
-          </a:p>
-        </p:txBody>
-      </p:sp>
-      <p:cxnSp>
-        <p:nvCxnSpPr>
-          <p:cNvPr id="11" name="Connector 10"/>
-          <p:cNvCxnSpPr/>
-          <p:nvPr/>
-        </p:nvCxnSpPr>
-        <p:spPr>
-          <a:xfrm>
-            <a:off x="4912614" y="3246120"/>
-            <a:ext cx="176022" cy="0"/>
-          </a:xfrm>
-          <a:prstGeom prst="line">
-            <a:avLst/>
-          </a:prstGeom>
-          <a:ln w="31750">
-            <a:solidFill>
-              <a:srgbClr val="F47B20"/>
-            </a:solidFill>
-            <a:tailEnd type="triangle"/>
-          </a:ln>
-        </p:spPr>
-        <p:style>
-          <a:lnRef idx="2">
-            <a:schemeClr val="accent1"/>
-          </a:lnRef>
-          <a:fillRef idx="0">
-            <a:schemeClr val="accent1"/>
-          </a:fillRef>
-          <a:effectRef idx="1">
-            <a:schemeClr val="accent1"/>
-          </a:effectRef>
-          <a:fontRef idx="minor">
-            <a:schemeClr val="tx1"/>
-          </a:fontRef>
-        </p:style>
-      </p:cxnSp>
-      <p:sp>
-        <p:nvSpPr>
-          <p:cNvPr id="12" name="Rectangle 11"/>
-          <p:cNvSpPr/>
-          <p:nvPr/>
-        </p:nvSpPr>
-        <p:spPr>
-          <a:xfrm>
-            <a:off x="5143500" y="2743200"/>
-            <a:ext cx="1874519" cy="1005840"/>
-          </a:xfrm>
-          <a:prstGeom prst="rect">
-            <a:avLst/>
-          </a:prstGeom>
-          <a:solidFill>
-            <a:srgbClr val="FFFFFF"/>
-          </a:solidFill>
-          <a:ln w="15875">
-            <a:solidFill>
-              <a:srgbClr val="0B2D5B"/>
-            </a:solidFill>
-          </a:ln>
-          <a:effectLst/>
-        </p:spPr>
-        <p:style>
-          <a:lnRef idx="1">
-            <a:schemeClr val="accent1"/>
-          </a:lnRef>
-          <a:fillRef idx="3">
-            <a:schemeClr val="accent1"/>
-          </a:fillRef>
-          <a:effectRef idx="2">
-            <a:schemeClr val="accent1"/>
-          </a:effectRef>
-          <a:fontRef idx="minor">
-            <a:schemeClr val="lt1"/>
-          </a:fontRef>
-        </p:style>
-        <p:txBody>
-          <a:bodyPr rtlCol="0" anchor="ctr"/>
-          <a:lstStyle/>
-          <a:p>
-            <a:pPr algn="ctr"/>
-          </a:p>
-        </p:txBody>
-      </p:sp>
-      <p:sp>
-        <p:nvSpPr>
-          <p:cNvPr id="13" name="TextBox 12"/>
-          <p:cNvSpPr txBox="1"/>
-          <p:nvPr/>
-        </p:nvSpPr>
-        <p:spPr>
-          <a:xfrm>
-            <a:off x="5143500" y="2743200"/>
-            <a:ext cx="1874519" cy="1005840"/>
-          </a:xfrm>
-          <a:prstGeom prst="rect">
-            <a:avLst/>
-          </a:prstGeom>
-          <a:noFill/>
-        </p:spPr>
-        <p:txBody>
-          <a:bodyPr wrap="square" anchor="ctr" lIns="0" rIns="0" tIns="0" bIns="0">
-            <a:spAutoFit/>
-          </a:bodyPr>
-          <a:lstStyle/>
-          <a:p>
-            <a:pPr algn="ctr">
-              <a:spcAft>
-                <a:spcPts val="900"/>
-              </a:spcAft>
-            </a:pPr>
-            <a:r>
-              <a:rPr sz="2000" b="1" i="0">
-                <a:solidFill>
-                  <a:srgbClr val="1C1B19"/>
-                </a:solidFill>
-                <a:latin typeface="Source Serif 4"/>
-              </a:rPr>
-              <a:t>Clock shifts later</a:t>
-            </a:r>
-          </a:p>
-        </p:txBody>
-      </p:sp>
-      <p:cxnSp>
-        <p:nvCxnSpPr>
-          <p:cNvPr id="14" name="Connector 13"/>
-          <p:cNvCxnSpPr/>
-          <p:nvPr/>
-        </p:nvCxnSpPr>
-        <p:spPr>
-          <a:xfrm>
-            <a:off x="7072883" y="3246120"/>
-            <a:ext cx="176023" cy="0"/>
-          </a:xfrm>
-          <a:prstGeom prst="line">
-            <a:avLst/>
-          </a:prstGeom>
-          <a:ln w="31750">
-            <a:solidFill>
-              <a:srgbClr val="F47B20"/>
-            </a:solidFill>
-            <a:tailEnd type="triangle"/>
-          </a:ln>
-        </p:spPr>
-        <p:style>
-          <a:lnRef idx="2">
-            <a:schemeClr val="accent1"/>
-          </a:lnRef>
-          <a:fillRef idx="0">
-            <a:schemeClr val="accent1"/>
-          </a:fillRef>
-          <a:effectRef idx="1">
-            <a:schemeClr val="accent1"/>
-          </a:effectRef>
-          <a:fontRef idx="minor">
-            <a:schemeClr val="tx1"/>
-          </a:fontRef>
-        </p:style>
-      </p:cxnSp>
-      <p:sp>
-        <p:nvSpPr>
-          <p:cNvPr id="15" name="Rectangle 14"/>
-          <p:cNvSpPr/>
-          <p:nvPr/>
-        </p:nvSpPr>
-        <p:spPr>
-          <a:xfrm>
-            <a:off x="7303770" y="2743200"/>
-            <a:ext cx="1874519" cy="1005840"/>
-          </a:xfrm>
-          <a:prstGeom prst="rect">
-            <a:avLst/>
-          </a:prstGeom>
-          <a:solidFill>
-            <a:srgbClr val="FFFFFF"/>
-          </a:solidFill>
-          <a:ln w="15875">
-            <a:solidFill>
-              <a:srgbClr val="0B2D5B"/>
-            </a:solidFill>
-          </a:ln>
-          <a:effectLst/>
-        </p:spPr>
-        <p:style>
-          <a:lnRef idx="1">
-            <a:schemeClr val="accent1"/>
-          </a:lnRef>
-          <a:fillRef idx="3">
-            <a:schemeClr val="accent1"/>
-          </a:fillRef>
-          <a:effectRef idx="2">
-            <a:schemeClr val="accent1"/>
-          </a:effectRef>
-          <a:fontRef idx="minor">
-            <a:schemeClr val="lt1"/>
-          </a:fontRef>
-        </p:style>
-        <p:txBody>
-          <a:bodyPr rtlCol="0" anchor="ctr"/>
-          <a:lstStyle/>
-          <a:p>
-            <a:pPr algn="ctr"/>
-          </a:p>
-        </p:txBody>
-      </p:sp>
-      <p:sp>
-        <p:nvSpPr>
-          <p:cNvPr id="16" name="TextBox 15"/>
-          <p:cNvSpPr txBox="1"/>
-          <p:nvPr/>
-        </p:nvSpPr>
-        <p:spPr>
-          <a:xfrm>
-            <a:off x="7303770" y="2743200"/>
-            <a:ext cx="1874519" cy="1005840"/>
-          </a:xfrm>
-          <a:prstGeom prst="rect">
-            <a:avLst/>
-          </a:prstGeom>
-          <a:noFill/>
-        </p:spPr>
-        <p:txBody>
-          <a:bodyPr wrap="square" anchor="ctr" lIns="0" rIns="0" tIns="0" bIns="0">
-            <a:spAutoFit/>
-          </a:bodyPr>
-          <a:lstStyle/>
-          <a:p>
-            <a:pPr algn="ctr">
-              <a:spcAft>
-                <a:spcPts val="900"/>
-              </a:spcAft>
-            </a:pPr>
-            <a:r>
-              <a:rPr sz="2000" b="1" i="0">
-                <a:solidFill>
-                  <a:srgbClr val="1C1B19"/>
-                </a:solidFill>
-                <a:latin typeface="Source Serif 4"/>
-              </a:rPr>
-              <a:t>Wide awake Sunday</a:t>
-            </a:r>
-          </a:p>
-        </p:txBody>
-      </p:sp>
-      <p:cxnSp>
-        <p:nvCxnSpPr>
-          <p:cNvPr id="17" name="Connector 16"/>
-          <p:cNvCxnSpPr/>
-          <p:nvPr/>
-        </p:nvCxnSpPr>
-        <p:spPr>
-          <a:xfrm>
-            <a:off x="9233154" y="3246120"/>
-            <a:ext cx="176022" cy="0"/>
-          </a:xfrm>
-          <a:prstGeom prst="line">
-            <a:avLst/>
-          </a:prstGeom>
-          <a:ln w="31750">
-            <a:solidFill>
-              <a:srgbClr val="F47B20"/>
-            </a:solidFill>
-            <a:tailEnd type="triangle"/>
-          </a:ln>
-        </p:spPr>
-        <p:style>
-          <a:lnRef idx="2">
-            <a:schemeClr val="accent1"/>
-          </a:lnRef>
-          <a:fillRef idx="0">
-            <a:schemeClr val="accent1"/>
-          </a:fillRef>
-          <a:effectRef idx="1">
-            <a:schemeClr val="accent1"/>
-          </a:effectRef>
-          <a:fontRef idx="minor">
-            <a:schemeClr val="tx1"/>
-          </a:fontRef>
-        </p:style>
-      </p:cxnSp>
-      <p:sp>
-        <p:nvSpPr>
-          <p:cNvPr id="18" name="Rectangle 17"/>
-          <p:cNvSpPr/>
-          <p:nvPr/>
-        </p:nvSpPr>
-        <p:spPr>
-          <a:xfrm>
-            <a:off x="9464040" y="2743200"/>
-            <a:ext cx="1874519" cy="1005840"/>
-          </a:xfrm>
-          <a:prstGeom prst="rect">
-            <a:avLst/>
-          </a:prstGeom>
-          <a:solidFill>
-            <a:srgbClr val="FFFFFF"/>
-          </a:solidFill>
-          <a:ln w="15875">
-            <a:solidFill>
-              <a:srgbClr val="0B2D5B"/>
-            </a:solidFill>
-          </a:ln>
-          <a:effectLst/>
-        </p:spPr>
-        <p:style>
-          <a:lnRef idx="1">
-            <a:schemeClr val="accent1"/>
-          </a:lnRef>
-          <a:fillRef idx="3">
-            <a:schemeClr val="accent1"/>
-          </a:fillRef>
-          <a:effectRef idx="2">
-            <a:schemeClr val="accent1"/>
-          </a:effectRef>
-          <a:fontRef idx="minor">
-            <a:schemeClr val="lt1"/>
-          </a:fontRef>
-        </p:style>
-        <p:txBody>
-          <a:bodyPr rtlCol="0" anchor="ctr"/>
-          <a:lstStyle/>
-          <a:p>
-            <a:pPr algn="ctr"/>
-          </a:p>
-        </p:txBody>
-      </p:sp>
-      <p:sp>
-        <p:nvSpPr>
-          <p:cNvPr id="19" name="TextBox 18"/>
-          <p:cNvSpPr txBox="1"/>
-          <p:nvPr/>
-        </p:nvSpPr>
-        <p:spPr>
-          <a:xfrm>
-            <a:off x="9464040" y="2743200"/>
-            <a:ext cx="1874519" cy="1005840"/>
-          </a:xfrm>
-          <a:prstGeom prst="rect">
-            <a:avLst/>
-          </a:prstGeom>
-          <a:noFill/>
-        </p:spPr>
-        <p:txBody>
-          <a:bodyPr wrap="square" anchor="ctr" lIns="0" rIns="0" tIns="0" bIns="0">
-            <a:spAutoFit/>
-          </a:bodyPr>
-          <a:lstStyle/>
-          <a:p>
-            <a:pPr algn="ctr">
-              <a:spcAft>
-                <a:spcPts val="900"/>
-              </a:spcAft>
-            </a:pPr>
-            <a:r>
-              <a:rPr sz="2000" b="1" i="0">
-                <a:solidFill>
-                  <a:srgbClr val="1C1B19"/>
-                </a:solidFill>
-                <a:latin typeface="Source Serif 4"/>
-              </a:rPr>
-              <a:t>Wrecked Monday</a:t>
-            </a:r>
-          </a:p>
-        </p:txBody>
-      </p:sp>
-      <p:sp>
-        <p:nvSpPr>
-          <p:cNvPr id="20" name="TextBox 19"/>
-          <p:cNvSpPr txBox="1"/>
-          <p:nvPr/>
-        </p:nvSpPr>
-        <p:spPr>
-          <a:xfrm>
-            <a:off x="822960" y="4160520"/>
-            <a:ext cx="10515600" cy="457200"/>
+            <a:off x="1188720" y="5120640"/>
+            <a:ext cx="10058400" cy="914400"/>
           </a:xfrm>
           <a:prstGeom prst="rect">
             <a:avLst/>
@@ -5590,58 +4865,19 @@
           </a:bodyPr>
           <a:lstStyle/>
           <a:p>
-            <a:pPr algn="ctr">
+            <a:pPr algn="l">
               <a:spcAft>
                 <a:spcPts val="810"/>
               </a:spcAft>
             </a:pPr>
             <a:r>
-              <a:rPr sz="1800" b="1" i="0">
-                <a:solidFill>
-                  <a:srgbClr val="F47B20"/>
+              <a:rPr sz="1800" b="0" i="0">
+                <a:solidFill>
+                  <a:srgbClr val="5D5A54"/>
                 </a:solidFill>
                 <a:latin typeface="Inter Tight"/>
               </a:rPr>
-              <a:t>↺  and around again</a:t>
-            </a:r>
-          </a:p>
-        </p:txBody>
-      </p:sp>
-      <p:sp>
-        <p:nvSpPr>
-          <p:cNvPr id="21" name="TextBox 20"/>
-          <p:cNvSpPr txBox="1"/>
-          <p:nvPr/>
-        </p:nvSpPr>
-        <p:spPr>
-          <a:xfrm>
-            <a:off x="822960" y="4846320"/>
-            <a:ext cx="10515600" cy="1188720"/>
-          </a:xfrm>
-          <a:prstGeom prst="rect">
-            <a:avLst/>
-          </a:prstGeom>
-          <a:noFill/>
-        </p:spPr>
-        <p:txBody>
-          <a:bodyPr wrap="square" anchor="t" lIns="0" rIns="0" tIns="0" bIns="0">
-            <a:spAutoFit/>
-          </a:bodyPr>
-          <a:lstStyle/>
-          <a:p>
-            <a:pPr algn="ctr">
-              <a:spcAft>
-                <a:spcPts val="900"/>
-              </a:spcAft>
-            </a:pPr>
-            <a:r>
-              <a:rPr sz="2000" b="0" i="1">
-                <a:solidFill>
-                  <a:srgbClr val="5D5A54"/>
-                </a:solidFill>
-                <a:latin typeface="Source Serif 4"/>
-              </a:rPr>
-              <a:t>A little extra sleep helps. Sleeping into the afternoon is like flying a few time zones west.</a:t>
+              <a:t>Private. Write your wake-up time, your lights-out, and when you'd start winding down.</a:t>
             </a:r>
           </a:p>
         </p:txBody>
@@ -5750,7 +4986,7 @@
                 </a:solidFill>
                 <a:latin typeface="Inter Tight"/>
               </a:rPr>
-              <a:t>THE LEVERS</a:t>
+              <a:t>BEFORE YOU GO</a:t>
             </a:r>
           </a:p>
         </p:txBody>
@@ -5802,8 +5038,8 @@
         </p:nvSpPr>
         <p:spPr>
           <a:xfrm>
-            <a:off x="822960" y="1005840"/>
-            <a:ext cx="10515600" cy="1097280"/>
+            <a:off x="822960" y="1188720"/>
+            <a:ext cx="10515600" cy="914400"/>
           </a:xfrm>
           <a:prstGeom prst="rect">
             <a:avLst/>
@@ -5828,7 +5064,7 @@
                 </a:solidFill>
                 <a:latin typeface="Source Serif 4"/>
               </a:rPr>
-              <a:t>What you control, even when your schedule doesn't bend</a:t>
+              <a:t>Exit card</a:t>
             </a:r>
           </a:p>
         </p:txBody>
@@ -5841,8 +5077,8 @@
         </p:nvSpPr>
         <p:spPr>
           <a:xfrm>
-            <a:off x="822960" y="2194560"/>
-            <a:ext cx="548640" cy="1005840"/>
+            <a:off x="822960" y="2286000"/>
+            <a:ext cx="10515600" cy="1463040"/>
           </a:xfrm>
           <a:prstGeom prst="rect">
             <a:avLst/>
@@ -5857,31 +5093,77 @@
           <a:p>
             <a:pPr algn="l">
               <a:spcAft>
-                <a:spcPts val="1170"/>
-              </a:spcAft>
-            </a:pPr>
-            <a:r>
-              <a:rPr sz="2600" b="1" i="0">
-                <a:solidFill>
-                  <a:srgbClr val="F47B20"/>
-                </a:solidFill>
-                <a:latin typeface="Source Serif 4"/>
-              </a:rPr>
-              <a:t>1</a:t>
-            </a:r>
-          </a:p>
-        </p:txBody>
-      </p:sp>
-      <p:sp>
-        <p:nvSpPr>
-          <p:cNvPr id="7" name="TextBox 6"/>
+                <a:spcPts val="1080"/>
+              </a:spcAft>
+            </a:pPr>
+            <a:r>
+              <a:rPr sz="2400" b="0" i="0">
+                <a:solidFill>
+                  <a:srgbClr val="1C1B19"/>
+                </a:solidFill>
+                <a:latin typeface="Source Serif 4"/>
+              </a:rPr>
+              <a:t>One lever you'll try this week, and which night you'll start.</a:t>
+            </a:r>
+          </a:p>
+        </p:txBody>
+      </p:sp>
+      <p:sp>
+        <p:nvSpPr>
+          <p:cNvPr id="7" name="Rectangle 6"/>
+          <p:cNvSpPr/>
+          <p:nvPr/>
+        </p:nvSpPr>
+        <p:spPr>
+          <a:xfrm>
+            <a:off x="822960" y="4023360"/>
+            <a:ext cx="10515600" cy="1371600"/>
+          </a:xfrm>
+          <a:prstGeom prst="rect">
+            <a:avLst/>
+          </a:prstGeom>
+          <a:solidFill>
+            <a:srgbClr val="FFFFFF"/>
+          </a:solidFill>
+          <a:ln w="15875">
+            <a:solidFill>
+              <a:srgbClr val="1C1B19"/>
+            </a:solidFill>
+          </a:ln>
+          <a:effectLst/>
+        </p:spPr>
+        <p:style>
+          <a:lnRef idx="1">
+            <a:schemeClr val="accent1"/>
+          </a:lnRef>
+          <a:fillRef idx="3">
+            <a:schemeClr val="accent1"/>
+          </a:fillRef>
+          <a:effectRef idx="2">
+            <a:schemeClr val="accent1"/>
+          </a:effectRef>
+          <a:fontRef idx="minor">
+            <a:schemeClr val="lt1"/>
+          </a:fontRef>
+        </p:style>
+        <p:txBody>
+          <a:bodyPr rtlCol="0" anchor="ctr"/>
+          <a:lstStyle/>
+          <a:p>
+            <a:pPr algn="ctr"/>
+          </a:p>
+        </p:txBody>
+      </p:sp>
+      <p:sp>
+        <p:nvSpPr>
+          <p:cNvPr id="8" name="TextBox 7"/>
           <p:cNvSpPr txBox="1"/>
           <p:nvPr/>
         </p:nvSpPr>
         <p:spPr>
           <a:xfrm>
-            <a:off x="1463040" y="2231136"/>
-            <a:ext cx="9875520" cy="1005840"/>
+            <a:off x="1097280" y="4206240"/>
+            <a:ext cx="10058400" cy="365760"/>
           </a:xfrm>
           <a:prstGeom prst="rect">
             <a:avLst/>
@@ -5896,47 +5178,31 @@
           <a:p>
             <a:pPr algn="l">
               <a:spcAft>
-                <a:spcPts val="945"/>
-              </a:spcAft>
-            </a:pPr>
-            <a:r>
-              <a:rPr sz="2100" b="1" i="0">
-                <a:solidFill>
-                  <a:srgbClr val="1C1B19"/>
-                </a:solidFill>
-                <a:latin typeface="Source Serif 4"/>
-              </a:rPr>
-              <a:t>Morning light.</a:t>
-            </a:r>
-          </a:p>
-          <a:p>
-            <a:pPr algn="l">
-              <a:spcAft>
-                <a:spcPts val="945"/>
-              </a:spcAft>
-            </a:pPr>
-            <a:r>
-              <a:rPr sz="1600" b="0" i="0">
-                <a:solidFill>
-                  <a:srgbClr val="5D5A54"/>
-                </a:solidFill>
-                <a:latin typeface="Source Serif 4"/>
-              </a:rPr>
-              <a:t>Outside if you can, in the first hour after waking.</a:t>
-            </a:r>
-          </a:p>
-        </p:txBody>
-      </p:sp>
-      <p:sp>
-        <p:nvSpPr>
-          <p:cNvPr id="8" name="TextBox 7"/>
+                <a:spcPts val="540"/>
+              </a:spcAft>
+            </a:pPr>
+            <a:r>
+              <a:rPr sz="1200" b="1" i="0">
+                <a:solidFill>
+                  <a:srgbClr val="0B2D5B"/>
+                </a:solidFill>
+                <a:latin typeface="Inter Tight"/>
+              </a:rPr>
+              <a:t>ON THE BVR DINER MENU</a:t>
+            </a:r>
+          </a:p>
+        </p:txBody>
+      </p:sp>
+      <p:sp>
+        <p:nvSpPr>
+          <p:cNvPr id="9" name="TextBox 8"/>
           <p:cNvSpPr txBox="1"/>
           <p:nvPr/>
         </p:nvSpPr>
         <p:spPr>
           <a:xfrm>
-            <a:off x="822960" y="3200400"/>
-            <a:ext cx="548640" cy="1005840"/>
+            <a:off x="1097280" y="4617720"/>
+            <a:ext cx="10058400" cy="640080"/>
           </a:xfrm>
           <a:prstGeom prst="rect">
             <a:avLst/>
@@ -5951,260 +5217,17 @@
           <a:p>
             <a:pPr algn="l">
               <a:spcAft>
-                <a:spcPts val="1170"/>
-              </a:spcAft>
-            </a:pPr>
-            <a:r>
-              <a:rPr sz="2600" b="1" i="0">
-                <a:solidFill>
-                  <a:srgbClr val="F47B20"/>
-                </a:solidFill>
-                <a:latin typeface="Source Serif 4"/>
-              </a:rPr>
-              <a:t>2</a:t>
-            </a:r>
-          </a:p>
-        </p:txBody>
-      </p:sp>
-      <p:sp>
-        <p:nvSpPr>
-          <p:cNvPr id="9" name="TextBox 8"/>
-          <p:cNvSpPr txBox="1"/>
-          <p:nvPr/>
-        </p:nvSpPr>
-        <p:spPr>
-          <a:xfrm>
-            <a:off x="1463040" y="3236976"/>
-            <a:ext cx="9875520" cy="1005840"/>
-          </a:xfrm>
-          <a:prstGeom prst="rect">
-            <a:avLst/>
-          </a:prstGeom>
-          <a:noFill/>
-        </p:spPr>
-        <p:txBody>
-          <a:bodyPr wrap="square" anchor="t" lIns="0" rIns="0" tIns="0" bIns="0">
-            <a:spAutoFit/>
-          </a:bodyPr>
-          <a:lstStyle/>
-          <a:p>
-            <a:pPr algn="l">
-              <a:spcAft>
-                <a:spcPts val="945"/>
-              </a:spcAft>
-            </a:pPr>
-            <a:r>
-              <a:rPr sz="2100" b="1" i="0">
+                <a:spcPts val="900"/>
+              </a:spcAft>
+            </a:pPr>
+            <a:r>
+              <a:rPr sz="2000" b="0" i="0">
                 <a:solidFill>
                   <a:srgbClr val="1C1B19"/>
                 </a:solidFill>
-                <a:latin typeface="Source Serif 4"/>
-              </a:rPr>
-              <a:t>A wake-up anchor.</a:t>
-            </a:r>
-          </a:p>
-          <a:p>
-            <a:pPr algn="l">
-              <a:spcAft>
-                <a:spcPts val="945"/>
-              </a:spcAft>
-            </a:pPr>
-            <a:r>
-              <a:rPr sz="1600" b="0" i="0">
-                <a:solidFill>
-                  <a:srgbClr val="5D5A54"/>
-                </a:solidFill>
-                <a:latin typeface="Source Serif 4"/>
-              </a:rPr>
-              <a:t>Weekends within about two hours of school days.</a:t>
-            </a:r>
-          </a:p>
-        </p:txBody>
-      </p:sp>
-      <p:sp>
-        <p:nvSpPr>
-          <p:cNvPr id="10" name="TextBox 9"/>
-          <p:cNvSpPr txBox="1"/>
-          <p:nvPr/>
-        </p:nvSpPr>
-        <p:spPr>
-          <a:xfrm>
-            <a:off x="822960" y="4206240"/>
-            <a:ext cx="548640" cy="1005840"/>
-          </a:xfrm>
-          <a:prstGeom prst="rect">
-            <a:avLst/>
-          </a:prstGeom>
-          <a:noFill/>
-        </p:spPr>
-        <p:txBody>
-          <a:bodyPr wrap="square" anchor="t" lIns="0" rIns="0" tIns="0" bIns="0">
-            <a:spAutoFit/>
-          </a:bodyPr>
-          <a:lstStyle/>
-          <a:p>
-            <a:pPr algn="l">
-              <a:spcAft>
-                <a:spcPts val="1170"/>
-              </a:spcAft>
-            </a:pPr>
-            <a:r>
-              <a:rPr sz="2600" b="1" i="0">
-                <a:solidFill>
-                  <a:srgbClr val="F47B20"/>
-                </a:solidFill>
-                <a:latin typeface="Source Serif 4"/>
-              </a:rPr>
-              <a:t>3</a:t>
-            </a:r>
-          </a:p>
-        </p:txBody>
-      </p:sp>
-      <p:sp>
-        <p:nvSpPr>
-          <p:cNvPr id="11" name="TextBox 10"/>
-          <p:cNvSpPr txBox="1"/>
-          <p:nvPr/>
-        </p:nvSpPr>
-        <p:spPr>
-          <a:xfrm>
-            <a:off x="1463040" y="4242816"/>
-            <a:ext cx="9875520" cy="1005840"/>
-          </a:xfrm>
-          <a:prstGeom prst="rect">
-            <a:avLst/>
-          </a:prstGeom>
-          <a:noFill/>
-        </p:spPr>
-        <p:txBody>
-          <a:bodyPr wrap="square" anchor="t" lIns="0" rIns="0" tIns="0" bIns="0">
-            <a:spAutoFit/>
-          </a:bodyPr>
-          <a:lstStyle/>
-          <a:p>
-            <a:pPr algn="l">
-              <a:spcAft>
-                <a:spcPts val="945"/>
-              </a:spcAft>
-            </a:pPr>
-            <a:r>
-              <a:rPr sz="2100" b="1" i="0">
-                <a:solidFill>
-                  <a:srgbClr val="1C1B19"/>
-                </a:solidFill>
-                <a:latin typeface="Source Serif 4"/>
-              </a:rPr>
-              <a:t>A caffeine cutoff.</a:t>
-            </a:r>
-          </a:p>
-          <a:p>
-            <a:pPr algn="l">
-              <a:spcAft>
-                <a:spcPts val="945"/>
-              </a:spcAft>
-            </a:pPr>
-            <a:r>
-              <a:rPr sz="1600" b="0" i="0">
-                <a:solidFill>
-                  <a:srgbClr val="5D5A54"/>
-                </a:solidFill>
-                <a:latin typeface="Source Serif 4"/>
-              </a:rPr>
-              <a:t>Stop by early afternoon. It lasts longer than you feel.</a:t>
-            </a:r>
-          </a:p>
-        </p:txBody>
-      </p:sp>
-      <p:sp>
-        <p:nvSpPr>
-          <p:cNvPr id="12" name="TextBox 11"/>
-          <p:cNvSpPr txBox="1"/>
-          <p:nvPr/>
-        </p:nvSpPr>
-        <p:spPr>
-          <a:xfrm>
-            <a:off x="822960" y="5212080"/>
-            <a:ext cx="548640" cy="1005840"/>
-          </a:xfrm>
-          <a:prstGeom prst="rect">
-            <a:avLst/>
-          </a:prstGeom>
-          <a:noFill/>
-        </p:spPr>
-        <p:txBody>
-          <a:bodyPr wrap="square" anchor="t" lIns="0" rIns="0" tIns="0" bIns="0">
-            <a:spAutoFit/>
-          </a:bodyPr>
-          <a:lstStyle/>
-          <a:p>
-            <a:pPr algn="l">
-              <a:spcAft>
-                <a:spcPts val="1170"/>
-              </a:spcAft>
-            </a:pPr>
-            <a:r>
-              <a:rPr sz="2600" b="1" i="0">
-                <a:solidFill>
-                  <a:srgbClr val="F47B20"/>
-                </a:solidFill>
-                <a:latin typeface="Source Serif 4"/>
-              </a:rPr>
-              <a:t>4</a:t>
-            </a:r>
-          </a:p>
-        </p:txBody>
-      </p:sp>
-      <p:sp>
-        <p:nvSpPr>
-          <p:cNvPr id="13" name="TextBox 12"/>
-          <p:cNvSpPr txBox="1"/>
-          <p:nvPr/>
-        </p:nvSpPr>
-        <p:spPr>
-          <a:xfrm>
-            <a:off x="1463040" y="5248656"/>
-            <a:ext cx="9875520" cy="1005840"/>
-          </a:xfrm>
-          <a:prstGeom prst="rect">
-            <a:avLst/>
-          </a:prstGeom>
-          <a:noFill/>
-        </p:spPr>
-        <p:txBody>
-          <a:bodyPr wrap="square" anchor="t" lIns="0" rIns="0" tIns="0" bIns="0">
-            <a:spAutoFit/>
-          </a:bodyPr>
-          <a:lstStyle/>
-          <a:p>
-            <a:pPr algn="l">
-              <a:spcAft>
-                <a:spcPts val="945"/>
-              </a:spcAft>
-            </a:pPr>
-            <a:r>
-              <a:rPr sz="2100" b="1" i="0">
-                <a:solidFill>
-                  <a:srgbClr val="1C1B19"/>
-                </a:solidFill>
-                <a:latin typeface="Source Serif 4"/>
-              </a:rPr>
-              <a:t>The phone's bedtime.</a:t>
-            </a:r>
-          </a:p>
-          <a:p>
-            <a:pPr algn="l">
-              <a:spcAft>
-                <a:spcPts val="945"/>
-              </a:spcAft>
-            </a:pPr>
-            <a:r>
-              <a:rPr sz="1600" b="0" i="0">
-                <a:solidFill>
-                  <a:srgbClr val="5D5A54"/>
-                </a:solidFill>
-                <a:latin typeface="Source Serif 4"/>
-              </a:rPr>
-              <a:t>Charge it outside your room, or across it on Do Not Disturb.</a:t>
+                <a:latin typeface="Inter Tight"/>
+              </a:rPr>
+              <a:t>https://rmwtoolkit.github.io/bcds-toolkit/running-on-empty-high-school.html</a:t>
             </a:r>
           </a:p>
         </p:txBody>
@@ -6218,6 +5241,2333 @@
 </file>
 
 <file path=ppt/slides/slide12.xml><?xml version="1.0" encoding="utf-8"?>
+<p:sld xmlns:a="http://schemas.openxmlformats.org/drawingml/2006/main" xmlns:p="http://schemas.openxmlformats.org/presentationml/2006/main" xmlns:r="http://schemas.openxmlformats.org/officeDocument/2006/relationships" show="0">
+  <p:cSld>
+    <p:bg>
+      <p:bgPr>
+        <a:solidFill>
+          <a:srgbClr val="EEEBE4"/>
+        </a:solidFill>
+        <a:effectLst/>
+      </p:bgPr>
+    </p:bg>
+    <p:spTree>
+      <p:nvGrpSpPr>
+        <p:cNvPr id="1" name=""/>
+        <p:cNvGrpSpPr/>
+        <p:nvPr/>
+      </p:nvGrpSpPr>
+      <p:grpSpPr/>
+      <p:sp>
+        <p:nvSpPr>
+          <p:cNvPr id="2" name="Rectangle 1"/>
+          <p:cNvSpPr/>
+          <p:nvPr/>
+        </p:nvSpPr>
+        <p:spPr>
+          <a:xfrm>
+            <a:off x="0" y="0"/>
+            <a:ext cx="12191695" cy="384048"/>
+          </a:xfrm>
+          <a:prstGeom prst="rect">
+            <a:avLst/>
+          </a:prstGeom>
+          <a:solidFill>
+            <a:srgbClr val="0B2D5B"/>
+          </a:solidFill>
+          <a:ln>
+            <a:noFill/>
+          </a:ln>
+          <a:effectLst/>
+        </p:spPr>
+        <p:style>
+          <a:lnRef idx="1">
+            <a:schemeClr val="accent1"/>
+          </a:lnRef>
+          <a:fillRef idx="3">
+            <a:schemeClr val="accent1"/>
+          </a:fillRef>
+          <a:effectRef idx="2">
+            <a:schemeClr val="accent1"/>
+          </a:effectRef>
+          <a:fontRef idx="minor">
+            <a:schemeClr val="lt1"/>
+          </a:fontRef>
+        </p:style>
+        <p:txBody>
+          <a:bodyPr rtlCol="0" anchor="ctr"/>
+          <a:lstStyle/>
+          <a:p>
+            <a:pPr algn="ctr"/>
+          </a:p>
+        </p:txBody>
+      </p:sp>
+      <p:sp>
+        <p:nvSpPr>
+          <p:cNvPr id="3" name="TextBox 2"/>
+          <p:cNvSpPr txBox="1"/>
+          <p:nvPr/>
+        </p:nvSpPr>
+        <p:spPr>
+          <a:xfrm>
+            <a:off x="548640" y="100584"/>
+            <a:ext cx="10972800" cy="274320"/>
+          </a:xfrm>
+          <a:prstGeom prst="rect">
+            <a:avLst/>
+          </a:prstGeom>
+          <a:noFill/>
+        </p:spPr>
+        <p:txBody>
+          <a:bodyPr wrap="square" anchor="t" lIns="0" rIns="0" tIns="0" bIns="0">
+            <a:spAutoFit/>
+          </a:bodyPr>
+          <a:lstStyle/>
+          <a:p>
+            <a:pPr algn="l">
+              <a:spcAft>
+                <a:spcPts val="495"/>
+              </a:spcAft>
+            </a:pPr>
+            <a:r>
+              <a:rPr sz="1100" b="1" i="0">
+                <a:solidFill>
+                  <a:srgbClr val="FFFFFF"/>
+                </a:solidFill>
+                <a:latin typeface="Inter Tight"/>
+              </a:rPr>
+              <a:t>TEACHER PAGE  ·  skipped when you present  ·  Lesson plan</a:t>
+            </a:r>
+          </a:p>
+        </p:txBody>
+      </p:sp>
+      <p:sp>
+        <p:nvSpPr>
+          <p:cNvPr id="4" name="TextBox 3"/>
+          <p:cNvSpPr txBox="1"/>
+          <p:nvPr/>
+        </p:nvSpPr>
+        <p:spPr>
+          <a:xfrm>
+            <a:off x="548640" y="685800"/>
+            <a:ext cx="10972800" cy="731520"/>
+          </a:xfrm>
+          <a:prstGeom prst="rect">
+            <a:avLst/>
+          </a:prstGeom>
+          <a:noFill/>
+        </p:spPr>
+        <p:txBody>
+          <a:bodyPr wrap="square" anchor="t" lIns="0" rIns="0" tIns="0" bIns="0">
+            <a:spAutoFit/>
+          </a:bodyPr>
+          <a:lstStyle/>
+          <a:p>
+            <a:pPr algn="l">
+              <a:spcAft>
+                <a:spcPts val="1530"/>
+              </a:spcAft>
+            </a:pPr>
+            <a:r>
+              <a:rPr sz="3400" b="1" i="0">
+                <a:solidFill>
+                  <a:srgbClr val="1C1B19"/>
+                </a:solidFill>
+                <a:latin typeface="Source Serif 4"/>
+              </a:rPr>
+              <a:t>Running on Empty</a:t>
+            </a:r>
+          </a:p>
+        </p:txBody>
+      </p:sp>
+      <p:sp>
+        <p:nvSpPr>
+          <p:cNvPr id="5" name="TextBox 4"/>
+          <p:cNvSpPr txBox="1"/>
+          <p:nvPr/>
+        </p:nvSpPr>
+        <p:spPr>
+          <a:xfrm>
+            <a:off x="548640" y="1325880"/>
+            <a:ext cx="10972800" cy="365760"/>
+          </a:xfrm>
+          <a:prstGeom prst="rect">
+            <a:avLst/>
+          </a:prstGeom>
+          <a:noFill/>
+        </p:spPr>
+        <p:txBody>
+          <a:bodyPr wrap="square" anchor="t" lIns="0" rIns="0" tIns="0" bIns="0">
+            <a:spAutoFit/>
+          </a:bodyPr>
+          <a:lstStyle/>
+          <a:p>
+            <a:pPr algn="l">
+              <a:spcAft>
+                <a:spcPts val="630"/>
+              </a:spcAft>
+            </a:pPr>
+            <a:r>
+              <a:rPr sz="1400" b="0" i="0">
+                <a:solidFill>
+                  <a:srgbClr val="5D5A54"/>
+                </a:solidFill>
+                <a:latin typeface="Inter Tight"/>
+              </a:rPr>
+              <a:t>Upper School  ·  45 minutes (20-minute advisory version below)  ·  9th grade advisory, health class, or a counselor-led group</a:t>
+            </a:r>
+          </a:p>
+        </p:txBody>
+      </p:sp>
+      <p:sp>
+        <p:nvSpPr>
+          <p:cNvPr id="6" name="TextBox 5"/>
+          <p:cNvSpPr txBox="1"/>
+          <p:nvPr/>
+        </p:nvSpPr>
+        <p:spPr>
+          <a:xfrm>
+            <a:off x="548640" y="1828800"/>
+            <a:ext cx="5120640" cy="4389120"/>
+          </a:xfrm>
+          <a:prstGeom prst="rect">
+            <a:avLst/>
+          </a:prstGeom>
+          <a:noFill/>
+        </p:spPr>
+        <p:txBody>
+          <a:bodyPr wrap="square" anchor="t" lIns="0" rIns="0" tIns="0" bIns="0">
+            <a:spAutoFit/>
+          </a:bodyPr>
+          <a:lstStyle/>
+          <a:p>
+            <a:pPr algn="l">
+              <a:spcAft>
+                <a:spcPts val="675"/>
+              </a:spcAft>
+            </a:pPr>
+            <a:r>
+              <a:rPr sz="1100" b="1" i="0">
+                <a:solidFill>
+                  <a:srgbClr val="0B2D5B"/>
+                </a:solidFill>
+                <a:latin typeface="Inter Tight"/>
+              </a:rPr>
+              <a:t>GOAL</a:t>
+            </a:r>
+          </a:p>
+          <a:p>
+            <a:pPr algn="l">
+              <a:spcAft>
+                <a:spcPts val="675"/>
+              </a:spcAft>
+            </a:pPr>
+            <a:r>
+              <a:rPr sz="1500" b="0" i="0">
+                <a:solidFill>
+                  <a:srgbClr val="1C1B19"/>
+                </a:solidFill>
+                <a:latin typeface="Source Serif 4"/>
+              </a:rPr>
+              <a:t>Students can explain why their sleep clock shifts later in puberty, name what a short night costs (memory, mood, judgment, safety), and pick one lever they control, like morning light, a wake-up anchor, a caffeine cutoff, or the phone's bedtime. Nobody should leave feeling lectured about being lazy.</a:t>
+            </a:r>
+          </a:p>
+          <a:p>
+            <a:pPr algn="l">
+              <a:spcAft>
+                <a:spcPts val="675"/>
+              </a:spcAft>
+            </a:pPr>
+            <a:r>
+              <a:rPr sz="1500" b="0" i="0">
+                <a:solidFill>
+                  <a:srgbClr val="1C1B19"/>
+                </a:solidFill>
+                <a:latin typeface="Source Serif 4"/>
+              </a:rPr>
+              <a:t/>
+            </a:r>
+          </a:p>
+          <a:p>
+            <a:pPr algn="l">
+              <a:spcAft>
+                <a:spcPts val="675"/>
+              </a:spcAft>
+            </a:pPr>
+            <a:r>
+              <a:rPr sz="1100" b="1" i="0">
+                <a:solidFill>
+                  <a:srgbClr val="0B2D5B"/>
+                </a:solidFill>
+                <a:latin typeface="Inter Tight"/>
+              </a:rPr>
+              <a:t>MATERIALS</a:t>
+            </a:r>
+          </a:p>
+          <a:p>
+            <a:pPr algn="l">
+              <a:spcAft>
+                <a:spcPts val="675"/>
+              </a:spcAft>
+            </a:pPr>
+            <a:r>
+              <a:rPr sz="1500" b="0" i="0">
+                <a:solidFill>
+                  <a:srgbClr val="1C1B19"/>
+                </a:solidFill>
+                <a:latin typeface="Source Serif 4"/>
+              </a:rPr>
+              <a:t>Scrap paper or index cards, one per student</a:t>
+            </a:r>
+          </a:p>
+          <a:p>
+            <a:pPr algn="l">
+              <a:spcAft>
+                <a:spcPts val="675"/>
+              </a:spcAft>
+            </a:pPr>
+            <a:r>
+              <a:rPr sz="1500" b="0" i="0">
+                <a:solidFill>
+                  <a:srgbClr val="1C1B19"/>
+                </a:solidFill>
+                <a:latin typeface="Source Serif 4"/>
+              </a:rPr>
+              <a:t>Board space for the weekend loop</a:t>
+            </a:r>
+          </a:p>
+          <a:p>
+            <a:pPr algn="l">
+              <a:spcAft>
+                <a:spcPts val="675"/>
+              </a:spcAft>
+            </a:pPr>
+            <a:r>
+              <a:rPr sz="1500" b="0" i="0">
+                <a:solidFill>
+                  <a:srgbClr val="1C1B19"/>
+                </a:solidFill>
+                <a:latin typeface="Source Serif 4"/>
+              </a:rPr>
+              <a:t>The take-home link (last slide) to share after class</a:t>
+            </a:r>
+          </a:p>
+        </p:txBody>
+      </p:sp>
+      <p:sp>
+        <p:nvSpPr>
+          <p:cNvPr id="7" name="TextBox 6"/>
+          <p:cNvSpPr txBox="1"/>
+          <p:nvPr/>
+        </p:nvSpPr>
+        <p:spPr>
+          <a:xfrm>
+            <a:off x="6126480" y="1828800"/>
+            <a:ext cx="5486400" cy="4389120"/>
+          </a:xfrm>
+          <a:prstGeom prst="rect">
+            <a:avLst/>
+          </a:prstGeom>
+          <a:noFill/>
+        </p:spPr>
+        <p:txBody>
+          <a:bodyPr wrap="square" anchor="t" lIns="0" rIns="0" tIns="0" bIns="0">
+            <a:spAutoFit/>
+          </a:bodyPr>
+          <a:lstStyle/>
+          <a:p>
+            <a:pPr algn="l">
+              <a:spcAft>
+                <a:spcPts val="630"/>
+              </a:spcAft>
+            </a:pPr>
+            <a:r>
+              <a:rPr sz="1100" b="1" i="0">
+                <a:solidFill>
+                  <a:srgbClr val="0B2D5B"/>
+                </a:solidFill>
+                <a:latin typeface="Inter Tight"/>
+              </a:rPr>
+              <a:t>FLOW</a:t>
+            </a:r>
+          </a:p>
+          <a:p>
+            <a:pPr algn="l">
+              <a:spcAft>
+                <a:spcPts val="630"/>
+              </a:spcAft>
+            </a:pPr>
+            <a:r>
+              <a:rPr sz="1300" b="1" i="0">
+                <a:solidFill>
+                  <a:srgbClr val="F47B20"/>
+                </a:solidFill>
+                <a:latin typeface="Inter Tight"/>
+              </a:rPr>
+              <a:t>5 min   </a:t>
+            </a:r>
+            <a:r>
+              <a:rPr sz="1400" b="0" i="0">
+                <a:solidFill>
+                  <a:srgbClr val="1C1B19"/>
+                </a:solidFill>
+                <a:latin typeface="Source Serif 4"/>
+              </a:rPr>
+              <a:t>Last night's sleep (anonymous tally)</a:t>
+            </a:r>
+          </a:p>
+          <a:p>
+            <a:pPr algn="l">
+              <a:spcAft>
+                <a:spcPts val="630"/>
+              </a:spcAft>
+            </a:pPr>
+            <a:r>
+              <a:rPr sz="1300" b="1" i="0">
+                <a:solidFill>
+                  <a:srgbClr val="F47B20"/>
+                </a:solidFill>
+                <a:latin typeface="Inter Tight"/>
+              </a:rPr>
+              <a:t>7 min   </a:t>
+            </a:r>
+            <a:r>
+              <a:rPr sz="1400" b="0" i="0">
+                <a:solidFill>
+                  <a:srgbClr val="1C1B19"/>
+                </a:solidFill>
+                <a:latin typeface="Source Serif 4"/>
+              </a:rPr>
+              <a:t>Your clock really did move</a:t>
+            </a:r>
+          </a:p>
+          <a:p>
+            <a:pPr algn="l">
+              <a:spcAft>
+                <a:spcPts val="630"/>
+              </a:spcAft>
+            </a:pPr>
+            <a:r>
+              <a:rPr sz="1300" b="1" i="0">
+                <a:solidFill>
+                  <a:srgbClr val="F47B20"/>
+                </a:solidFill>
+                <a:latin typeface="Inter Tight"/>
+              </a:rPr>
+              <a:t>8 min   </a:t>
+            </a:r>
+            <a:r>
+              <a:rPr sz="1400" b="0" i="0">
+                <a:solidFill>
+                  <a:srgbClr val="1C1B19"/>
+                </a:solidFill>
+                <a:latin typeface="Source Serif 4"/>
+              </a:rPr>
+              <a:t>What a short night costs, and why you stop noticing</a:t>
+            </a:r>
+          </a:p>
+          <a:p>
+            <a:pPr algn="l">
+              <a:spcAft>
+                <a:spcPts val="630"/>
+              </a:spcAft>
+            </a:pPr>
+            <a:r>
+              <a:rPr sz="1300" b="1" i="0">
+                <a:solidFill>
+                  <a:srgbClr val="F47B20"/>
+                </a:solidFill>
+                <a:latin typeface="Inter Tight"/>
+              </a:rPr>
+              <a:t>5 min   </a:t>
+            </a:r>
+            <a:r>
+              <a:rPr sz="1400" b="0" i="0">
+                <a:solidFill>
+                  <a:srgbClr val="1C1B19"/>
+                </a:solidFill>
+                <a:latin typeface="Source Serif 4"/>
+              </a:rPr>
+              <a:t>The weekend loop</a:t>
+            </a:r>
+          </a:p>
+          <a:p>
+            <a:pPr algn="l">
+              <a:spcAft>
+                <a:spcPts val="630"/>
+              </a:spcAft>
+            </a:pPr>
+            <a:r>
+              <a:rPr sz="1300" b="1" i="0">
+                <a:solidFill>
+                  <a:srgbClr val="F47B20"/>
+                </a:solidFill>
+                <a:latin typeface="Inter Tight"/>
+              </a:rPr>
+              <a:t>5 min   </a:t>
+            </a:r>
+            <a:r>
+              <a:rPr sz="1400" b="0" i="0">
+                <a:solidFill>
+                  <a:srgbClr val="1C1B19"/>
+                </a:solidFill>
+                <a:latin typeface="Source Serif 4"/>
+              </a:rPr>
+              <a:t>The levers you control</a:t>
+            </a:r>
+          </a:p>
+          <a:p>
+            <a:pPr algn="l">
+              <a:spcAft>
+                <a:spcPts val="630"/>
+              </a:spcAft>
+            </a:pPr>
+            <a:r>
+              <a:rPr sz="1300" b="1" i="0">
+                <a:solidFill>
+                  <a:srgbClr val="F47B20"/>
+                </a:solidFill>
+                <a:latin typeface="Inter Tight"/>
+              </a:rPr>
+              <a:t>8 min   </a:t>
+            </a:r>
+            <a:r>
+              <a:rPr sz="1400" b="0" i="0">
+                <a:solidFill>
+                  <a:srgbClr val="1C1B19"/>
+                </a:solidFill>
+                <a:latin typeface="Source Serif 4"/>
+              </a:rPr>
+              <a:t>Three tired students (small groups)</a:t>
+            </a:r>
+          </a:p>
+          <a:p>
+            <a:pPr algn="l">
+              <a:spcAft>
+                <a:spcPts val="630"/>
+              </a:spcAft>
+            </a:pPr>
+            <a:r>
+              <a:rPr sz="1300" b="1" i="0">
+                <a:solidFill>
+                  <a:srgbClr val="F47B20"/>
+                </a:solidFill>
+                <a:latin typeface="Inter Tight"/>
+              </a:rPr>
+              <a:t>4 min   </a:t>
+            </a:r>
+            <a:r>
+              <a:rPr sz="1400" b="0" i="0">
+                <a:solidFill>
+                  <a:srgbClr val="1C1B19"/>
+                </a:solidFill>
+                <a:latin typeface="Source Serif 4"/>
+              </a:rPr>
+              <a:t>Work backward from your alarm (private)</a:t>
+            </a:r>
+          </a:p>
+          <a:p>
+            <a:pPr algn="l">
+              <a:spcAft>
+                <a:spcPts val="630"/>
+              </a:spcAft>
+            </a:pPr>
+            <a:r>
+              <a:rPr sz="1300" b="1" i="0">
+                <a:solidFill>
+                  <a:srgbClr val="F47B20"/>
+                </a:solidFill>
+                <a:latin typeface="Inter Tight"/>
+              </a:rPr>
+              <a:t>3 min   </a:t>
+            </a:r>
+            <a:r>
+              <a:rPr sz="1400" b="0" i="0">
+                <a:solidFill>
+                  <a:srgbClr val="1C1B19"/>
+                </a:solidFill>
+                <a:latin typeface="Source Serif 4"/>
+              </a:rPr>
+              <a:t>Exit card and take-home link</a:t>
+            </a:r>
+          </a:p>
+          <a:p>
+            <a:pPr algn="l">
+              <a:spcAft>
+                <a:spcPts val="630"/>
+              </a:spcAft>
+            </a:pPr>
+            <a:r>
+              <a:rPr sz="1400" b="0" i="0">
+                <a:solidFill>
+                  <a:srgbClr val="1C1B19"/>
+                </a:solidFill>
+                <a:latin typeface="Source Serif 4"/>
+              </a:rPr>
+              <a:t/>
+            </a:r>
+          </a:p>
+          <a:p>
+            <a:pPr algn="l">
+              <a:spcAft>
+                <a:spcPts val="630"/>
+              </a:spcAft>
+            </a:pPr>
+            <a:r>
+              <a:rPr sz="1100" b="1" i="0">
+                <a:solidFill>
+                  <a:srgbClr val="0B2D5B"/>
+                </a:solidFill>
+                <a:latin typeface="Inter Tight"/>
+              </a:rPr>
+              <a:t>SHORT ON TIME (20-MINUTE ADVISORY)</a:t>
+            </a:r>
+          </a:p>
+          <a:p>
+            <a:pPr algn="l">
+              <a:spcAft>
+                <a:spcPts val="630"/>
+              </a:spcAft>
+            </a:pPr>
+            <a:r>
+              <a:rPr sz="1400" b="0" i="0">
+                <a:solidFill>
+                  <a:srgbClr val="1C1B19"/>
+                </a:solidFill>
+                <a:latin typeface="Source Serif 4"/>
+              </a:rPr>
+              <a:t>Anonymous tally (4), your clock moved and what it costs (6), one of the three tired students (5), work backward from your alarm and the exit card (5). Share the take-home link so students get the rest.</a:t>
+            </a:r>
+          </a:p>
+        </p:txBody>
+      </p:sp>
+    </p:spTree>
+  </p:cSld>
+  <p:clrMapOvr>
+    <a:masterClrMapping/>
+  </p:clrMapOvr>
+</p:sld>
+</file>
+
+<file path=ppt/slides/slide13.xml><?xml version="1.0" encoding="utf-8"?>
+<p:sld xmlns:a="http://schemas.openxmlformats.org/drawingml/2006/main" xmlns:p="http://schemas.openxmlformats.org/presentationml/2006/main" xmlns:r="http://schemas.openxmlformats.org/officeDocument/2006/relationships" show="0">
+  <p:cSld>
+    <p:bg>
+      <p:bgPr>
+        <a:solidFill>
+          <a:srgbClr val="EEEBE4"/>
+        </a:solidFill>
+        <a:effectLst/>
+      </p:bgPr>
+    </p:bg>
+    <p:spTree>
+      <p:nvGrpSpPr>
+        <p:cNvPr id="1" name=""/>
+        <p:cNvGrpSpPr/>
+        <p:nvPr/>
+      </p:nvGrpSpPr>
+      <p:grpSpPr/>
+      <p:sp>
+        <p:nvSpPr>
+          <p:cNvPr id="2" name="Rectangle 1"/>
+          <p:cNvSpPr/>
+          <p:nvPr/>
+        </p:nvSpPr>
+        <p:spPr>
+          <a:xfrm>
+            <a:off x="0" y="0"/>
+            <a:ext cx="12191695" cy="384048"/>
+          </a:xfrm>
+          <a:prstGeom prst="rect">
+            <a:avLst/>
+          </a:prstGeom>
+          <a:solidFill>
+            <a:srgbClr val="0B2D5B"/>
+          </a:solidFill>
+          <a:ln>
+            <a:noFill/>
+          </a:ln>
+          <a:effectLst/>
+        </p:spPr>
+        <p:style>
+          <a:lnRef idx="1">
+            <a:schemeClr val="accent1"/>
+          </a:lnRef>
+          <a:fillRef idx="3">
+            <a:schemeClr val="accent1"/>
+          </a:fillRef>
+          <a:effectRef idx="2">
+            <a:schemeClr val="accent1"/>
+          </a:effectRef>
+          <a:fontRef idx="minor">
+            <a:schemeClr val="lt1"/>
+          </a:fontRef>
+        </p:style>
+        <p:txBody>
+          <a:bodyPr rtlCol="0" anchor="ctr"/>
+          <a:lstStyle/>
+          <a:p>
+            <a:pPr algn="ctr"/>
+          </a:p>
+        </p:txBody>
+      </p:sp>
+      <p:sp>
+        <p:nvSpPr>
+          <p:cNvPr id="3" name="TextBox 2"/>
+          <p:cNvSpPr txBox="1"/>
+          <p:nvPr/>
+        </p:nvSpPr>
+        <p:spPr>
+          <a:xfrm>
+            <a:off x="548640" y="100584"/>
+            <a:ext cx="10972800" cy="274320"/>
+          </a:xfrm>
+          <a:prstGeom prst="rect">
+            <a:avLst/>
+          </a:prstGeom>
+          <a:noFill/>
+        </p:spPr>
+        <p:txBody>
+          <a:bodyPr wrap="square" anchor="t" lIns="0" rIns="0" tIns="0" bIns="0">
+            <a:spAutoFit/>
+          </a:bodyPr>
+          <a:lstStyle/>
+          <a:p>
+            <a:pPr algn="l">
+              <a:spcAft>
+                <a:spcPts val="495"/>
+              </a:spcAft>
+            </a:pPr>
+            <a:r>
+              <a:rPr sz="1100" b="1" i="0">
+                <a:solidFill>
+                  <a:srgbClr val="FFFFFF"/>
+                </a:solidFill>
+                <a:latin typeface="Inter Tight"/>
+              </a:rPr>
+              <a:t>TEACHER PAGE  ·  skipped when you present  ·  Before you teach</a:t>
+            </a:r>
+          </a:p>
+        </p:txBody>
+      </p:sp>
+      <p:sp>
+        <p:nvSpPr>
+          <p:cNvPr id="4" name="TextBox 3"/>
+          <p:cNvSpPr txBox="1"/>
+          <p:nvPr/>
+        </p:nvSpPr>
+        <p:spPr>
+          <a:xfrm>
+            <a:off x="548640" y="685800"/>
+            <a:ext cx="10972800" cy="640080"/>
+          </a:xfrm>
+          <a:prstGeom prst="rect">
+            <a:avLst/>
+          </a:prstGeom>
+          <a:noFill/>
+        </p:spPr>
+        <p:txBody>
+          <a:bodyPr wrap="square" anchor="t" lIns="0" rIns="0" tIns="0" bIns="0">
+            <a:spAutoFit/>
+          </a:bodyPr>
+          <a:lstStyle/>
+          <a:p>
+            <a:pPr algn="l">
+              <a:spcAft>
+                <a:spcPts val="1350"/>
+              </a:spcAft>
+            </a:pPr>
+            <a:r>
+              <a:rPr sz="3000" b="1" i="0">
+                <a:solidFill>
+                  <a:srgbClr val="1C1B19"/>
+                </a:solidFill>
+                <a:latin typeface="Source Serif 4"/>
+              </a:rPr>
+              <a:t>Before you teach</a:t>
+            </a:r>
+          </a:p>
+        </p:txBody>
+      </p:sp>
+      <p:sp>
+        <p:nvSpPr>
+          <p:cNvPr id="5" name="TextBox 4"/>
+          <p:cNvSpPr txBox="1"/>
+          <p:nvPr/>
+        </p:nvSpPr>
+        <p:spPr>
+          <a:xfrm>
+            <a:off x="548640" y="1463040"/>
+            <a:ext cx="5394960" cy="4937760"/>
+          </a:xfrm>
+          <a:prstGeom prst="rect">
+            <a:avLst/>
+          </a:prstGeom>
+          <a:noFill/>
+        </p:spPr>
+        <p:txBody>
+          <a:bodyPr wrap="square" anchor="t" lIns="0" rIns="0" tIns="0" bIns="0">
+            <a:spAutoFit/>
+          </a:bodyPr>
+          <a:lstStyle/>
+          <a:p>
+            <a:pPr algn="l">
+              <a:spcAft>
+                <a:spcPts val="585"/>
+              </a:spcAft>
+            </a:pPr>
+            <a:r>
+              <a:rPr sz="1500" b="1" i="0">
+                <a:solidFill>
+                  <a:srgbClr val="1C1B19"/>
+                </a:solidFill>
+                <a:latin typeface="Source Serif 4"/>
+              </a:rPr>
+              <a:t>Never rank sleep.</a:t>
+            </a:r>
+          </a:p>
+          <a:p>
+            <a:pPr algn="l">
+              <a:spcAft>
+                <a:spcPts val="585"/>
+              </a:spcAft>
+            </a:pPr>
+            <a:r>
+              <a:rPr sz="1300" b="0" i="0">
+                <a:solidFill>
+                  <a:srgbClr val="1C1B19"/>
+                </a:solidFill>
+                <a:latin typeface="Source Serif 4"/>
+              </a:rPr>
+              <a:t>Keep the hours tally anonymous. Don't praise the student who sleeps nine hours or joke about the one who sleeps four. Some students are proud of how little they sleep, and some are embarrassed. Both can stay private.</a:t>
+            </a:r>
+          </a:p>
+          <a:p>
+            <a:pPr algn="l">
+              <a:spcAft>
+                <a:spcPts val="585"/>
+              </a:spcAft>
+            </a:pPr>
+            <a:r>
+              <a:rPr sz="1300" b="0" i="0">
+                <a:solidFill>
+                  <a:srgbClr val="1C1B19"/>
+                </a:solidFill>
+                <a:latin typeface="Source Serif 4"/>
+              </a:rPr>
+              <a:t/>
+            </a:r>
+          </a:p>
+          <a:p>
+            <a:pPr algn="l">
+              <a:spcAft>
+                <a:spcPts val="585"/>
+              </a:spcAft>
+            </a:pPr>
+            <a:r>
+              <a:rPr sz="1500" b="1" i="0">
+                <a:solidFill>
+                  <a:srgbClr val="1C1B19"/>
+                </a:solidFill>
+                <a:latin typeface="Source Serif 4"/>
+              </a:rPr>
+              <a:t>Many schedules aren't the student's to set.</a:t>
+            </a:r>
+          </a:p>
+          <a:p>
+            <a:pPr algn="l">
+              <a:spcAft>
+                <a:spcPts val="585"/>
+              </a:spcAft>
+            </a:pPr>
+            <a:r>
+              <a:rPr sz="1300" b="0" i="0">
+                <a:solidFill>
+                  <a:srgbClr val="1C1B19"/>
+                </a:solidFill>
+                <a:latin typeface="Source Serif 4"/>
+              </a:rPr>
+              <a:t>Practice, a job, a long bus ride, siblings to watch, a shared room, a parent working nights. Present every tool as something to try within what they control. Blaming a student for a schedule the family needs will close the conversation fast.</a:t>
+            </a:r>
+          </a:p>
+          <a:p>
+            <a:pPr algn="l">
+              <a:spcAft>
+                <a:spcPts val="585"/>
+              </a:spcAft>
+            </a:pPr>
+            <a:r>
+              <a:rPr sz="1300" b="0" i="0">
+                <a:solidFill>
+                  <a:srgbClr val="1C1B19"/>
+                </a:solidFill>
+                <a:latin typeface="Source Serif 4"/>
+              </a:rPr>
+              <a:t/>
+            </a:r>
+          </a:p>
+          <a:p>
+            <a:pPr algn="l">
+              <a:spcAft>
+                <a:spcPts val="585"/>
+              </a:spcAft>
+            </a:pPr>
+            <a:r>
+              <a:rPr sz="1500" b="1" i="0">
+                <a:solidFill>
+                  <a:srgbClr val="1C1B19"/>
+                </a:solidFill>
+                <a:latin typeface="Source Serif 4"/>
+              </a:rPr>
+              <a:t>Don't recommend melatonin or pills.</a:t>
+            </a:r>
+          </a:p>
+          <a:p>
+            <a:pPr algn="l">
+              <a:spcAft>
+                <a:spcPts val="585"/>
+              </a:spcAft>
+            </a:pPr>
+            <a:r>
+              <a:rPr sz="1300" b="0" i="0">
+                <a:solidFill>
+                  <a:srgbClr val="1C1B19"/>
+                </a:solidFill>
+                <a:latin typeface="Source Serif 4"/>
+              </a:rPr>
+              <a:t>If students ask, the answer is: it's a timing signal, gummies vary a lot from the label, and a doctor or the school nurse should weigh in first. Don't suggest doses.</a:t>
+            </a:r>
+          </a:p>
+          <a:p>
+            <a:pPr algn="l">
+              <a:spcAft>
+                <a:spcPts val="585"/>
+              </a:spcAft>
+            </a:pPr>
+            <a:r>
+              <a:rPr sz="1300" b="0" i="0">
+                <a:solidFill>
+                  <a:srgbClr val="1C1B19"/>
+                </a:solidFill>
+                <a:latin typeface="Source Serif 4"/>
+              </a:rPr>
+              <a:t/>
+            </a:r>
+          </a:p>
+        </p:txBody>
+      </p:sp>
+      <p:sp>
+        <p:nvSpPr>
+          <p:cNvPr id="6" name="TextBox 5"/>
+          <p:cNvSpPr txBox="1"/>
+          <p:nvPr/>
+        </p:nvSpPr>
+        <p:spPr>
+          <a:xfrm>
+            <a:off x="6217920" y="1463040"/>
+            <a:ext cx="5394960" cy="4937760"/>
+          </a:xfrm>
+          <a:prstGeom prst="rect">
+            <a:avLst/>
+          </a:prstGeom>
+          <a:noFill/>
+        </p:spPr>
+        <p:txBody>
+          <a:bodyPr wrap="square" anchor="t" lIns="0" rIns="0" tIns="0" bIns="0">
+            <a:spAutoFit/>
+          </a:bodyPr>
+          <a:lstStyle/>
+          <a:p>
+            <a:pPr algn="l">
+              <a:spcAft>
+                <a:spcPts val="585"/>
+              </a:spcAft>
+            </a:pPr>
+            <a:r>
+              <a:rPr sz="1500" b="1" i="0">
+                <a:solidFill>
+                  <a:srgbClr val="1C1B19"/>
+                </a:solidFill>
+                <a:latin typeface="Source Serif 4"/>
+              </a:rPr>
+              <a:t>Rides are a safety topic for 9th graders.</a:t>
+            </a:r>
+          </a:p>
+          <a:p>
+            <a:pPr algn="l">
+              <a:spcAft>
+                <a:spcPts val="585"/>
+              </a:spcAft>
+            </a:pPr>
+            <a:r>
+              <a:rPr sz="1300" b="0" i="0">
+                <a:solidFill>
+                  <a:srgbClr val="1C1B19"/>
+                </a:solidFill>
+                <a:latin typeface="Source Serif 4"/>
+              </a:rPr>
+              <a:t>Most 9th graders don't drive, but they ride with older teammates, siblings or parents who may be short on sleep. Make it clear that asking for a different ride is reasonable, and that calling a parent, caregiver or coach for one is a smart move.</a:t>
+            </a:r>
+          </a:p>
+          <a:p>
+            <a:pPr algn="l">
+              <a:spcAft>
+                <a:spcPts val="585"/>
+              </a:spcAft>
+            </a:pPr>
+            <a:r>
+              <a:rPr sz="1300" b="0" i="0">
+                <a:solidFill>
+                  <a:srgbClr val="1C1B19"/>
+                </a:solidFill>
+                <a:latin typeface="Source Serif 4"/>
+              </a:rPr>
+              <a:t/>
+            </a:r>
+          </a:p>
+          <a:p>
+            <a:pPr algn="l">
+              <a:spcAft>
+                <a:spcPts val="585"/>
+              </a:spcAft>
+            </a:pPr>
+            <a:r>
+              <a:rPr sz="1500" b="1" i="0">
+                <a:solidFill>
+                  <a:srgbClr val="1C1B19"/>
+                </a:solidFill>
+                <a:latin typeface="Source Serif 4"/>
+              </a:rPr>
+              <a:t>Some sleep trouble is something more.</a:t>
+            </a:r>
+          </a:p>
+          <a:p>
+            <a:pPr algn="l">
+              <a:spcAft>
+                <a:spcPts val="585"/>
+              </a:spcAft>
+            </a:pPr>
+            <a:r>
+              <a:rPr sz="1300" b="0" i="0">
+                <a:solidFill>
+                  <a:srgbClr val="1C1B19"/>
+                </a:solidFill>
+                <a:latin typeface="Source Serif 4"/>
+              </a:rPr>
+              <a:t>Weeks of not sleeping, exhaustion after a full night, loud snoring or gasping, or worry and sadness that keep a student up are worth a quiet word afterward and a walk to the nurse or a counselor. Don't ask about mood or safety in front of the class. If something comes up, pass it to a counselor that day.</a:t>
+            </a:r>
+          </a:p>
+          <a:p>
+            <a:pPr algn="l">
+              <a:spcAft>
+                <a:spcPts val="585"/>
+              </a:spcAft>
+            </a:pPr>
+            <a:r>
+              <a:rPr sz="1300" b="0" i="0">
+                <a:solidFill>
+                  <a:srgbClr val="1C1B19"/>
+                </a:solidFill>
+                <a:latin typeface="Source Serif 4"/>
+              </a:rPr>
+              <a:t/>
+            </a:r>
+          </a:p>
+          <a:p>
+            <a:pPr algn="l">
+              <a:spcAft>
+                <a:spcPts val="585"/>
+              </a:spcAft>
+            </a:pPr>
+            <a:r>
+              <a:rPr sz="1500" b="1" i="0">
+                <a:solidFill>
+                  <a:srgbClr val="1C1B19"/>
+                </a:solidFill>
+                <a:latin typeface="Source Serif 4"/>
+              </a:rPr>
+              <a:t>If something at home is keeping a student awake.</a:t>
+            </a:r>
+          </a:p>
+          <a:p>
+            <a:pPr algn="l">
+              <a:spcAft>
+                <a:spcPts val="585"/>
+              </a:spcAft>
+            </a:pPr>
+            <a:r>
+              <a:rPr sz="1300" b="0" i="0">
+                <a:solidFill>
+                  <a:srgbClr val="1C1B19"/>
+                </a:solidFill>
+                <a:latin typeface="Source Serif 4"/>
+              </a:rPr>
+              <a:t>Most of the time it's ordinary (a late dinner, a loud house). If a student hints that home isn't safe at night, thank them, don't press for details, and bring in a counselor that day.</a:t>
+            </a:r>
+          </a:p>
+          <a:p>
+            <a:pPr algn="l">
+              <a:spcAft>
+                <a:spcPts val="585"/>
+              </a:spcAft>
+            </a:pPr>
+            <a:r>
+              <a:rPr sz="1300" b="0" i="0">
+                <a:solidFill>
+                  <a:srgbClr val="1C1B19"/>
+                </a:solidFill>
+                <a:latin typeface="Source Serif 4"/>
+              </a:rPr>
+              <a:t/>
+            </a:r>
+          </a:p>
+        </p:txBody>
+      </p:sp>
+    </p:spTree>
+  </p:cSld>
+  <p:clrMapOvr>
+    <a:masterClrMapping/>
+  </p:clrMapOvr>
+</p:sld>
+</file>
+
+<file path=ppt/slides/slide14.xml><?xml version="1.0" encoding="utf-8"?>
+<p:sld xmlns:a="http://schemas.openxmlformats.org/drawingml/2006/main" xmlns:p="http://schemas.openxmlformats.org/presentationml/2006/main" xmlns:r="http://schemas.openxmlformats.org/officeDocument/2006/relationships" show="0">
+  <p:cSld>
+    <p:bg>
+      <p:bgPr>
+        <a:solidFill>
+          <a:srgbClr val="EEEBE4"/>
+        </a:solidFill>
+        <a:effectLst/>
+      </p:bgPr>
+    </p:bg>
+    <p:spTree>
+      <p:nvGrpSpPr>
+        <p:cNvPr id="1" name=""/>
+        <p:cNvGrpSpPr/>
+        <p:nvPr/>
+      </p:nvGrpSpPr>
+      <p:grpSpPr/>
+      <p:sp>
+        <p:nvSpPr>
+          <p:cNvPr id="2" name="Rectangle 1"/>
+          <p:cNvSpPr/>
+          <p:nvPr/>
+        </p:nvSpPr>
+        <p:spPr>
+          <a:xfrm>
+            <a:off x="0" y="0"/>
+            <a:ext cx="12191695" cy="384048"/>
+          </a:xfrm>
+          <a:prstGeom prst="rect">
+            <a:avLst/>
+          </a:prstGeom>
+          <a:solidFill>
+            <a:srgbClr val="0B2D5B"/>
+          </a:solidFill>
+          <a:ln>
+            <a:noFill/>
+          </a:ln>
+          <a:effectLst/>
+        </p:spPr>
+        <p:style>
+          <a:lnRef idx="1">
+            <a:schemeClr val="accent1"/>
+          </a:lnRef>
+          <a:fillRef idx="3">
+            <a:schemeClr val="accent1"/>
+          </a:fillRef>
+          <a:effectRef idx="2">
+            <a:schemeClr val="accent1"/>
+          </a:effectRef>
+          <a:fontRef idx="minor">
+            <a:schemeClr val="lt1"/>
+          </a:fontRef>
+        </p:style>
+        <p:txBody>
+          <a:bodyPr rtlCol="0" anchor="ctr"/>
+          <a:lstStyle/>
+          <a:p>
+            <a:pPr algn="ctr"/>
+          </a:p>
+        </p:txBody>
+      </p:sp>
+      <p:sp>
+        <p:nvSpPr>
+          <p:cNvPr id="3" name="TextBox 2"/>
+          <p:cNvSpPr txBox="1"/>
+          <p:nvPr/>
+        </p:nvSpPr>
+        <p:spPr>
+          <a:xfrm>
+            <a:off x="548640" y="100584"/>
+            <a:ext cx="10972800" cy="274320"/>
+          </a:xfrm>
+          <a:prstGeom prst="rect">
+            <a:avLst/>
+          </a:prstGeom>
+          <a:noFill/>
+        </p:spPr>
+        <p:txBody>
+          <a:bodyPr wrap="square" anchor="t" lIns="0" rIns="0" tIns="0" bIns="0">
+            <a:spAutoFit/>
+          </a:bodyPr>
+          <a:lstStyle/>
+          <a:p>
+            <a:pPr algn="l">
+              <a:spcAft>
+                <a:spcPts val="495"/>
+              </a:spcAft>
+            </a:pPr>
+            <a:r>
+              <a:rPr sz="1100" b="1" i="0">
+                <a:solidFill>
+                  <a:srgbClr val="FFFFFF"/>
+                </a:solidFill>
+                <a:latin typeface="Inter Tight"/>
+              </a:rPr>
+              <a:t>TEACHER PAGE  ·  skipped when you present  ·  Every student in the room</a:t>
+            </a:r>
+          </a:p>
+        </p:txBody>
+      </p:sp>
+      <p:sp>
+        <p:nvSpPr>
+          <p:cNvPr id="4" name="TextBox 3"/>
+          <p:cNvSpPr txBox="1"/>
+          <p:nvPr/>
+        </p:nvSpPr>
+        <p:spPr>
+          <a:xfrm>
+            <a:off x="548640" y="685800"/>
+            <a:ext cx="10972800" cy="640080"/>
+          </a:xfrm>
+          <a:prstGeom prst="rect">
+            <a:avLst/>
+          </a:prstGeom>
+          <a:noFill/>
+        </p:spPr>
+        <p:txBody>
+          <a:bodyPr wrap="square" anchor="t" lIns="0" rIns="0" tIns="0" bIns="0">
+            <a:spAutoFit/>
+          </a:bodyPr>
+          <a:lstStyle/>
+          <a:p>
+            <a:pPr algn="l">
+              <a:spcAft>
+                <a:spcPts val="1350"/>
+              </a:spcAft>
+            </a:pPr>
+            <a:r>
+              <a:rPr sz="3000" b="1" i="0">
+                <a:solidFill>
+                  <a:srgbClr val="1C1B19"/>
+                </a:solidFill>
+                <a:latin typeface="Source Serif 4"/>
+              </a:rPr>
+              <a:t>Every student in the room</a:t>
+            </a:r>
+          </a:p>
+        </p:txBody>
+      </p:sp>
+      <p:sp>
+        <p:nvSpPr>
+          <p:cNvPr id="5" name="TextBox 4"/>
+          <p:cNvSpPr txBox="1"/>
+          <p:nvPr/>
+        </p:nvSpPr>
+        <p:spPr>
+          <a:xfrm>
+            <a:off x="548640" y="1325880"/>
+            <a:ext cx="10972800" cy="365760"/>
+          </a:xfrm>
+          <a:prstGeom prst="rect">
+            <a:avLst/>
+          </a:prstGeom>
+          <a:noFill/>
+        </p:spPr>
+        <p:txBody>
+          <a:bodyPr wrap="square" anchor="t" lIns="0" rIns="0" tIns="0" bIns="0">
+            <a:spAutoFit/>
+          </a:bodyPr>
+          <a:lstStyle/>
+          <a:p>
+            <a:pPr algn="l">
+              <a:spcAft>
+                <a:spcPts val="630"/>
+              </a:spcAft>
+            </a:pPr>
+            <a:r>
+              <a:rPr sz="1400" b="0" i="0">
+                <a:solidFill>
+                  <a:srgbClr val="5D5A54"/>
+                </a:solidFill>
+                <a:latin typeface="Inter Tight"/>
+              </a:rPr>
+              <a:t>Culture, family, identity, ability and money: what to keep in mind for this topic.</a:t>
+            </a:r>
+          </a:p>
+        </p:txBody>
+      </p:sp>
+      <p:sp>
+        <p:nvSpPr>
+          <p:cNvPr id="6" name="TextBox 5"/>
+          <p:cNvSpPr txBox="1"/>
+          <p:nvPr/>
+        </p:nvSpPr>
+        <p:spPr>
+          <a:xfrm>
+            <a:off x="548640" y="1828800"/>
+            <a:ext cx="5394960" cy="4572000"/>
+          </a:xfrm>
+          <a:prstGeom prst="rect">
+            <a:avLst/>
+          </a:prstGeom>
+          <a:noFill/>
+        </p:spPr>
+        <p:txBody>
+          <a:bodyPr wrap="square" anchor="t" lIns="0" rIns="0" tIns="0" bIns="0">
+            <a:spAutoFit/>
+          </a:bodyPr>
+          <a:lstStyle/>
+          <a:p>
+            <a:pPr algn="l">
+              <a:spcAft>
+                <a:spcPts val="585"/>
+              </a:spcAft>
+            </a:pPr>
+            <a:r>
+              <a:rPr sz="1500" b="1" i="0">
+                <a:solidFill>
+                  <a:srgbClr val="1C1B19"/>
+                </a:solidFill>
+                <a:latin typeface="Source Serif 4"/>
+              </a:rPr>
+              <a:t>Who keeps the house running at night.</a:t>
+            </a:r>
+          </a:p>
+          <a:p>
+            <a:pPr algn="l">
+              <a:spcAft>
+                <a:spcPts val="585"/>
+              </a:spcAft>
+            </a:pPr>
+            <a:r>
+              <a:rPr sz="1300" b="0" i="0">
+                <a:solidFill>
+                  <a:srgbClr val="1C1B19"/>
+                </a:solidFill>
+                <a:latin typeface="Source Serif 4"/>
+              </a:rPr>
+              <a:t>Students live with one parent, two, a grandparent, foster or kinship caregivers, or move between homes. Some get younger siblings to bed while a parent or caregiver works. Say "the adults at home" and keep the "what does a school night look like at your place?" question private.</a:t>
+            </a:r>
+          </a:p>
+          <a:p>
+            <a:pPr algn="l">
+              <a:spcAft>
+                <a:spcPts val="585"/>
+              </a:spcAft>
+            </a:pPr>
+            <a:r>
+              <a:rPr sz="1300" b="0" i="0">
+                <a:solidFill>
+                  <a:srgbClr val="1C1B19"/>
+                </a:solidFill>
+                <a:latin typeface="Source Serif 4"/>
+              </a:rPr>
+              <a:t/>
+            </a:r>
+          </a:p>
+          <a:p>
+            <a:pPr algn="l">
+              <a:spcAft>
+                <a:spcPts val="585"/>
+              </a:spcAft>
+            </a:pPr>
+            <a:r>
+              <a:rPr sz="1500" b="1" i="0">
+                <a:solidFill>
+                  <a:srgbClr val="1C1B19"/>
+                </a:solidFill>
+                <a:latin typeface="Source Serif 4"/>
+              </a:rPr>
+              <a:t>Work, money and space.</a:t>
+            </a:r>
+          </a:p>
+          <a:p>
+            <a:pPr algn="l">
+              <a:spcAft>
+                <a:spcPts val="585"/>
+              </a:spcAft>
+            </a:pPr>
+            <a:r>
+              <a:rPr sz="1300" b="0" i="0">
+                <a:solidFill>
+                  <a:srgbClr val="1C1B19"/>
+                </a:solidFill>
+                <a:latin typeface="Source Serif 4"/>
+              </a:rPr>
+              <a:t>Some 9th graders babysit, help with a family business, or share a bedroom. Every lever in this lesson is free: morning light, a steady wake-up time, a caffeine cutoff, the phone across the room. A fan or earplugs help in a shared room. Don't suggest buying anything.</a:t>
+            </a:r>
+          </a:p>
+          <a:p>
+            <a:pPr algn="l">
+              <a:spcAft>
+                <a:spcPts val="585"/>
+              </a:spcAft>
+            </a:pPr>
+            <a:r>
+              <a:rPr sz="1300" b="0" i="0">
+                <a:solidFill>
+                  <a:srgbClr val="1C1B19"/>
+                </a:solidFill>
+                <a:latin typeface="Source Serif 4"/>
+              </a:rPr>
+              <a:t/>
+            </a:r>
+          </a:p>
+          <a:p>
+            <a:pPr algn="l">
+              <a:spcAft>
+                <a:spcPts val="585"/>
+              </a:spcAft>
+            </a:pPr>
+            <a:r>
+              <a:rPr sz="1500" b="1" i="0">
+                <a:solidFill>
+                  <a:srgbClr val="1C1B19"/>
+                </a:solidFill>
+                <a:latin typeface="Source Serif 4"/>
+              </a:rPr>
+              <a:t>Family rhythms vary.</a:t>
+            </a:r>
+          </a:p>
+          <a:p>
+            <a:pPr algn="l">
+              <a:spcAft>
+                <a:spcPts val="585"/>
+              </a:spcAft>
+            </a:pPr>
+            <a:r>
+              <a:rPr sz="1300" b="0" i="0">
+                <a:solidFill>
+                  <a:srgbClr val="1C1B19"/>
+                </a:solidFill>
+                <a:latin typeface="Source Serif 4"/>
+              </a:rPr>
+              <a:t>Dinner at 6 or at 9, tea or coffee at the table, a busy house late at night: norms differ from home to home. Treat every rhythm as normal and ask what students' own nights look like. Avoid "In X families" generalizations.</a:t>
+            </a:r>
+          </a:p>
+          <a:p>
+            <a:pPr algn="l">
+              <a:spcAft>
+                <a:spcPts val="585"/>
+              </a:spcAft>
+            </a:pPr>
+            <a:r>
+              <a:rPr sz="1300" b="0" i="0">
+                <a:solidFill>
+                  <a:srgbClr val="1C1B19"/>
+                </a:solidFill>
+                <a:latin typeface="Source Serif 4"/>
+              </a:rPr>
+              <a:t/>
+            </a:r>
+          </a:p>
+        </p:txBody>
+      </p:sp>
+      <p:sp>
+        <p:nvSpPr>
+          <p:cNvPr id="7" name="TextBox 6"/>
+          <p:cNvSpPr txBox="1"/>
+          <p:nvPr/>
+        </p:nvSpPr>
+        <p:spPr>
+          <a:xfrm>
+            <a:off x="6217920" y="1828800"/>
+            <a:ext cx="5394960" cy="4572000"/>
+          </a:xfrm>
+          <a:prstGeom prst="rect">
+            <a:avLst/>
+          </a:prstGeom>
+          <a:noFill/>
+        </p:spPr>
+        <p:txBody>
+          <a:bodyPr wrap="square" anchor="t" lIns="0" rIns="0" tIns="0" bIns="0">
+            <a:spAutoFit/>
+          </a:bodyPr>
+          <a:lstStyle/>
+          <a:p>
+            <a:pPr algn="l">
+              <a:spcAft>
+                <a:spcPts val="585"/>
+              </a:spcAft>
+            </a:pPr>
+            <a:r>
+              <a:rPr sz="1500" b="1" i="0">
+                <a:solidFill>
+                  <a:srgbClr val="1C1B19"/>
+                </a:solidFill>
+                <a:latin typeface="Source Serif 4"/>
+              </a:rPr>
+              <a:t>Faith can shape the clock.</a:t>
+            </a:r>
+          </a:p>
+          <a:p>
+            <a:pPr algn="l">
+              <a:spcAft>
+                <a:spcPts val="585"/>
+              </a:spcAft>
+            </a:pPr>
+            <a:r>
+              <a:rPr sz="1300" b="0" i="0">
+                <a:solidFill>
+                  <a:srgbClr val="1C1B19"/>
+                </a:solidFill>
+                <a:latin typeface="Source Serif 4"/>
+              </a:rPr>
+              <a:t>Some students rise early or stay up for prayer, attend religious school after school, or fast during parts of the year. Treat those as part of the schedule they plan around. Prayer, meditation, or whatever grounds you can be a good wind-down.</a:t>
+            </a:r>
+          </a:p>
+          <a:p>
+            <a:pPr algn="l">
+              <a:spcAft>
+                <a:spcPts val="585"/>
+              </a:spcAft>
+            </a:pPr>
+            <a:r>
+              <a:rPr sz="1300" b="0" i="0">
+                <a:solidFill>
+                  <a:srgbClr val="1C1B19"/>
+                </a:solidFill>
+                <a:latin typeface="Source Serif 4"/>
+              </a:rPr>
+              <a:t/>
+            </a:r>
+          </a:p>
+          <a:p>
+            <a:pPr algn="l">
+              <a:spcAft>
+                <a:spcPts val="585"/>
+              </a:spcAft>
+            </a:pPr>
+            <a:r>
+              <a:rPr sz="1500" b="1" i="0">
+                <a:solidFill>
+                  <a:srgbClr val="1C1B19"/>
+                </a:solidFill>
+                <a:latin typeface="Source Serif 4"/>
+              </a:rPr>
+              <a:t>Bodies and brains sleep differently.</a:t>
+            </a:r>
+          </a:p>
+          <a:p>
+            <a:pPr algn="l">
+              <a:spcAft>
+                <a:spcPts val="585"/>
+              </a:spcAft>
+            </a:pPr>
+            <a:r>
+              <a:rPr sz="1300" b="0" i="0">
+                <a:solidFill>
+                  <a:srgbClr val="1C1B19"/>
+                </a:solidFill>
+                <a:latin typeface="Source Serif 4"/>
+              </a:rPr>
+              <a:t>Students with ADHD, autism, anxiety, a chronic illness, or medications may have a harder time with sleep. Some need a certain sound, darkness or routine. A student who dozes in class needs a check-in with the nurse or a counselor before any discipline.</a:t>
+            </a:r>
+          </a:p>
+          <a:p>
+            <a:pPr algn="l">
+              <a:spcAft>
+                <a:spcPts val="585"/>
+              </a:spcAft>
+            </a:pPr>
+            <a:r>
+              <a:rPr sz="1300" b="0" i="0">
+                <a:solidFill>
+                  <a:srgbClr val="1C1B19"/>
+                </a:solidFill>
+                <a:latin typeface="Source Serif 4"/>
+              </a:rPr>
+              <a:t/>
+            </a:r>
+          </a:p>
+          <a:p>
+            <a:pPr algn="l">
+              <a:spcAft>
+                <a:spcPts val="585"/>
+              </a:spcAft>
+            </a:pPr>
+            <a:r>
+              <a:rPr sz="1500" b="1" i="0">
+                <a:solidFill>
+                  <a:srgbClr val="1C1B19"/>
+                </a:solidFill>
+                <a:latin typeface="Source Serif 4"/>
+              </a:rPr>
+              <a:t>Language and time zones.</a:t>
+            </a:r>
+          </a:p>
+          <a:p>
+            <a:pPr algn="l">
+              <a:spcAft>
+                <a:spcPts val="585"/>
+              </a:spcAft>
+            </a:pPr>
+            <a:r>
+              <a:rPr sz="1300" b="0" i="0">
+                <a:solidFill>
+                  <a:srgbClr val="1C1B19"/>
+                </a:solidFill>
+                <a:latin typeface="Source Serif 4"/>
+              </a:rPr>
+              <a:t>Some students translate for family in the evening or call relatives in other countries late at night. That time matters. The take-home sheet is in plain language a student can share at home.</a:t>
+            </a:r>
+          </a:p>
+          <a:p>
+            <a:pPr algn="l">
+              <a:spcAft>
+                <a:spcPts val="585"/>
+              </a:spcAft>
+            </a:pPr>
+            <a:r>
+              <a:rPr sz="1300" b="0" i="0">
+                <a:solidFill>
+                  <a:srgbClr val="1C1B19"/>
+                </a:solidFill>
+                <a:latin typeface="Source Serif 4"/>
+              </a:rPr>
+              <a:t/>
+            </a:r>
+          </a:p>
+        </p:txBody>
+      </p:sp>
+    </p:spTree>
+  </p:cSld>
+  <p:clrMapOvr>
+    <a:masterClrMapping/>
+  </p:clrMapOvr>
+</p:sld>
+</file>
+
+<file path=ppt/slides/slide15.xml><?xml version="1.0" encoding="utf-8"?>
+<p:sld xmlns:a="http://schemas.openxmlformats.org/drawingml/2006/main" xmlns:p="http://schemas.openxmlformats.org/presentationml/2006/main" xmlns:r="http://schemas.openxmlformats.org/officeDocument/2006/relationships" show="0">
+  <p:cSld>
+    <p:bg>
+      <p:bgPr>
+        <a:solidFill>
+          <a:srgbClr val="EEEBE4"/>
+        </a:solidFill>
+        <a:effectLst/>
+      </p:bgPr>
+    </p:bg>
+    <p:spTree>
+      <p:nvGrpSpPr>
+        <p:cNvPr id="1" name=""/>
+        <p:cNvGrpSpPr/>
+        <p:nvPr/>
+      </p:nvGrpSpPr>
+      <p:grpSpPr/>
+      <p:sp>
+        <p:nvSpPr>
+          <p:cNvPr id="2" name="Rectangle 1"/>
+          <p:cNvSpPr/>
+          <p:nvPr/>
+        </p:nvSpPr>
+        <p:spPr>
+          <a:xfrm>
+            <a:off x="0" y="0"/>
+            <a:ext cx="12191695" cy="384048"/>
+          </a:xfrm>
+          <a:prstGeom prst="rect">
+            <a:avLst/>
+          </a:prstGeom>
+          <a:solidFill>
+            <a:srgbClr val="0B2D5B"/>
+          </a:solidFill>
+          <a:ln>
+            <a:noFill/>
+          </a:ln>
+          <a:effectLst/>
+        </p:spPr>
+        <p:style>
+          <a:lnRef idx="1">
+            <a:schemeClr val="accent1"/>
+          </a:lnRef>
+          <a:fillRef idx="3">
+            <a:schemeClr val="accent1"/>
+          </a:fillRef>
+          <a:effectRef idx="2">
+            <a:schemeClr val="accent1"/>
+          </a:effectRef>
+          <a:fontRef idx="minor">
+            <a:schemeClr val="lt1"/>
+          </a:fontRef>
+        </p:style>
+        <p:txBody>
+          <a:bodyPr rtlCol="0" anchor="ctr"/>
+          <a:lstStyle/>
+          <a:p>
+            <a:pPr algn="ctr"/>
+          </a:p>
+        </p:txBody>
+      </p:sp>
+      <p:sp>
+        <p:nvSpPr>
+          <p:cNvPr id="3" name="TextBox 2"/>
+          <p:cNvSpPr txBox="1"/>
+          <p:nvPr/>
+        </p:nvSpPr>
+        <p:spPr>
+          <a:xfrm>
+            <a:off x="548640" y="100584"/>
+            <a:ext cx="10972800" cy="274320"/>
+          </a:xfrm>
+          <a:prstGeom prst="rect">
+            <a:avLst/>
+          </a:prstGeom>
+          <a:noFill/>
+        </p:spPr>
+        <p:txBody>
+          <a:bodyPr wrap="square" anchor="t" lIns="0" rIns="0" tIns="0" bIns="0">
+            <a:spAutoFit/>
+          </a:bodyPr>
+          <a:lstStyle/>
+          <a:p>
+            <a:pPr algn="l">
+              <a:spcAft>
+                <a:spcPts val="495"/>
+              </a:spcAft>
+            </a:pPr>
+            <a:r>
+              <a:rPr sz="1100" b="1" i="0">
+                <a:solidFill>
+                  <a:srgbClr val="FFFFFF"/>
+                </a:solidFill>
+                <a:latin typeface="Inter Tight"/>
+              </a:rPr>
+              <a:t>TEACHER PAGE  ·  skipped when you present  ·  Background</a:t>
+            </a:r>
+          </a:p>
+        </p:txBody>
+      </p:sp>
+      <p:sp>
+        <p:nvSpPr>
+          <p:cNvPr id="4" name="TextBox 3"/>
+          <p:cNvSpPr txBox="1"/>
+          <p:nvPr/>
+        </p:nvSpPr>
+        <p:spPr>
+          <a:xfrm>
+            <a:off x="548640" y="685800"/>
+            <a:ext cx="10972800" cy="640080"/>
+          </a:xfrm>
+          <a:prstGeom prst="rect">
+            <a:avLst/>
+          </a:prstGeom>
+          <a:noFill/>
+        </p:spPr>
+        <p:txBody>
+          <a:bodyPr wrap="square" anchor="t" lIns="0" rIns="0" tIns="0" bIns="0">
+            <a:spAutoFit/>
+          </a:bodyPr>
+          <a:lstStyle/>
+          <a:p>
+            <a:pPr algn="l">
+              <a:spcAft>
+                <a:spcPts val="1350"/>
+              </a:spcAft>
+            </a:pPr>
+            <a:r>
+              <a:rPr sz="3000" b="1" i="0">
+                <a:solidFill>
+                  <a:srgbClr val="1C1B19"/>
+                </a:solidFill>
+                <a:latin typeface="Source Serif 4"/>
+              </a:rPr>
+              <a:t>What the research says</a:t>
+            </a:r>
+          </a:p>
+        </p:txBody>
+      </p:sp>
+      <p:sp>
+        <p:nvSpPr>
+          <p:cNvPr id="5" name="TextBox 4"/>
+          <p:cNvSpPr txBox="1"/>
+          <p:nvPr/>
+        </p:nvSpPr>
+        <p:spPr>
+          <a:xfrm>
+            <a:off x="548640" y="1463040"/>
+            <a:ext cx="5394960" cy="4937760"/>
+          </a:xfrm>
+          <a:prstGeom prst="rect">
+            <a:avLst/>
+          </a:prstGeom>
+          <a:noFill/>
+        </p:spPr>
+        <p:txBody>
+          <a:bodyPr wrap="square" anchor="t" lIns="0" rIns="0" tIns="0" bIns="0">
+            <a:spAutoFit/>
+          </a:bodyPr>
+          <a:lstStyle/>
+          <a:p>
+            <a:pPr algn="l">
+              <a:spcAft>
+                <a:spcPts val="585"/>
+              </a:spcAft>
+            </a:pPr>
+            <a:r>
+              <a:rPr sz="1300" b="0" i="0">
+                <a:solidFill>
+                  <a:srgbClr val="1C1B19"/>
+                </a:solidFill>
+                <a:latin typeface="Source Serif 4"/>
+              </a:rPr>
+              <a:t>In a 1998 study of 10th graders whose school started at 7:20, 12 of 25 fell straight into dream (REM) sleep on morning nap tests, a pattern usually seen in narcolepsy. During puberty, melatonin release starts later at night.</a:t>
+            </a:r>
+          </a:p>
+          <a:p>
+            <a:pPr algn="l">
+              <a:spcAft>
+                <a:spcPts val="585"/>
+              </a:spcAft>
+            </a:pPr>
+            <a:r>
+              <a:rPr sz="1050" b="0" i="0">
+                <a:solidFill>
+                  <a:srgbClr val="5D5A54"/>
+                </a:solidFill>
+                <a:latin typeface="Inter Tight"/>
+              </a:rPr>
+              <a:t>Carskadon et al., Sleep, 1998</a:t>
+            </a:r>
+          </a:p>
+          <a:p>
+            <a:pPr algn="l">
+              <a:spcAft>
+                <a:spcPts val="585"/>
+              </a:spcAft>
+            </a:pPr>
+            <a:r>
+              <a:rPr sz="1300" b="0" i="0">
+                <a:solidFill>
+                  <a:srgbClr val="1C1B19"/>
+                </a:solidFill>
+                <a:latin typeface="Source Serif 4"/>
+              </a:rPr>
+              <a:t>Teens ages 13 to 18 need 8 to 10 hours of sleep. In 2023, about 77% of U.S. high school students got less than 8 hours on a typical school night.</a:t>
+            </a:r>
+          </a:p>
+          <a:p>
+            <a:pPr algn="l">
+              <a:spcAft>
+                <a:spcPts val="585"/>
+              </a:spcAft>
+            </a:pPr>
+            <a:r>
+              <a:rPr sz="1050" b="0" i="0">
+                <a:solidFill>
+                  <a:srgbClr val="5D5A54"/>
+                </a:solidFill>
+                <a:latin typeface="Inter Tight"/>
+              </a:rPr>
+              <a:t>American Academy of Sleep Medicine (Paruthi et al., 2016); CDC Youth Risk Behavior Survey, 2023</a:t>
+            </a:r>
+          </a:p>
+          <a:p>
+            <a:pPr algn="l">
+              <a:spcAft>
+                <a:spcPts val="585"/>
+              </a:spcAft>
+            </a:pPr>
+            <a:r>
+              <a:rPr sz="1300" b="0" i="0">
+                <a:solidFill>
+                  <a:srgbClr val="1C1B19"/>
+                </a:solidFill>
+                <a:latin typeface="Source Serif 4"/>
+              </a:rPr>
+              <a:t>When Seattle moved high school start times from 7:50 to 8:45, students got about 34 more minutes of sleep a night and median grades rose 4.5%. One district, not a randomized trial.</a:t>
+            </a:r>
+          </a:p>
+          <a:p>
+            <a:pPr algn="l">
+              <a:spcAft>
+                <a:spcPts val="585"/>
+              </a:spcAft>
+            </a:pPr>
+            <a:r>
+              <a:rPr sz="1050" b="0" i="0">
+                <a:solidFill>
+                  <a:srgbClr val="5D5A54"/>
+                </a:solidFill>
+                <a:latin typeface="Inter Tight"/>
+              </a:rPr>
+              <a:t>Dunster et al., Science Advances, 2018</a:t>
+            </a:r>
+          </a:p>
+          <a:p>
+            <a:pPr algn="l">
+              <a:spcAft>
+                <a:spcPts val="585"/>
+              </a:spcAft>
+            </a:pPr>
+            <a:r>
+              <a:rPr sz="1300" b="0" i="0">
+                <a:solidFill>
+                  <a:srgbClr val="1C1B19"/>
+                </a:solidFill>
+                <a:latin typeface="Source Serif 4"/>
+              </a:rPr>
+              <a:t>People kept awake all night were up to 40% worse at forming new memories the next day, with less hippocampus activity.</a:t>
+            </a:r>
+          </a:p>
+          <a:p>
+            <a:pPr algn="l">
+              <a:spcAft>
+                <a:spcPts val="585"/>
+              </a:spcAft>
+            </a:pPr>
+            <a:r>
+              <a:rPr sz="1050" b="0" i="0">
+                <a:solidFill>
+                  <a:srgbClr val="5D5A54"/>
+                </a:solidFill>
+                <a:latin typeface="Inter Tight"/>
+              </a:rPr>
+              <a:t>Yoo et al., Nature Neuroscience, 2007 (Harvard)</a:t>
+            </a:r>
+          </a:p>
+        </p:txBody>
+      </p:sp>
+      <p:sp>
+        <p:nvSpPr>
+          <p:cNvPr id="6" name="TextBox 5"/>
+          <p:cNvSpPr txBox="1"/>
+          <p:nvPr/>
+        </p:nvSpPr>
+        <p:spPr>
+          <a:xfrm>
+            <a:off x="6217920" y="1463040"/>
+            <a:ext cx="5394960" cy="4937760"/>
+          </a:xfrm>
+          <a:prstGeom prst="rect">
+            <a:avLst/>
+          </a:prstGeom>
+          <a:noFill/>
+        </p:spPr>
+        <p:txBody>
+          <a:bodyPr wrap="square" anchor="t" lIns="0" rIns="0" tIns="0" bIns="0">
+            <a:spAutoFit/>
+          </a:bodyPr>
+          <a:lstStyle/>
+          <a:p>
+            <a:pPr algn="l">
+              <a:spcAft>
+                <a:spcPts val="585"/>
+              </a:spcAft>
+            </a:pPr>
+            <a:r>
+              <a:rPr sz="1300" b="0" i="0">
+                <a:solidFill>
+                  <a:srgbClr val="1C1B19"/>
+                </a:solidFill>
+                <a:latin typeface="Source Serif 4"/>
+              </a:rPr>
+              <a:t>After a night without sleep, the amygdala reacted about 60% more strongly to upsetting images, and its connection to the prefrontal cortex weakened.</a:t>
+            </a:r>
+          </a:p>
+          <a:p>
+            <a:pPr algn="l">
+              <a:spcAft>
+                <a:spcPts val="585"/>
+              </a:spcAft>
+            </a:pPr>
+            <a:r>
+              <a:rPr sz="1050" b="0" i="0">
+                <a:solidFill>
+                  <a:srgbClr val="5D5A54"/>
+                </a:solidFill>
+                <a:latin typeface="Inter Tight"/>
+              </a:rPr>
+              <a:t>Yoo et al., Current Biology, 2007</a:t>
+            </a:r>
+          </a:p>
+          <a:p>
+            <a:pPr algn="l">
+              <a:spcAft>
+                <a:spcPts val="585"/>
+              </a:spcAft>
+            </a:pPr>
+            <a:r>
+              <a:rPr sz="1300" b="0" i="0">
+                <a:solidFill>
+                  <a:srgbClr val="1C1B19"/>
+                </a:solidFill>
+                <a:latin typeface="Source Serif 4"/>
+              </a:rPr>
+              <a:t>Adults on 6 hours a night for two weeks kept getting worse on attention and memory tests, while their sense of sleepiness leveled off after a few days.</a:t>
+            </a:r>
+          </a:p>
+          <a:p>
+            <a:pPr algn="l">
+              <a:spcAft>
+                <a:spcPts val="585"/>
+              </a:spcAft>
+            </a:pPr>
+            <a:r>
+              <a:rPr sz="1050" b="0" i="0">
+                <a:solidFill>
+                  <a:srgbClr val="5D5A54"/>
+                </a:solidFill>
+                <a:latin typeface="Inter Tight"/>
+              </a:rPr>
+              <a:t>Van Dongen et al., Sleep, 2003</a:t>
+            </a:r>
+          </a:p>
+          <a:p>
+            <a:pPr algn="l">
+              <a:spcAft>
+                <a:spcPts val="585"/>
+              </a:spcAft>
+            </a:pPr>
+            <a:r>
+              <a:rPr sz="1300" b="0" i="0">
+                <a:solidFill>
+                  <a:srgbClr val="1C1B19"/>
+                </a:solidFill>
+                <a:latin typeface="Source Serif 4"/>
+              </a:rPr>
+              <a:t>Caffeine taken 6 hours before bed still cost people about an hour of sleep, and they didn't notice.</a:t>
+            </a:r>
+          </a:p>
+          <a:p>
+            <a:pPr algn="l">
+              <a:spcAft>
+                <a:spcPts val="585"/>
+              </a:spcAft>
+            </a:pPr>
+            <a:r>
+              <a:rPr sz="1050" b="0" i="0">
+                <a:solidFill>
+                  <a:srgbClr val="5D5A54"/>
+                </a:solidFill>
+                <a:latin typeface="Inter Tight"/>
+              </a:rPr>
+              <a:t>Drake et al., Journal of Clinical Sleep Medicine, 2013</a:t>
+            </a:r>
+          </a:p>
+          <a:p>
+            <a:pPr algn="l">
+              <a:spcAft>
+                <a:spcPts val="585"/>
+              </a:spcAft>
+            </a:pPr>
+            <a:r>
+              <a:rPr sz="1300" b="0" i="0">
+                <a:solidFill>
+                  <a:srgbClr val="1C1B19"/>
+                </a:solidFill>
+                <a:latin typeface="Source Serif 4"/>
+              </a:rPr>
+              <a:t>Drivers who slept 4 to 5 hours had about 4 times the crash rate of those who slept 7 or more; under 4 hours, about 11 times. Melatonin gummies held 74% to 347% of the labeled dose.</a:t>
+            </a:r>
+          </a:p>
+          <a:p>
+            <a:pPr algn="l">
+              <a:spcAft>
+                <a:spcPts val="585"/>
+              </a:spcAft>
+            </a:pPr>
+            <a:r>
+              <a:rPr sz="1050" b="0" i="0">
+                <a:solidFill>
+                  <a:srgbClr val="5D5A54"/>
+                </a:solidFill>
+                <a:latin typeface="Inter Tight"/>
+              </a:rPr>
+              <a:t>Tefft, Sleep, 2018 (AAA Foundation); Cohen et al., JAMA, 2023</a:t>
+            </a:r>
+          </a:p>
+        </p:txBody>
+      </p:sp>
+    </p:spTree>
+  </p:cSld>
+  <p:clrMapOvr>
+    <a:masterClrMapping/>
+  </p:clrMapOvr>
+</p:sld>
+</file>
+
+<file path=ppt/slides/slide2.xml><?xml version="1.0" encoding="utf-8"?>
+<p:sld xmlns:a="http://schemas.openxmlformats.org/drawingml/2006/main" xmlns:p="http://schemas.openxmlformats.org/presentationml/2006/main" xmlns:r="http://schemas.openxmlformats.org/officeDocument/2006/relationships">
+  <p:cSld>
+    <p:bg>
+      <p:bgPr>
+        <a:solidFill>
+          <a:srgbClr val="0B2D5B"/>
+        </a:solidFill>
+        <a:effectLst/>
+      </p:bgPr>
+    </p:bg>
+    <p:spTree>
+      <p:nvGrpSpPr>
+        <p:cNvPr id="1" name=""/>
+        <p:cNvGrpSpPr/>
+        <p:nvPr/>
+      </p:nvGrpSpPr>
+      <p:grpSpPr/>
+      <p:sp>
+        <p:nvSpPr>
+          <p:cNvPr id="2" name="Rectangle 1"/>
+          <p:cNvSpPr/>
+          <p:nvPr/>
+        </p:nvSpPr>
+        <p:spPr>
+          <a:xfrm>
+            <a:off x="548640" y="502920"/>
+            <a:ext cx="457200" cy="54864"/>
+          </a:xfrm>
+          <a:prstGeom prst="rect">
+            <a:avLst/>
+          </a:prstGeom>
+          <a:solidFill>
+            <a:srgbClr val="F47B20"/>
+          </a:solidFill>
+          <a:ln>
+            <a:noFill/>
+          </a:ln>
+          <a:effectLst/>
+        </p:spPr>
+        <p:style>
+          <a:lnRef idx="1">
+            <a:schemeClr val="accent1"/>
+          </a:lnRef>
+          <a:fillRef idx="3">
+            <a:schemeClr val="accent1"/>
+          </a:fillRef>
+          <a:effectRef idx="2">
+            <a:schemeClr val="accent1"/>
+          </a:effectRef>
+          <a:fontRef idx="minor">
+            <a:schemeClr val="lt1"/>
+          </a:fontRef>
+        </p:style>
+        <p:txBody>
+          <a:bodyPr rtlCol="0" anchor="ctr"/>
+          <a:lstStyle/>
+          <a:p>
+            <a:pPr algn="ctr"/>
+          </a:p>
+        </p:txBody>
+      </p:sp>
+      <p:sp>
+        <p:nvSpPr>
+          <p:cNvPr id="3" name="TextBox 2"/>
+          <p:cNvSpPr txBox="1"/>
+          <p:nvPr/>
+        </p:nvSpPr>
+        <p:spPr>
+          <a:xfrm>
+            <a:off x="1143000" y="393192"/>
+            <a:ext cx="8229600" cy="274320"/>
+          </a:xfrm>
+          <a:prstGeom prst="rect">
+            <a:avLst/>
+          </a:prstGeom>
+          <a:noFill/>
+        </p:spPr>
+        <p:txBody>
+          <a:bodyPr wrap="square" anchor="t" lIns="0" rIns="0" tIns="0" bIns="0">
+            <a:spAutoFit/>
+          </a:bodyPr>
+          <a:lstStyle/>
+          <a:p>
+            <a:pPr algn="l">
+              <a:spcAft>
+                <a:spcPts val="540"/>
+              </a:spcAft>
+            </a:pPr>
+            <a:r>
+              <a:rPr sz="1200" b="1" i="0">
+                <a:solidFill>
+                  <a:srgbClr val="5D5A54"/>
+                </a:solidFill>
+                <a:latin typeface="Inter Tight"/>
+              </a:rPr>
+              <a:t>RUNNING ON EMPTY</a:t>
+            </a:r>
+          </a:p>
+        </p:txBody>
+      </p:sp>
+      <p:sp>
+        <p:nvSpPr>
+          <p:cNvPr id="4" name="TextBox 3"/>
+          <p:cNvSpPr txBox="1"/>
+          <p:nvPr/>
+        </p:nvSpPr>
+        <p:spPr>
+          <a:xfrm>
+            <a:off x="8229600" y="6400800"/>
+            <a:ext cx="3410712" cy="274320"/>
+          </a:xfrm>
+          <a:prstGeom prst="rect">
+            <a:avLst/>
+          </a:prstGeom>
+          <a:noFill/>
+        </p:spPr>
+        <p:txBody>
+          <a:bodyPr wrap="square" anchor="t" lIns="0" rIns="0" tIns="0" bIns="0">
+            <a:spAutoFit/>
+          </a:bodyPr>
+          <a:lstStyle/>
+          <a:p>
+            <a:pPr algn="r">
+              <a:spcAft>
+                <a:spcPts val="450"/>
+              </a:spcAft>
+            </a:pPr>
+            <a:r>
+              <a:rPr sz="1000" b="0" i="0">
+                <a:solidFill>
+                  <a:srgbClr val="5D5A54"/>
+                </a:solidFill>
+                <a:latin typeface="Inter Tight"/>
+              </a:rPr>
+              <a:t>Beaver Counseling</a:t>
+            </a:r>
+          </a:p>
+        </p:txBody>
+      </p:sp>
+      <p:sp>
+        <p:nvSpPr>
+          <p:cNvPr id="5" name="TextBox 4"/>
+          <p:cNvSpPr txBox="1"/>
+          <p:nvPr/>
+        </p:nvSpPr>
+        <p:spPr>
+          <a:xfrm>
+            <a:off x="822960" y="2011680"/>
+            <a:ext cx="10515600" cy="1463040"/>
+          </a:xfrm>
+          <a:prstGeom prst="rect">
+            <a:avLst/>
+          </a:prstGeom>
+          <a:noFill/>
+        </p:spPr>
+        <p:txBody>
+          <a:bodyPr wrap="square" anchor="b" lIns="0" rIns="0" tIns="0" bIns="0">
+            <a:spAutoFit/>
+          </a:bodyPr>
+          <a:lstStyle/>
+          <a:p>
+            <a:pPr algn="l">
+              <a:spcAft>
+                <a:spcPts val="2700"/>
+              </a:spcAft>
+            </a:pPr>
+            <a:r>
+              <a:rPr sz="6000" b="1" i="0">
+                <a:solidFill>
+                  <a:srgbClr val="FFFFFF"/>
+                </a:solidFill>
+                <a:latin typeface="Source Serif 4"/>
+              </a:rPr>
+              <a:t>Running on Empty</a:t>
+            </a:r>
+          </a:p>
+        </p:txBody>
+      </p:sp>
+      <p:sp>
+        <p:nvSpPr>
+          <p:cNvPr id="6" name="TextBox 5"/>
+          <p:cNvSpPr txBox="1"/>
+          <p:nvPr/>
+        </p:nvSpPr>
+        <p:spPr>
+          <a:xfrm>
+            <a:off x="822960" y="3611880"/>
+            <a:ext cx="10515600" cy="914400"/>
+          </a:xfrm>
+          <a:prstGeom prst="rect">
+            <a:avLst/>
+          </a:prstGeom>
+          <a:noFill/>
+        </p:spPr>
+        <p:txBody>
+          <a:bodyPr wrap="square" anchor="t" lIns="0" rIns="0" tIns="0" bIns="0">
+            <a:spAutoFit/>
+          </a:bodyPr>
+          <a:lstStyle/>
+          <a:p>
+            <a:pPr algn="l">
+              <a:spcAft>
+                <a:spcPts val="1080"/>
+              </a:spcAft>
+            </a:pPr>
+            <a:r>
+              <a:rPr sz="2400" b="0" i="1">
+                <a:solidFill>
+                  <a:srgbClr val="E8E4DA"/>
+                </a:solidFill>
+                <a:latin typeface="Source Serif 4"/>
+              </a:rPr>
+              <a:t>Wired at midnight. Wrecked at 7.</a:t>
+            </a:r>
+          </a:p>
+        </p:txBody>
+      </p:sp>
+      <p:sp>
+        <p:nvSpPr>
+          <p:cNvPr id="7" name="TextBox 6"/>
+          <p:cNvSpPr txBox="1"/>
+          <p:nvPr/>
+        </p:nvSpPr>
+        <p:spPr>
+          <a:xfrm>
+            <a:off x="822960" y="6035040"/>
+            <a:ext cx="7315200" cy="365760"/>
+          </a:xfrm>
+          <a:prstGeom prst="rect">
+            <a:avLst/>
+          </a:prstGeom>
+          <a:noFill/>
+        </p:spPr>
+        <p:txBody>
+          <a:bodyPr wrap="square" anchor="t" lIns="0" rIns="0" tIns="0" bIns="0">
+            <a:spAutoFit/>
+          </a:bodyPr>
+          <a:lstStyle/>
+          <a:p>
+            <a:pPr algn="l">
+              <a:spcAft>
+                <a:spcPts val="585"/>
+              </a:spcAft>
+            </a:pPr>
+            <a:r>
+              <a:rPr sz="1300" b="0" i="0">
+                <a:solidFill>
+                  <a:srgbClr val="E8E4DA"/>
+                </a:solidFill>
+                <a:latin typeface="Inter Tight"/>
+              </a:rPr>
+              <a:t>Beaver Upper School · Counseling</a:t>
+            </a:r>
+          </a:p>
+        </p:txBody>
+      </p:sp>
+    </p:spTree>
+  </p:cSld>
+  <p:clrMapOvr>
+    <a:masterClrMapping/>
+  </p:clrMapOvr>
+</p:sld>
+</file>
+
+<file path=ppt/slides/slide3.xml><?xml version="1.0" encoding="utf-8"?>
 <p:sld xmlns:a="http://schemas.openxmlformats.org/drawingml/2006/main" xmlns:p="http://schemas.openxmlformats.org/presentationml/2006/main" xmlns:r="http://schemas.openxmlformats.org/officeDocument/2006/relationships">
   <p:cSld>
     <p:bg>
@@ -6313,7 +7663,7 @@
                 </a:solidFill>
                 <a:latin typeface="Inter Tight"/>
               </a:rPr>
-              <a:t>THREE TIRED STUDENTS</a:t>
+              <a:t>QUICK TALLY</a:t>
             </a:r>
           </a:p>
         </p:txBody>
@@ -6359,64 +7709,23 @@
       </p:sp>
       <p:sp>
         <p:nvSpPr>
-          <p:cNvPr id="5" name="TextBox 4"/>
-          <p:cNvSpPr txBox="1"/>
-          <p:nvPr/>
-        </p:nvSpPr>
-        <p:spPr>
-          <a:xfrm>
-            <a:off x="822960" y="1005840"/>
-            <a:ext cx="10515600" cy="914400"/>
-          </a:xfrm>
-          <a:prstGeom prst="rect">
-            <a:avLst/>
-          </a:prstGeom>
-          <a:noFill/>
-        </p:spPr>
-        <p:txBody>
-          <a:bodyPr wrap="square" anchor="t" lIns="0" rIns="0" tIns="0" bIns="0">
-            <a:spAutoFit/>
-          </a:bodyPr>
-          <a:lstStyle/>
-          <a:p>
-            <a:pPr algn="l">
-              <a:spcAft>
-                <a:spcPts val="1530"/>
-              </a:spcAft>
-            </a:pPr>
-            <a:r>
-              <a:rPr sz="3400" b="1" i="0">
-                <a:solidFill>
-                  <a:srgbClr val="1C1B19"/>
-                </a:solidFill>
-                <a:latin typeface="Source Serif 4"/>
-              </a:rPr>
-              <a:t>What's the smart move?</a:t>
-            </a:r>
-          </a:p>
-        </p:txBody>
-      </p:sp>
-      <p:sp>
-        <p:nvSpPr>
-          <p:cNvPr id="6" name="Rectangle 5"/>
+          <p:cNvPr id="5" name="Rectangle 4"/>
           <p:cNvSpPr/>
           <p:nvPr/>
         </p:nvSpPr>
         <p:spPr>
           <a:xfrm>
-            <a:off x="822960" y="2103120"/>
-            <a:ext cx="3322320" cy="3840480"/>
+            <a:off x="822960" y="1371600"/>
+            <a:ext cx="73152" cy="3566160"/>
           </a:xfrm>
           <a:prstGeom prst="rect">
             <a:avLst/>
           </a:prstGeom>
           <a:solidFill>
-            <a:srgbClr val="FFFFFF"/>
+            <a:srgbClr val="F47B20"/>
           </a:solidFill>
-          <a:ln w="15875">
-            <a:solidFill>
-              <a:srgbClr val="D8D2C6"/>
-            </a:solidFill>
+          <a:ln>
+            <a:noFill/>
           </a:ln>
           <a:effectLst/>
         </p:spPr>
@@ -6444,14 +7753,53 @@
       </p:sp>
       <p:sp>
         <p:nvSpPr>
+          <p:cNvPr id="6" name="TextBox 5"/>
+          <p:cNvSpPr txBox="1"/>
+          <p:nvPr/>
+        </p:nvSpPr>
+        <p:spPr>
+          <a:xfrm>
+            <a:off x="1188720" y="1371600"/>
+            <a:ext cx="10058400" cy="3566160"/>
+          </a:xfrm>
+          <a:prstGeom prst="rect">
+            <a:avLst/>
+          </a:prstGeom>
+          <a:noFill/>
+        </p:spPr>
+        <p:txBody>
+          <a:bodyPr wrap="square" anchor="ctr" lIns="0" rIns="0" tIns="0" bIns="0">
+            <a:spAutoFit/>
+          </a:bodyPr>
+          <a:lstStyle/>
+          <a:p>
+            <a:pPr algn="l">
+              <a:spcAft>
+                <a:spcPts val="1800"/>
+              </a:spcAft>
+            </a:pPr>
+            <a:r>
+              <a:rPr sz="4000" b="0" i="1">
+                <a:solidFill>
+                  <a:srgbClr val="1C1B19"/>
+                </a:solidFill>
+                <a:latin typeface="Source Serif 4"/>
+              </a:rPr>
+              <a:t>How many hours did you sleep last night?</a:t>
+            </a:r>
+          </a:p>
+        </p:txBody>
+      </p:sp>
+      <p:sp>
+        <p:nvSpPr>
           <p:cNvPr id="7" name="TextBox 6"/>
           <p:cNvSpPr txBox="1"/>
           <p:nvPr/>
         </p:nvSpPr>
         <p:spPr>
           <a:xfrm>
-            <a:off x="1051560" y="2286000"/>
-            <a:ext cx="2865120" cy="365760"/>
+            <a:off x="1188720" y="5120640"/>
+            <a:ext cx="10058400" cy="914400"/>
           </a:xfrm>
           <a:prstGeom prst="rect">
             <a:avLst/>
@@ -6466,304 +7814,17 @@
           <a:p>
             <a:pPr algn="l">
               <a:spcAft>
-                <a:spcPts val="585"/>
-              </a:spcAft>
-            </a:pPr>
-            <a:r>
-              <a:rPr sz="1300" b="1" i="0">
-                <a:solidFill>
-                  <a:srgbClr val="0B2D5B"/>
+                <a:spcPts val="810"/>
+              </a:spcAft>
+            </a:pPr>
+            <a:r>
+              <a:rPr sz="1800" b="0" i="0">
+                <a:solidFill>
+                  <a:srgbClr val="5D5A54"/>
                 </a:solidFill>
                 <a:latin typeface="Inter Tight"/>
               </a:rPr>
-              <a:t>DEV</a:t>
-            </a:r>
-          </a:p>
-        </p:txBody>
-      </p:sp>
-      <p:sp>
-        <p:nvSpPr>
-          <p:cNvPr id="8" name="TextBox 7"/>
-          <p:cNvSpPr txBox="1"/>
-          <p:nvPr/>
-        </p:nvSpPr>
-        <p:spPr>
-          <a:xfrm>
-            <a:off x="1051560" y="2743200"/>
-            <a:ext cx="2865120" cy="3017520"/>
-          </a:xfrm>
-          <a:prstGeom prst="rect">
-            <a:avLst/>
-          </a:prstGeom>
-          <a:noFill/>
-        </p:spPr>
-        <p:txBody>
-          <a:bodyPr wrap="square" anchor="t" lIns="0" rIns="0" tIns="0" bIns="0">
-            <a:spAutoFit/>
-          </a:bodyPr>
-          <a:lstStyle/>
-          <a:p>
-            <a:pPr algn="l">
-              <a:spcAft>
-                <a:spcPts val="810"/>
-              </a:spcAft>
-            </a:pPr>
-            <a:r>
-              <a:rPr sz="1800" b="0" i="0">
-                <a:solidFill>
-                  <a:srgbClr val="1C1B19"/>
-                </a:solidFill>
-                <a:latin typeface="Source Serif 4"/>
-              </a:rPr>
-              <a:t>Practice ends at 6. He watches his little brothers while his mom works nights, then starts homework at 10 and is up until 1.</a:t>
-            </a:r>
-          </a:p>
-        </p:txBody>
-      </p:sp>
-      <p:sp>
-        <p:nvSpPr>
-          <p:cNvPr id="9" name="Rectangle 8"/>
-          <p:cNvSpPr/>
-          <p:nvPr/>
-        </p:nvSpPr>
-        <p:spPr>
-          <a:xfrm>
-            <a:off x="4419600" y="2103120"/>
-            <a:ext cx="3322320" cy="3840480"/>
-          </a:xfrm>
-          <a:prstGeom prst="rect">
-            <a:avLst/>
-          </a:prstGeom>
-          <a:solidFill>
-            <a:srgbClr val="FFFFFF"/>
-          </a:solidFill>
-          <a:ln w="15875">
-            <a:solidFill>
-              <a:srgbClr val="D8D2C6"/>
-            </a:solidFill>
-          </a:ln>
-          <a:effectLst/>
-        </p:spPr>
-        <p:style>
-          <a:lnRef idx="1">
-            <a:schemeClr val="accent1"/>
-          </a:lnRef>
-          <a:fillRef idx="3">
-            <a:schemeClr val="accent1"/>
-          </a:fillRef>
-          <a:effectRef idx="2">
-            <a:schemeClr val="accent1"/>
-          </a:effectRef>
-          <a:fontRef idx="minor">
-            <a:schemeClr val="lt1"/>
-          </a:fontRef>
-        </p:style>
-        <p:txBody>
-          <a:bodyPr rtlCol="0" anchor="ctr"/>
-          <a:lstStyle/>
-          <a:p>
-            <a:pPr algn="ctr"/>
-          </a:p>
-        </p:txBody>
-      </p:sp>
-      <p:sp>
-        <p:nvSpPr>
-          <p:cNvPr id="10" name="TextBox 9"/>
-          <p:cNvSpPr txBox="1"/>
-          <p:nvPr/>
-        </p:nvSpPr>
-        <p:spPr>
-          <a:xfrm>
-            <a:off x="4648200" y="2286000"/>
-            <a:ext cx="2865120" cy="365760"/>
-          </a:xfrm>
-          <a:prstGeom prst="rect">
-            <a:avLst/>
-          </a:prstGeom>
-          <a:noFill/>
-        </p:spPr>
-        <p:txBody>
-          <a:bodyPr wrap="square" anchor="t" lIns="0" rIns="0" tIns="0" bIns="0">
-            <a:spAutoFit/>
-          </a:bodyPr>
-          <a:lstStyle/>
-          <a:p>
-            <a:pPr algn="l">
-              <a:spcAft>
-                <a:spcPts val="585"/>
-              </a:spcAft>
-            </a:pPr>
-            <a:r>
-              <a:rPr sz="1300" b="1" i="0">
-                <a:solidFill>
-                  <a:srgbClr val="0B2D5B"/>
-                </a:solidFill>
-                <a:latin typeface="Inter Tight"/>
-              </a:rPr>
-              <a:t>AMARA</a:t>
-            </a:r>
-          </a:p>
-        </p:txBody>
-      </p:sp>
-      <p:sp>
-        <p:nvSpPr>
-          <p:cNvPr id="11" name="TextBox 10"/>
-          <p:cNvSpPr txBox="1"/>
-          <p:nvPr/>
-        </p:nvSpPr>
-        <p:spPr>
-          <a:xfrm>
-            <a:off x="4648200" y="2743200"/>
-            <a:ext cx="2865120" cy="3017520"/>
-          </a:xfrm>
-          <a:prstGeom prst="rect">
-            <a:avLst/>
-          </a:prstGeom>
-          <a:noFill/>
-        </p:spPr>
-        <p:txBody>
-          <a:bodyPr wrap="square" anchor="t" lIns="0" rIns="0" tIns="0" bIns="0">
-            <a:spAutoFit/>
-          </a:bodyPr>
-          <a:lstStyle/>
-          <a:p>
-            <a:pPr algn="l">
-              <a:spcAft>
-                <a:spcPts val="810"/>
-              </a:spcAft>
-            </a:pPr>
-            <a:r>
-              <a:rPr sz="1800" b="0" i="0">
-                <a:solidFill>
-                  <a:srgbClr val="1C1B19"/>
-                </a:solidFill>
-                <a:latin typeface="Source Serif 4"/>
-              </a:rPr>
-              <a:t>Biology test at 8am. It's 12:30am and she still has two units to review.</a:t>
-            </a:r>
-          </a:p>
-        </p:txBody>
-      </p:sp>
-      <p:sp>
-        <p:nvSpPr>
-          <p:cNvPr id="12" name="Rectangle 11"/>
-          <p:cNvSpPr/>
-          <p:nvPr/>
-        </p:nvSpPr>
-        <p:spPr>
-          <a:xfrm>
-            <a:off x="8016239" y="2103120"/>
-            <a:ext cx="3322320" cy="3840480"/>
-          </a:xfrm>
-          <a:prstGeom prst="rect">
-            <a:avLst/>
-          </a:prstGeom>
-          <a:solidFill>
-            <a:srgbClr val="FFFFFF"/>
-          </a:solidFill>
-          <a:ln w="15875">
-            <a:solidFill>
-              <a:srgbClr val="D8D2C6"/>
-            </a:solidFill>
-          </a:ln>
-          <a:effectLst/>
-        </p:spPr>
-        <p:style>
-          <a:lnRef idx="1">
-            <a:schemeClr val="accent1"/>
-          </a:lnRef>
-          <a:fillRef idx="3">
-            <a:schemeClr val="accent1"/>
-          </a:fillRef>
-          <a:effectRef idx="2">
-            <a:schemeClr val="accent1"/>
-          </a:effectRef>
-          <a:fontRef idx="minor">
-            <a:schemeClr val="lt1"/>
-          </a:fontRef>
-        </p:style>
-        <p:txBody>
-          <a:bodyPr rtlCol="0" anchor="ctr"/>
-          <a:lstStyle/>
-          <a:p>
-            <a:pPr algn="ctr"/>
-          </a:p>
-        </p:txBody>
-      </p:sp>
-      <p:sp>
-        <p:nvSpPr>
-          <p:cNvPr id="13" name="TextBox 12"/>
-          <p:cNvSpPr txBox="1"/>
-          <p:nvPr/>
-        </p:nvSpPr>
-        <p:spPr>
-          <a:xfrm>
-            <a:off x="8244839" y="2286000"/>
-            <a:ext cx="2865120" cy="365760"/>
-          </a:xfrm>
-          <a:prstGeom prst="rect">
-            <a:avLst/>
-          </a:prstGeom>
-          <a:noFill/>
-        </p:spPr>
-        <p:txBody>
-          <a:bodyPr wrap="square" anchor="t" lIns="0" rIns="0" tIns="0" bIns="0">
-            <a:spAutoFit/>
-          </a:bodyPr>
-          <a:lstStyle/>
-          <a:p>
-            <a:pPr algn="l">
-              <a:spcAft>
-                <a:spcPts val="585"/>
-              </a:spcAft>
-            </a:pPr>
-            <a:r>
-              <a:rPr sz="1300" b="1" i="0">
-                <a:solidFill>
-                  <a:srgbClr val="0B2D5B"/>
-                </a:solidFill>
-                <a:latin typeface="Inter Tight"/>
-              </a:rPr>
-              <a:t>LUIS</a:t>
-            </a:r>
-          </a:p>
-        </p:txBody>
-      </p:sp>
-      <p:sp>
-        <p:nvSpPr>
-          <p:cNvPr id="14" name="TextBox 13"/>
-          <p:cNvSpPr txBox="1"/>
-          <p:nvPr/>
-        </p:nvSpPr>
-        <p:spPr>
-          <a:xfrm>
-            <a:off x="8244839" y="2743200"/>
-            <a:ext cx="2865120" cy="3017520"/>
-          </a:xfrm>
-          <a:prstGeom prst="rect">
-            <a:avLst/>
-          </a:prstGeom>
-          <a:noFill/>
-        </p:spPr>
-        <p:txBody>
-          <a:bodyPr wrap="square" anchor="t" lIns="0" rIns="0" tIns="0" bIns="0">
-            <a:spAutoFit/>
-          </a:bodyPr>
-          <a:lstStyle/>
-          <a:p>
-            <a:pPr algn="l">
-              <a:spcAft>
-                <a:spcPts val="810"/>
-              </a:spcAft>
-            </a:pPr>
-            <a:r>
-              <a:rPr sz="1800" b="0" i="0">
-                <a:solidFill>
-                  <a:srgbClr val="1C1B19"/>
-                </a:solidFill>
-                <a:latin typeface="Source Serif 4"/>
-              </a:rPr>
-              <a:t>His ride to a 6am lift is an older teammate who slept five hours. At a red light, Luis sees him drifting.</a:t>
+              <a:t>Write a number on your scrap. No names. Fold it.</a:t>
             </a:r>
           </a:p>
         </p:txBody>
@@ -6776,7 +7837,7 @@
 </p:sld>
 </file>
 
-<file path=ppt/slides/slide13.xml><?xml version="1.0" encoding="utf-8"?>
+<file path=ppt/slides/slide4.xml><?xml version="1.0" encoding="utf-8"?>
 <p:sld xmlns:a="http://schemas.openxmlformats.org/drawingml/2006/main" xmlns:p="http://schemas.openxmlformats.org/presentationml/2006/main" xmlns:r="http://schemas.openxmlformats.org/officeDocument/2006/relationships">
   <p:cSld>
     <p:bg>
@@ -6872,7 +7933,7 @@
                 </a:solidFill>
                 <a:latin typeface="Inter Tight"/>
               </a:rPr>
-              <a:t>WORK BACKWARD</a:t>
+              <a:t>THIS IS BIOLOGY</a:t>
             </a:r>
           </a:p>
         </p:txBody>
@@ -6918,58 +7979,14 @@
       </p:sp>
       <p:sp>
         <p:nvSpPr>
-          <p:cNvPr id="5" name="Rectangle 4"/>
-          <p:cNvSpPr/>
-          <p:nvPr/>
-        </p:nvSpPr>
-        <p:spPr>
-          <a:xfrm>
-            <a:off x="822960" y="1371600"/>
-            <a:ext cx="73152" cy="3566160"/>
-          </a:xfrm>
-          <a:prstGeom prst="rect">
-            <a:avLst/>
-          </a:prstGeom>
-          <a:solidFill>
-            <a:srgbClr val="F47B20"/>
-          </a:solidFill>
-          <a:ln>
-            <a:noFill/>
-          </a:ln>
-          <a:effectLst/>
-        </p:spPr>
-        <p:style>
-          <a:lnRef idx="1">
-            <a:schemeClr val="accent1"/>
-          </a:lnRef>
-          <a:fillRef idx="3">
-            <a:schemeClr val="accent1"/>
-          </a:fillRef>
-          <a:effectRef idx="2">
-            <a:schemeClr val="accent1"/>
-          </a:effectRef>
-          <a:fontRef idx="minor">
-            <a:schemeClr val="lt1"/>
-          </a:fontRef>
-        </p:style>
-        <p:txBody>
-          <a:bodyPr rtlCol="0" anchor="ctr"/>
-          <a:lstStyle/>
-          <a:p>
-            <a:pPr algn="ctr"/>
-          </a:p>
-        </p:txBody>
-      </p:sp>
-      <p:sp>
-        <p:nvSpPr>
-          <p:cNvPr id="6" name="TextBox 5"/>
+          <p:cNvPr id="5" name="TextBox 4"/>
           <p:cNvSpPr txBox="1"/>
           <p:nvPr/>
         </p:nvSpPr>
         <p:spPr>
           <a:xfrm>
-            <a:off x="1188720" y="1371600"/>
-            <a:ext cx="10058400" cy="3566160"/>
+            <a:off x="822960" y="1463040"/>
+            <a:ext cx="10515600" cy="3291840"/>
           </a:xfrm>
           <a:prstGeom prst="rect">
             <a:avLst/>
@@ -6984,31 +8001,31 @@
           <a:p>
             <a:pPr algn="l">
               <a:spcAft>
-                <a:spcPts val="1800"/>
-              </a:spcAft>
-            </a:pPr>
-            <a:r>
-              <a:rPr sz="4000" b="0" i="1">
+                <a:spcPts val="2070"/>
+              </a:spcAft>
+            </a:pPr>
+            <a:r>
+              <a:rPr sz="4600" b="1" i="0">
                 <a:solidFill>
                   <a:srgbClr val="1C1B19"/>
                 </a:solidFill>
                 <a:latin typeface="Source Serif 4"/>
               </a:rPr>
-              <a:t>Your wake-up time, minus 9 hours: that's lights-out.</a:t>
-            </a:r>
-          </a:p>
-        </p:txBody>
-      </p:sp>
-      <p:sp>
-        <p:nvSpPr>
-          <p:cNvPr id="7" name="TextBox 6"/>
+              <a:t>Your clock really did move.</a:t>
+            </a:r>
+          </a:p>
+        </p:txBody>
+      </p:sp>
+      <p:sp>
+        <p:nvSpPr>
+          <p:cNvPr id="6" name="TextBox 5"/>
           <p:cNvSpPr txBox="1"/>
           <p:nvPr/>
         </p:nvSpPr>
         <p:spPr>
           <a:xfrm>
-            <a:off x="1188720" y="5120640"/>
-            <a:ext cx="10058400" cy="914400"/>
+            <a:off x="822960" y="4846320"/>
+            <a:ext cx="10515600" cy="1097280"/>
           </a:xfrm>
           <a:prstGeom prst="rect">
             <a:avLst/>
@@ -7023,17 +8040,17 @@
           <a:p>
             <a:pPr algn="l">
               <a:spcAft>
-                <a:spcPts val="810"/>
-              </a:spcAft>
-            </a:pPr>
-            <a:r>
-              <a:rPr sz="1800" b="0" i="0">
+                <a:spcPts val="990"/>
+              </a:spcAft>
+            </a:pPr>
+            <a:r>
+              <a:rPr sz="2200" b="0" i="1">
                 <a:solidFill>
                   <a:srgbClr val="5D5A54"/>
                 </a:solidFill>
-                <a:latin typeface="Inter Tight"/>
-              </a:rPr>
-              <a:t>Private. Write your wake-up time, your lights-out, and when you'd start winding down.</a:t>
+                <a:latin typeface="Source Serif 4"/>
+              </a:rPr>
+              <a:t>In puberty, your brain sends its sleepy signal later at night. That's why you're not tired at 10 anymore.</a:t>
             </a:r>
           </a:p>
         </p:txBody>
@@ -7046,7 +8063,7 @@
 </p:sld>
 </file>
 
-<file path=ppt/slides/slide14.xml><?xml version="1.0" encoding="utf-8"?>
+<file path=ppt/slides/slide5.xml><?xml version="1.0" encoding="utf-8"?>
 <p:sld xmlns:a="http://schemas.openxmlformats.org/drawingml/2006/main" xmlns:p="http://schemas.openxmlformats.org/presentationml/2006/main" xmlns:r="http://schemas.openxmlformats.org/officeDocument/2006/relationships">
   <p:cSld>
     <p:bg>
@@ -7142,7 +8159,7 @@
                 </a:solidFill>
                 <a:latin typeface="Inter Tight"/>
               </a:rPr>
-              <a:t>BEFORE YOU GO</a:t>
+              <a:t>WHAT A SHORT NIGHT COSTS</a:t>
             </a:r>
           </a:p>
         </p:txBody>
@@ -7194,8 +8211,8 @@
         </p:nvSpPr>
         <p:spPr>
           <a:xfrm>
-            <a:off x="822960" y="1188720"/>
-            <a:ext cx="10515600" cy="914400"/>
+            <a:off x="822960" y="1005840"/>
+            <a:ext cx="10515600" cy="1097280"/>
           </a:xfrm>
           <a:prstGeom prst="rect">
             <a:avLst/>
@@ -7220,7 +8237,7 @@
                 </a:solidFill>
                 <a:latin typeface="Source Serif 4"/>
               </a:rPr>
-              <a:t>Exit card</a:t>
+              <a:t>A tired brain on a school day</a:t>
             </a:r>
           </a:p>
         </p:txBody>
@@ -7233,8 +8250,8 @@
         </p:nvSpPr>
         <p:spPr>
           <a:xfrm>
-            <a:off x="822960" y="2286000"/>
-            <a:ext cx="10515600" cy="1463040"/>
+            <a:off x="822960" y="2194560"/>
+            <a:ext cx="548640" cy="1005840"/>
           </a:xfrm>
           <a:prstGeom prst="rect">
             <a:avLst/>
@@ -7249,77 +8266,31 @@
           <a:p>
             <a:pPr algn="l">
               <a:spcAft>
-                <a:spcPts val="1080"/>
-              </a:spcAft>
-            </a:pPr>
-            <a:r>
-              <a:rPr sz="2400" b="0" i="0">
-                <a:solidFill>
-                  <a:srgbClr val="1C1B19"/>
-                </a:solidFill>
-                <a:latin typeface="Source Serif 4"/>
-              </a:rPr>
-              <a:t>One lever you'll try this week, and which night you'll start.</a:t>
-            </a:r>
-          </a:p>
-        </p:txBody>
-      </p:sp>
-      <p:sp>
-        <p:nvSpPr>
-          <p:cNvPr id="7" name="Rectangle 6"/>
-          <p:cNvSpPr/>
-          <p:nvPr/>
-        </p:nvSpPr>
-        <p:spPr>
-          <a:xfrm>
-            <a:off x="822960" y="4023360"/>
-            <a:ext cx="10515600" cy="1371600"/>
-          </a:xfrm>
-          <a:prstGeom prst="rect">
-            <a:avLst/>
-          </a:prstGeom>
-          <a:solidFill>
-            <a:srgbClr val="FFFFFF"/>
-          </a:solidFill>
-          <a:ln w="15875">
-            <a:solidFill>
-              <a:srgbClr val="1C1B19"/>
-            </a:solidFill>
-          </a:ln>
-          <a:effectLst/>
-        </p:spPr>
-        <p:style>
-          <a:lnRef idx="1">
-            <a:schemeClr val="accent1"/>
-          </a:lnRef>
-          <a:fillRef idx="3">
-            <a:schemeClr val="accent1"/>
-          </a:fillRef>
-          <a:effectRef idx="2">
-            <a:schemeClr val="accent1"/>
-          </a:effectRef>
-          <a:fontRef idx="minor">
-            <a:schemeClr val="lt1"/>
-          </a:fontRef>
-        </p:style>
-        <p:txBody>
-          <a:bodyPr rtlCol="0" anchor="ctr"/>
-          <a:lstStyle/>
-          <a:p>
-            <a:pPr algn="ctr"/>
-          </a:p>
-        </p:txBody>
-      </p:sp>
-      <p:sp>
-        <p:nvSpPr>
-          <p:cNvPr id="8" name="TextBox 7"/>
+                <a:spcPts val="1170"/>
+              </a:spcAft>
+            </a:pPr>
+            <a:r>
+              <a:rPr sz="2600" b="1" i="0">
+                <a:solidFill>
+                  <a:srgbClr val="F47B20"/>
+                </a:solidFill>
+                <a:latin typeface="Source Serif 4"/>
+              </a:rPr>
+              <a:t>1</a:t>
+            </a:r>
+          </a:p>
+        </p:txBody>
+      </p:sp>
+      <p:sp>
+        <p:nvSpPr>
+          <p:cNvPr id="7" name="TextBox 6"/>
           <p:cNvSpPr txBox="1"/>
           <p:nvPr/>
         </p:nvSpPr>
         <p:spPr>
           <a:xfrm>
-            <a:off x="1097280" y="4206240"/>
-            <a:ext cx="10058400" cy="365760"/>
+            <a:off x="1463040" y="2231136"/>
+            <a:ext cx="9875520" cy="1005840"/>
           </a:xfrm>
           <a:prstGeom prst="rect">
             <a:avLst/>
@@ -7334,31 +8305,47 @@
           <a:p>
             <a:pPr algn="l">
               <a:spcAft>
-                <a:spcPts val="540"/>
-              </a:spcAft>
-            </a:pPr>
-            <a:r>
-              <a:rPr sz="1200" b="1" i="0">
-                <a:solidFill>
-                  <a:srgbClr val="0B2D5B"/>
-                </a:solidFill>
-                <a:latin typeface="Inter Tight"/>
-              </a:rPr>
-              <a:t>ON THE BVR DINER MENU</a:t>
-            </a:r>
-          </a:p>
-        </p:txBody>
-      </p:sp>
-      <p:sp>
-        <p:nvSpPr>
-          <p:cNvPr id="9" name="TextBox 8"/>
+                <a:spcPts val="945"/>
+              </a:spcAft>
+            </a:pPr>
+            <a:r>
+              <a:rPr sz="2100" b="1" i="0">
+                <a:solidFill>
+                  <a:srgbClr val="1C1B19"/>
+                </a:solidFill>
+                <a:latin typeface="Source Serif 4"/>
+              </a:rPr>
+              <a:t>Memory</a:t>
+            </a:r>
+          </a:p>
+          <a:p>
+            <a:pPr algn="l">
+              <a:spcAft>
+                <a:spcPts val="945"/>
+              </a:spcAft>
+            </a:pPr>
+            <a:r>
+              <a:rPr sz="1600" b="0" i="0">
+                <a:solidFill>
+                  <a:srgbClr val="5D5A54"/>
+                </a:solidFill>
+                <a:latin typeface="Source Serif 4"/>
+              </a:rPr>
+              <a:t>Up to 40% worse at learning new things after an all-nighter.</a:t>
+            </a:r>
+          </a:p>
+        </p:txBody>
+      </p:sp>
+      <p:sp>
+        <p:nvSpPr>
+          <p:cNvPr id="8" name="TextBox 7"/>
           <p:cNvSpPr txBox="1"/>
           <p:nvPr/>
         </p:nvSpPr>
         <p:spPr>
           <a:xfrm>
-            <a:off x="1097280" y="4617720"/>
-            <a:ext cx="10058400" cy="640080"/>
+            <a:off x="822960" y="3200400"/>
+            <a:ext cx="548640" cy="1005840"/>
           </a:xfrm>
           <a:prstGeom prst="rect">
             <a:avLst/>
@@ -7373,101 +8360,31 @@
           <a:p>
             <a:pPr algn="l">
               <a:spcAft>
-                <a:spcPts val="900"/>
-              </a:spcAft>
-            </a:pPr>
-            <a:r>
-              <a:rPr sz="2000" b="0" i="0">
-                <a:solidFill>
-                  <a:srgbClr val="1C1B19"/>
-                </a:solidFill>
-                <a:latin typeface="Inter Tight"/>
-              </a:rPr>
-              <a:t>https://rmwtoolkit.github.io/bcds-toolkit/running-on-empty-high-school.html</a:t>
-            </a:r>
-          </a:p>
-        </p:txBody>
-      </p:sp>
-    </p:spTree>
-  </p:cSld>
-  <p:clrMapOvr>
-    <a:masterClrMapping/>
-  </p:clrMapOvr>
-</p:sld>
-</file>
-
-<file path=ppt/slides/slide2.xml><?xml version="1.0" encoding="utf-8"?>
-<p:sld xmlns:a="http://schemas.openxmlformats.org/drawingml/2006/main" xmlns:p="http://schemas.openxmlformats.org/presentationml/2006/main" xmlns:r="http://schemas.openxmlformats.org/officeDocument/2006/relationships" show="0">
-  <p:cSld>
-    <p:bg>
-      <p:bgPr>
-        <a:solidFill>
-          <a:srgbClr val="EEEBE4"/>
-        </a:solidFill>
-        <a:effectLst/>
-      </p:bgPr>
-    </p:bg>
-    <p:spTree>
-      <p:nvGrpSpPr>
-        <p:cNvPr id="1" name=""/>
-        <p:cNvGrpSpPr/>
-        <p:nvPr/>
-      </p:nvGrpSpPr>
-      <p:grpSpPr/>
-      <p:sp>
-        <p:nvSpPr>
-          <p:cNvPr id="2" name="Rectangle 1"/>
-          <p:cNvSpPr/>
-          <p:nvPr/>
-        </p:nvSpPr>
-        <p:spPr>
-          <a:xfrm>
-            <a:off x="0" y="0"/>
-            <a:ext cx="12191695" cy="384048"/>
-          </a:xfrm>
-          <a:prstGeom prst="rect">
-            <a:avLst/>
-          </a:prstGeom>
-          <a:solidFill>
-            <a:srgbClr val="0B2D5B"/>
-          </a:solidFill>
-          <a:ln>
-            <a:noFill/>
-          </a:ln>
-          <a:effectLst/>
-        </p:spPr>
-        <p:style>
-          <a:lnRef idx="1">
-            <a:schemeClr val="accent1"/>
-          </a:lnRef>
-          <a:fillRef idx="3">
-            <a:schemeClr val="accent1"/>
-          </a:fillRef>
-          <a:effectRef idx="2">
-            <a:schemeClr val="accent1"/>
-          </a:effectRef>
-          <a:fontRef idx="minor">
-            <a:schemeClr val="lt1"/>
-          </a:fontRef>
-        </p:style>
-        <p:txBody>
-          <a:bodyPr rtlCol="0" anchor="ctr"/>
-          <a:lstStyle/>
-          <a:p>
-            <a:pPr algn="ctr"/>
-          </a:p>
-        </p:txBody>
-      </p:sp>
-      <p:sp>
-        <p:nvSpPr>
-          <p:cNvPr id="3" name="TextBox 2"/>
+                <a:spcPts val="1170"/>
+              </a:spcAft>
+            </a:pPr>
+            <a:r>
+              <a:rPr sz="2600" b="1" i="0">
+                <a:solidFill>
+                  <a:srgbClr val="F47B20"/>
+                </a:solidFill>
+                <a:latin typeface="Source Serif 4"/>
+              </a:rPr>
+              <a:t>2</a:t>
+            </a:r>
+          </a:p>
+        </p:txBody>
+      </p:sp>
+      <p:sp>
+        <p:nvSpPr>
+          <p:cNvPr id="9" name="TextBox 8"/>
           <p:cNvSpPr txBox="1"/>
           <p:nvPr/>
         </p:nvSpPr>
         <p:spPr>
           <a:xfrm>
-            <a:off x="548640" y="100584"/>
-            <a:ext cx="10972800" cy="274320"/>
+            <a:off x="1463040" y="3236976"/>
+            <a:ext cx="9875520" cy="1005840"/>
           </a:xfrm>
           <a:prstGeom prst="rect">
             <a:avLst/>
@@ -7482,31 +8399,47 @@
           <a:p>
             <a:pPr algn="l">
               <a:spcAft>
-                <a:spcPts val="495"/>
-              </a:spcAft>
-            </a:pPr>
-            <a:r>
-              <a:rPr sz="1100" b="1" i="0">
-                <a:solidFill>
-                  <a:srgbClr val="FFFFFF"/>
-                </a:solidFill>
-                <a:latin typeface="Inter Tight"/>
-              </a:rPr>
-              <a:t>TEACHER PAGE  ·  skipped when you present  ·  Before you teach</a:t>
-            </a:r>
-          </a:p>
-        </p:txBody>
-      </p:sp>
-      <p:sp>
-        <p:nvSpPr>
-          <p:cNvPr id="4" name="TextBox 3"/>
+                <a:spcPts val="945"/>
+              </a:spcAft>
+            </a:pPr>
+            <a:r>
+              <a:rPr sz="2100" b="1" i="0">
+                <a:solidFill>
+                  <a:srgbClr val="1C1B19"/>
+                </a:solidFill>
+                <a:latin typeface="Source Serif 4"/>
+              </a:rPr>
+              <a:t>Mood</a:t>
+            </a:r>
+          </a:p>
+          <a:p>
+            <a:pPr algn="l">
+              <a:spcAft>
+                <a:spcPts val="945"/>
+              </a:spcAft>
+            </a:pPr>
+            <a:r>
+              <a:rPr sz="1600" b="0" i="0">
+                <a:solidFill>
+                  <a:srgbClr val="5D5A54"/>
+                </a:solidFill>
+                <a:latin typeface="Source Serif 4"/>
+              </a:rPr>
+              <a:t>The threat detector reacted about 60% more strongly.</a:t>
+            </a:r>
+          </a:p>
+        </p:txBody>
+      </p:sp>
+      <p:sp>
+        <p:nvSpPr>
+          <p:cNvPr id="10" name="TextBox 9"/>
           <p:cNvSpPr txBox="1"/>
           <p:nvPr/>
         </p:nvSpPr>
         <p:spPr>
           <a:xfrm>
-            <a:off x="548640" y="685800"/>
-            <a:ext cx="10972800" cy="640080"/>
+            <a:off x="822960" y="4206240"/>
+            <a:ext cx="548640" cy="1005840"/>
           </a:xfrm>
           <a:prstGeom prst="rect">
             <a:avLst/>
@@ -7521,31 +8454,31 @@
           <a:p>
             <a:pPr algn="l">
               <a:spcAft>
-                <a:spcPts val="1350"/>
-              </a:spcAft>
-            </a:pPr>
-            <a:r>
-              <a:rPr sz="3000" b="1" i="0">
-                <a:solidFill>
-                  <a:srgbClr val="1C1B19"/>
-                </a:solidFill>
-                <a:latin typeface="Source Serif 4"/>
-              </a:rPr>
-              <a:t>Before you teach</a:t>
-            </a:r>
-          </a:p>
-        </p:txBody>
-      </p:sp>
-      <p:sp>
-        <p:nvSpPr>
-          <p:cNvPr id="5" name="TextBox 4"/>
+                <a:spcPts val="1170"/>
+              </a:spcAft>
+            </a:pPr>
+            <a:r>
+              <a:rPr sz="2600" b="1" i="0">
+                <a:solidFill>
+                  <a:srgbClr val="F47B20"/>
+                </a:solidFill>
+                <a:latin typeface="Source Serif 4"/>
+              </a:rPr>
+              <a:t>3</a:t>
+            </a:r>
+          </a:p>
+        </p:txBody>
+      </p:sp>
+      <p:sp>
+        <p:nvSpPr>
+          <p:cNvPr id="11" name="TextBox 10"/>
           <p:cNvSpPr txBox="1"/>
           <p:nvPr/>
         </p:nvSpPr>
         <p:spPr>
           <a:xfrm>
-            <a:off x="548640" y="1463040"/>
-            <a:ext cx="5394960" cy="4937760"/>
+            <a:off x="1463040" y="4242816"/>
+            <a:ext cx="9875520" cy="1005840"/>
           </a:xfrm>
           <a:prstGeom prst="rect">
             <a:avLst/>
@@ -7560,159 +8493,47 @@
           <a:p>
             <a:pPr algn="l">
               <a:spcAft>
-                <a:spcPts val="585"/>
-              </a:spcAft>
-            </a:pPr>
-            <a:r>
-              <a:rPr sz="1500" b="1" i="0">
+                <a:spcPts val="945"/>
+              </a:spcAft>
+            </a:pPr>
+            <a:r>
+              <a:rPr sz="2100" b="1" i="0">
                 <a:solidFill>
                   <a:srgbClr val="1C1B19"/>
                 </a:solidFill>
                 <a:latin typeface="Source Serif 4"/>
               </a:rPr>
-              <a:t>Never rank sleep.</a:t>
-            </a:r>
-          </a:p>
-          <a:p>
-            <a:pPr algn="l">
-              <a:spcAft>
-                <a:spcPts val="585"/>
-              </a:spcAft>
-            </a:pPr>
-            <a:r>
-              <a:rPr sz="1300" b="0" i="0">
-                <a:solidFill>
-                  <a:srgbClr val="1C1B19"/>
-                </a:solidFill>
-                <a:latin typeface="Source Serif 4"/>
-              </a:rPr>
-              <a:t>Keep the hours tally anonymous. Don't praise the student who sleeps nine hours or joke about the one who sleeps four. Some students are proud of how little they sleep, and some are embarrassed. Both can stay private.</a:t>
-            </a:r>
-          </a:p>
-          <a:p>
-            <a:pPr algn="l">
-              <a:spcAft>
-                <a:spcPts val="585"/>
-              </a:spcAft>
-            </a:pPr>
-            <a:r>
-              <a:rPr sz="1300" b="0" i="0">
-                <a:solidFill>
-                  <a:srgbClr val="1C1B19"/>
-                </a:solidFill>
-                <a:latin typeface="Source Serif 4"/>
-              </a:rPr>
-              <a:t/>
-            </a:r>
-          </a:p>
-          <a:p>
-            <a:pPr algn="l">
-              <a:spcAft>
-                <a:spcPts val="585"/>
-              </a:spcAft>
-            </a:pPr>
-            <a:r>
-              <a:rPr sz="1500" b="1" i="0">
-                <a:solidFill>
-                  <a:srgbClr val="1C1B19"/>
-                </a:solidFill>
-                <a:latin typeface="Source Serif 4"/>
-              </a:rPr>
-              <a:t>Many schedules aren't the student's to set.</a:t>
-            </a:r>
-          </a:p>
-          <a:p>
-            <a:pPr algn="l">
-              <a:spcAft>
-                <a:spcPts val="585"/>
-              </a:spcAft>
-            </a:pPr>
-            <a:r>
-              <a:rPr sz="1300" b="0" i="0">
-                <a:solidFill>
-                  <a:srgbClr val="1C1B19"/>
-                </a:solidFill>
-                <a:latin typeface="Source Serif 4"/>
-              </a:rPr>
-              <a:t>Practice, a job, a long bus ride, siblings to watch, a shared room, a parent working nights. Present every tool as something to try within what they control. Blaming a student for a schedule the family needs will close the conversation fast.</a:t>
-            </a:r>
-          </a:p>
-          <a:p>
-            <a:pPr algn="l">
-              <a:spcAft>
-                <a:spcPts val="585"/>
-              </a:spcAft>
-            </a:pPr>
-            <a:r>
-              <a:rPr sz="1300" b="0" i="0">
-                <a:solidFill>
-                  <a:srgbClr val="1C1B19"/>
-                </a:solidFill>
-                <a:latin typeface="Source Serif 4"/>
-              </a:rPr>
-              <a:t/>
-            </a:r>
-          </a:p>
-          <a:p>
-            <a:pPr algn="l">
-              <a:spcAft>
-                <a:spcPts val="585"/>
-              </a:spcAft>
-            </a:pPr>
-            <a:r>
-              <a:rPr sz="1500" b="1" i="0">
-                <a:solidFill>
-                  <a:srgbClr val="1C1B19"/>
-                </a:solidFill>
-                <a:latin typeface="Source Serif 4"/>
-              </a:rPr>
-              <a:t>Don't recommend melatonin or pills.</a:t>
-            </a:r>
-          </a:p>
-          <a:p>
-            <a:pPr algn="l">
-              <a:spcAft>
-                <a:spcPts val="585"/>
-              </a:spcAft>
-            </a:pPr>
-            <a:r>
-              <a:rPr sz="1300" b="0" i="0">
-                <a:solidFill>
-                  <a:srgbClr val="1C1B19"/>
-                </a:solidFill>
-                <a:latin typeface="Source Serif 4"/>
-              </a:rPr>
-              <a:t>If students ask, the answer is: it's a timing signal, gummies vary a lot from the label, and a doctor or the school nurse should weigh in first. Don't suggest doses.</a:t>
-            </a:r>
-          </a:p>
-          <a:p>
-            <a:pPr algn="l">
-              <a:spcAft>
-                <a:spcPts val="585"/>
-              </a:spcAft>
-            </a:pPr>
-            <a:r>
-              <a:rPr sz="1300" b="0" i="0">
-                <a:solidFill>
-                  <a:srgbClr val="1C1B19"/>
-                </a:solidFill>
-                <a:latin typeface="Source Serif 4"/>
-              </a:rPr>
-              <a:t/>
-            </a:r>
-          </a:p>
-        </p:txBody>
-      </p:sp>
-      <p:sp>
-        <p:nvSpPr>
-          <p:cNvPr id="6" name="TextBox 5"/>
+              <a:t>Judgment</a:t>
+            </a:r>
+          </a:p>
+          <a:p>
+            <a:pPr algn="l">
+              <a:spcAft>
+                <a:spcPts val="945"/>
+              </a:spcAft>
+            </a:pPr>
+            <a:r>
+              <a:rPr sz="1600" b="0" i="0">
+                <a:solidFill>
+                  <a:srgbClr val="5D5A54"/>
+                </a:solidFill>
+                <a:latin typeface="Source Serif 4"/>
+              </a:rPr>
+              <a:t>Focus and patience are among the first to fade.</a:t>
+            </a:r>
+          </a:p>
+        </p:txBody>
+      </p:sp>
+      <p:sp>
+        <p:nvSpPr>
+          <p:cNvPr id="12" name="TextBox 11"/>
           <p:cNvSpPr txBox="1"/>
           <p:nvPr/>
         </p:nvSpPr>
         <p:spPr>
           <a:xfrm>
-            <a:off x="6217920" y="1463040"/>
-            <a:ext cx="5394960" cy="4937760"/>
+            <a:off x="822960" y="5212080"/>
+            <a:ext cx="548640" cy="1005840"/>
           </a:xfrm>
           <a:prstGeom prst="rect">
             <a:avLst/>
@@ -7727,229 +8548,31 @@
           <a:p>
             <a:pPr algn="l">
               <a:spcAft>
-                <a:spcPts val="585"/>
-              </a:spcAft>
-            </a:pPr>
-            <a:r>
-              <a:rPr sz="1500" b="1" i="0">
-                <a:solidFill>
-                  <a:srgbClr val="1C1B19"/>
-                </a:solidFill>
-                <a:latin typeface="Source Serif 4"/>
-              </a:rPr>
-              <a:t>Rides are a safety topic for 9th graders.</a:t>
-            </a:r>
-          </a:p>
-          <a:p>
-            <a:pPr algn="l">
-              <a:spcAft>
-                <a:spcPts val="585"/>
-              </a:spcAft>
-            </a:pPr>
-            <a:r>
-              <a:rPr sz="1300" b="0" i="0">
-                <a:solidFill>
-                  <a:srgbClr val="1C1B19"/>
-                </a:solidFill>
-                <a:latin typeface="Source Serif 4"/>
-              </a:rPr>
-              <a:t>Most 9th graders don't drive, but they ride with older teammates, siblings or parents who may be short on sleep. Make it clear that asking for a different ride is reasonable, and that calling a parent, caregiver or coach for one is a smart move.</a:t>
-            </a:r>
-          </a:p>
-          <a:p>
-            <a:pPr algn="l">
-              <a:spcAft>
-                <a:spcPts val="585"/>
-              </a:spcAft>
-            </a:pPr>
-            <a:r>
-              <a:rPr sz="1300" b="0" i="0">
-                <a:solidFill>
-                  <a:srgbClr val="1C1B19"/>
-                </a:solidFill>
-                <a:latin typeface="Source Serif 4"/>
-              </a:rPr>
-              <a:t/>
-            </a:r>
-          </a:p>
-          <a:p>
-            <a:pPr algn="l">
-              <a:spcAft>
-                <a:spcPts val="585"/>
-              </a:spcAft>
-            </a:pPr>
-            <a:r>
-              <a:rPr sz="1500" b="1" i="0">
-                <a:solidFill>
-                  <a:srgbClr val="1C1B19"/>
-                </a:solidFill>
-                <a:latin typeface="Source Serif 4"/>
-              </a:rPr>
-              <a:t>Some sleep trouble is something more.</a:t>
-            </a:r>
-          </a:p>
-          <a:p>
-            <a:pPr algn="l">
-              <a:spcAft>
-                <a:spcPts val="585"/>
-              </a:spcAft>
-            </a:pPr>
-            <a:r>
-              <a:rPr sz="1300" b="0" i="0">
-                <a:solidFill>
-                  <a:srgbClr val="1C1B19"/>
-                </a:solidFill>
-                <a:latin typeface="Source Serif 4"/>
-              </a:rPr>
-              <a:t>Weeks of not sleeping, exhaustion after a full night, loud snoring or gasping, or worry and sadness that keep a student up are worth a quiet word afterward and a walk to the nurse or a counselor. Don't ask about mood or safety in front of the class. If something comes up, pass it to a counselor that day.</a:t>
-            </a:r>
-          </a:p>
-          <a:p>
-            <a:pPr algn="l">
-              <a:spcAft>
-                <a:spcPts val="585"/>
-              </a:spcAft>
-            </a:pPr>
-            <a:r>
-              <a:rPr sz="1300" b="0" i="0">
-                <a:solidFill>
-                  <a:srgbClr val="1C1B19"/>
-                </a:solidFill>
-                <a:latin typeface="Source Serif 4"/>
-              </a:rPr>
-              <a:t/>
-            </a:r>
-          </a:p>
-          <a:p>
-            <a:pPr algn="l">
-              <a:spcAft>
-                <a:spcPts val="585"/>
-              </a:spcAft>
-            </a:pPr>
-            <a:r>
-              <a:rPr sz="1500" b="1" i="0">
-                <a:solidFill>
-                  <a:srgbClr val="1C1B19"/>
-                </a:solidFill>
-                <a:latin typeface="Source Serif 4"/>
-              </a:rPr>
-              <a:t>If something at home is keeping a student awake.</a:t>
-            </a:r>
-          </a:p>
-          <a:p>
-            <a:pPr algn="l">
-              <a:spcAft>
-                <a:spcPts val="585"/>
-              </a:spcAft>
-            </a:pPr>
-            <a:r>
-              <a:rPr sz="1300" b="0" i="0">
-                <a:solidFill>
-                  <a:srgbClr val="1C1B19"/>
-                </a:solidFill>
-                <a:latin typeface="Source Serif 4"/>
-              </a:rPr>
-              <a:t>Most of the time it's ordinary (a late dinner, a loud house). If a student hints that home isn't safe at night, thank them, don't press for details, and bring in a counselor that day.</a:t>
-            </a:r>
-          </a:p>
-          <a:p>
-            <a:pPr algn="l">
-              <a:spcAft>
-                <a:spcPts val="585"/>
-              </a:spcAft>
-            </a:pPr>
-            <a:r>
-              <a:rPr sz="1300" b="0" i="0">
-                <a:solidFill>
-                  <a:srgbClr val="1C1B19"/>
-                </a:solidFill>
-                <a:latin typeface="Source Serif 4"/>
-              </a:rPr>
-              <a:t/>
-            </a:r>
-          </a:p>
-        </p:txBody>
-      </p:sp>
-    </p:spTree>
-  </p:cSld>
-  <p:clrMapOvr>
-    <a:masterClrMapping/>
-  </p:clrMapOvr>
-</p:sld>
-</file>
-
-<file path=ppt/slides/slide3.xml><?xml version="1.0" encoding="utf-8"?>
-<p:sld xmlns:a="http://schemas.openxmlformats.org/drawingml/2006/main" xmlns:p="http://schemas.openxmlformats.org/presentationml/2006/main" xmlns:r="http://schemas.openxmlformats.org/officeDocument/2006/relationships" show="0">
-  <p:cSld>
-    <p:bg>
-      <p:bgPr>
-        <a:solidFill>
-          <a:srgbClr val="EEEBE4"/>
-        </a:solidFill>
-        <a:effectLst/>
-      </p:bgPr>
-    </p:bg>
-    <p:spTree>
-      <p:nvGrpSpPr>
-        <p:cNvPr id="1" name=""/>
-        <p:cNvGrpSpPr/>
-        <p:nvPr/>
-      </p:nvGrpSpPr>
-      <p:grpSpPr/>
-      <p:sp>
-        <p:nvSpPr>
-          <p:cNvPr id="2" name="Rectangle 1"/>
-          <p:cNvSpPr/>
-          <p:nvPr/>
-        </p:nvSpPr>
-        <p:spPr>
-          <a:xfrm>
-            <a:off x="0" y="0"/>
-            <a:ext cx="12191695" cy="384048"/>
-          </a:xfrm>
-          <a:prstGeom prst="rect">
-            <a:avLst/>
-          </a:prstGeom>
-          <a:solidFill>
-            <a:srgbClr val="0B2D5B"/>
-          </a:solidFill>
-          <a:ln>
-            <a:noFill/>
-          </a:ln>
-          <a:effectLst/>
-        </p:spPr>
-        <p:style>
-          <a:lnRef idx="1">
-            <a:schemeClr val="accent1"/>
-          </a:lnRef>
-          <a:fillRef idx="3">
-            <a:schemeClr val="accent1"/>
-          </a:fillRef>
-          <a:effectRef idx="2">
-            <a:schemeClr val="accent1"/>
-          </a:effectRef>
-          <a:fontRef idx="minor">
-            <a:schemeClr val="lt1"/>
-          </a:fontRef>
-        </p:style>
-        <p:txBody>
-          <a:bodyPr rtlCol="0" anchor="ctr"/>
-          <a:lstStyle/>
-          <a:p>
-            <a:pPr algn="ctr"/>
-          </a:p>
-        </p:txBody>
-      </p:sp>
-      <p:sp>
-        <p:nvSpPr>
-          <p:cNvPr id="3" name="TextBox 2"/>
+                <a:spcPts val="1170"/>
+              </a:spcAft>
+            </a:pPr>
+            <a:r>
+              <a:rPr sz="2600" b="1" i="0">
+                <a:solidFill>
+                  <a:srgbClr val="F47B20"/>
+                </a:solidFill>
+                <a:latin typeface="Source Serif 4"/>
+              </a:rPr>
+              <a:t>4</a:t>
+            </a:r>
+          </a:p>
+        </p:txBody>
+      </p:sp>
+      <p:sp>
+        <p:nvSpPr>
+          <p:cNvPr id="13" name="TextBox 12"/>
           <p:cNvSpPr txBox="1"/>
           <p:nvPr/>
         </p:nvSpPr>
         <p:spPr>
           <a:xfrm>
-            <a:off x="548640" y="100584"/>
-            <a:ext cx="10972800" cy="274320"/>
+            <a:off x="1463040" y="5248656"/>
+            <a:ext cx="9875520" cy="1005840"/>
           </a:xfrm>
           <a:prstGeom prst="rect">
             <a:avLst/>
@@ -7964,1144 +8587,33 @@
           <a:p>
             <a:pPr algn="l">
               <a:spcAft>
-                <a:spcPts val="495"/>
-              </a:spcAft>
-            </a:pPr>
-            <a:r>
-              <a:rPr sz="1100" b="1" i="0">
-                <a:solidFill>
-                  <a:srgbClr val="FFFFFF"/>
-                </a:solidFill>
-                <a:latin typeface="Inter Tight"/>
-              </a:rPr>
-              <a:t>TEACHER PAGE  ·  skipped when you present  ·  Every student in the room</a:t>
-            </a:r>
-          </a:p>
-        </p:txBody>
-      </p:sp>
-      <p:sp>
-        <p:nvSpPr>
-          <p:cNvPr id="4" name="TextBox 3"/>
-          <p:cNvSpPr txBox="1"/>
-          <p:nvPr/>
-        </p:nvSpPr>
-        <p:spPr>
-          <a:xfrm>
-            <a:off x="548640" y="685800"/>
-            <a:ext cx="10972800" cy="640080"/>
-          </a:xfrm>
-          <a:prstGeom prst="rect">
-            <a:avLst/>
-          </a:prstGeom>
-          <a:noFill/>
-        </p:spPr>
-        <p:txBody>
-          <a:bodyPr wrap="square" anchor="t" lIns="0" rIns="0" tIns="0" bIns="0">
-            <a:spAutoFit/>
-          </a:bodyPr>
-          <a:lstStyle/>
-          <a:p>
-            <a:pPr algn="l">
-              <a:spcAft>
-                <a:spcPts val="1350"/>
-              </a:spcAft>
-            </a:pPr>
-            <a:r>
-              <a:rPr sz="3000" b="1" i="0">
+                <a:spcPts val="945"/>
+              </a:spcAft>
+            </a:pPr>
+            <a:r>
+              <a:rPr sz="2100" b="1" i="0">
                 <a:solidFill>
                   <a:srgbClr val="1C1B19"/>
                 </a:solidFill>
                 <a:latin typeface="Source Serif 4"/>
               </a:rPr>
-              <a:t>Every student in the room</a:t>
-            </a:r>
-          </a:p>
-        </p:txBody>
-      </p:sp>
-      <p:sp>
-        <p:nvSpPr>
-          <p:cNvPr id="5" name="TextBox 4"/>
-          <p:cNvSpPr txBox="1"/>
-          <p:nvPr/>
-        </p:nvSpPr>
-        <p:spPr>
-          <a:xfrm>
-            <a:off x="548640" y="1325880"/>
-            <a:ext cx="10972800" cy="365760"/>
-          </a:xfrm>
-          <a:prstGeom prst="rect">
-            <a:avLst/>
-          </a:prstGeom>
-          <a:noFill/>
-        </p:spPr>
-        <p:txBody>
-          <a:bodyPr wrap="square" anchor="t" lIns="0" rIns="0" tIns="0" bIns="0">
-            <a:spAutoFit/>
-          </a:bodyPr>
-          <a:lstStyle/>
-          <a:p>
-            <a:pPr algn="l">
-              <a:spcAft>
-                <a:spcPts val="630"/>
-              </a:spcAft>
-            </a:pPr>
-            <a:r>
-              <a:rPr sz="1400" b="0" i="0">
+              <a:t>Safety</a:t>
+            </a:r>
+          </a:p>
+          <a:p>
+            <a:pPr algn="l">
+              <a:spcAft>
+                <a:spcPts val="945"/>
+              </a:spcAft>
+            </a:pPr>
+            <a:r>
+              <a:rPr sz="1600" b="0" i="0">
                 <a:solidFill>
                   <a:srgbClr val="5D5A54"/>
                 </a:solidFill>
-                <a:latin typeface="Inter Tight"/>
-              </a:rPr>
-              <a:t>Culture, family, identity, ability and money: what to keep in mind for this topic.</a:t>
-            </a:r>
-          </a:p>
-        </p:txBody>
-      </p:sp>
-      <p:sp>
-        <p:nvSpPr>
-          <p:cNvPr id="6" name="TextBox 5"/>
-          <p:cNvSpPr txBox="1"/>
-          <p:nvPr/>
-        </p:nvSpPr>
-        <p:spPr>
-          <a:xfrm>
-            <a:off x="548640" y="1828800"/>
-            <a:ext cx="5394960" cy="4572000"/>
-          </a:xfrm>
-          <a:prstGeom prst="rect">
-            <a:avLst/>
-          </a:prstGeom>
-          <a:noFill/>
-        </p:spPr>
-        <p:txBody>
-          <a:bodyPr wrap="square" anchor="t" lIns="0" rIns="0" tIns="0" bIns="0">
-            <a:spAutoFit/>
-          </a:bodyPr>
-          <a:lstStyle/>
-          <a:p>
-            <a:pPr algn="l">
-              <a:spcAft>
-                <a:spcPts val="585"/>
-              </a:spcAft>
-            </a:pPr>
-            <a:r>
-              <a:rPr sz="1500" b="1" i="0">
-                <a:solidFill>
-                  <a:srgbClr val="1C1B19"/>
-                </a:solidFill>
-                <a:latin typeface="Source Serif 4"/>
-              </a:rPr>
-              <a:t>Who keeps the house running at night.</a:t>
-            </a:r>
-          </a:p>
-          <a:p>
-            <a:pPr algn="l">
-              <a:spcAft>
-                <a:spcPts val="585"/>
-              </a:spcAft>
-            </a:pPr>
-            <a:r>
-              <a:rPr sz="1300" b="0" i="0">
-                <a:solidFill>
-                  <a:srgbClr val="1C1B19"/>
-                </a:solidFill>
-                <a:latin typeface="Source Serif 4"/>
-              </a:rPr>
-              <a:t>Students live with one parent, two, a grandparent, foster or kinship caregivers, or move between homes. Some get younger siblings to bed while a parent or caregiver works. Say "the adults at home" and keep the "what does a school night look like at your place?" question private.</a:t>
-            </a:r>
-          </a:p>
-          <a:p>
-            <a:pPr algn="l">
-              <a:spcAft>
-                <a:spcPts val="585"/>
-              </a:spcAft>
-            </a:pPr>
-            <a:r>
-              <a:rPr sz="1300" b="0" i="0">
-                <a:solidFill>
-                  <a:srgbClr val="1C1B19"/>
-                </a:solidFill>
-                <a:latin typeface="Source Serif 4"/>
-              </a:rPr>
-              <a:t/>
-            </a:r>
-          </a:p>
-          <a:p>
-            <a:pPr algn="l">
-              <a:spcAft>
-                <a:spcPts val="585"/>
-              </a:spcAft>
-            </a:pPr>
-            <a:r>
-              <a:rPr sz="1500" b="1" i="0">
-                <a:solidFill>
-                  <a:srgbClr val="1C1B19"/>
-                </a:solidFill>
-                <a:latin typeface="Source Serif 4"/>
-              </a:rPr>
-              <a:t>Work, money and space.</a:t>
-            </a:r>
-          </a:p>
-          <a:p>
-            <a:pPr algn="l">
-              <a:spcAft>
-                <a:spcPts val="585"/>
-              </a:spcAft>
-            </a:pPr>
-            <a:r>
-              <a:rPr sz="1300" b="0" i="0">
-                <a:solidFill>
-                  <a:srgbClr val="1C1B19"/>
-                </a:solidFill>
-                <a:latin typeface="Source Serif 4"/>
-              </a:rPr>
-              <a:t>Some 9th graders babysit, help with a family business, or share a bedroom. Every lever in this lesson is free: morning light, a steady wake-up time, a caffeine cutoff, the phone across the room. A fan or earplugs help in a shared room. Don't suggest buying anything.</a:t>
-            </a:r>
-          </a:p>
-          <a:p>
-            <a:pPr algn="l">
-              <a:spcAft>
-                <a:spcPts val="585"/>
-              </a:spcAft>
-            </a:pPr>
-            <a:r>
-              <a:rPr sz="1300" b="0" i="0">
-                <a:solidFill>
-                  <a:srgbClr val="1C1B19"/>
-                </a:solidFill>
-                <a:latin typeface="Source Serif 4"/>
-              </a:rPr>
-              <a:t/>
-            </a:r>
-          </a:p>
-          <a:p>
-            <a:pPr algn="l">
-              <a:spcAft>
-                <a:spcPts val="585"/>
-              </a:spcAft>
-            </a:pPr>
-            <a:r>
-              <a:rPr sz="1500" b="1" i="0">
-                <a:solidFill>
-                  <a:srgbClr val="1C1B19"/>
-                </a:solidFill>
-                <a:latin typeface="Source Serif 4"/>
-              </a:rPr>
-              <a:t>Family rhythms vary.</a:t>
-            </a:r>
-          </a:p>
-          <a:p>
-            <a:pPr algn="l">
-              <a:spcAft>
-                <a:spcPts val="585"/>
-              </a:spcAft>
-            </a:pPr>
-            <a:r>
-              <a:rPr sz="1300" b="0" i="0">
-                <a:solidFill>
-                  <a:srgbClr val="1C1B19"/>
-                </a:solidFill>
-                <a:latin typeface="Source Serif 4"/>
-              </a:rPr>
-              <a:t>Dinner at 6 or at 9, tea or coffee at the table, a busy house late at night: norms differ from home to home. Treat every rhythm as normal and ask what students' own nights look like. Avoid "In X families" generalizations.</a:t>
-            </a:r>
-          </a:p>
-          <a:p>
-            <a:pPr algn="l">
-              <a:spcAft>
-                <a:spcPts val="585"/>
-              </a:spcAft>
-            </a:pPr>
-            <a:r>
-              <a:rPr sz="1300" b="0" i="0">
-                <a:solidFill>
-                  <a:srgbClr val="1C1B19"/>
-                </a:solidFill>
-                <a:latin typeface="Source Serif 4"/>
-              </a:rPr>
-              <a:t/>
-            </a:r>
-          </a:p>
-        </p:txBody>
-      </p:sp>
-      <p:sp>
-        <p:nvSpPr>
-          <p:cNvPr id="7" name="TextBox 6"/>
-          <p:cNvSpPr txBox="1"/>
-          <p:nvPr/>
-        </p:nvSpPr>
-        <p:spPr>
-          <a:xfrm>
-            <a:off x="6217920" y="1828800"/>
-            <a:ext cx="5394960" cy="4572000"/>
-          </a:xfrm>
-          <a:prstGeom prst="rect">
-            <a:avLst/>
-          </a:prstGeom>
-          <a:noFill/>
-        </p:spPr>
-        <p:txBody>
-          <a:bodyPr wrap="square" anchor="t" lIns="0" rIns="0" tIns="0" bIns="0">
-            <a:spAutoFit/>
-          </a:bodyPr>
-          <a:lstStyle/>
-          <a:p>
-            <a:pPr algn="l">
-              <a:spcAft>
-                <a:spcPts val="585"/>
-              </a:spcAft>
-            </a:pPr>
-            <a:r>
-              <a:rPr sz="1500" b="1" i="0">
-                <a:solidFill>
-                  <a:srgbClr val="1C1B19"/>
-                </a:solidFill>
-                <a:latin typeface="Source Serif 4"/>
-              </a:rPr>
-              <a:t>Faith can shape the clock.</a:t>
-            </a:r>
-          </a:p>
-          <a:p>
-            <a:pPr algn="l">
-              <a:spcAft>
-                <a:spcPts val="585"/>
-              </a:spcAft>
-            </a:pPr>
-            <a:r>
-              <a:rPr sz="1300" b="0" i="0">
-                <a:solidFill>
-                  <a:srgbClr val="1C1B19"/>
-                </a:solidFill>
-                <a:latin typeface="Source Serif 4"/>
-              </a:rPr>
-              <a:t>Some students rise early or stay up for prayer, attend religious school after school, or fast during parts of the year. Treat those as part of the schedule they plan around. Prayer, meditation, or whatever grounds you can be a good wind-down.</a:t>
-            </a:r>
-          </a:p>
-          <a:p>
-            <a:pPr algn="l">
-              <a:spcAft>
-                <a:spcPts val="585"/>
-              </a:spcAft>
-            </a:pPr>
-            <a:r>
-              <a:rPr sz="1300" b="0" i="0">
-                <a:solidFill>
-                  <a:srgbClr val="1C1B19"/>
-                </a:solidFill>
-                <a:latin typeface="Source Serif 4"/>
-              </a:rPr>
-              <a:t/>
-            </a:r>
-          </a:p>
-          <a:p>
-            <a:pPr algn="l">
-              <a:spcAft>
-                <a:spcPts val="585"/>
-              </a:spcAft>
-            </a:pPr>
-            <a:r>
-              <a:rPr sz="1500" b="1" i="0">
-                <a:solidFill>
-                  <a:srgbClr val="1C1B19"/>
-                </a:solidFill>
-                <a:latin typeface="Source Serif 4"/>
-              </a:rPr>
-              <a:t>Bodies and brains sleep differently.</a:t>
-            </a:r>
-          </a:p>
-          <a:p>
-            <a:pPr algn="l">
-              <a:spcAft>
-                <a:spcPts val="585"/>
-              </a:spcAft>
-            </a:pPr>
-            <a:r>
-              <a:rPr sz="1300" b="0" i="0">
-                <a:solidFill>
-                  <a:srgbClr val="1C1B19"/>
-                </a:solidFill>
-                <a:latin typeface="Source Serif 4"/>
-              </a:rPr>
-              <a:t>Students with ADHD, autism, anxiety, a chronic illness, or medications may have a harder time with sleep. Some need a certain sound, darkness or routine. A student who dozes in class needs a check-in with the nurse or a counselor before any discipline.</a:t>
-            </a:r>
-          </a:p>
-          <a:p>
-            <a:pPr algn="l">
-              <a:spcAft>
-                <a:spcPts val="585"/>
-              </a:spcAft>
-            </a:pPr>
-            <a:r>
-              <a:rPr sz="1300" b="0" i="0">
-                <a:solidFill>
-                  <a:srgbClr val="1C1B19"/>
-                </a:solidFill>
-                <a:latin typeface="Source Serif 4"/>
-              </a:rPr>
-              <a:t/>
-            </a:r>
-          </a:p>
-          <a:p>
-            <a:pPr algn="l">
-              <a:spcAft>
-                <a:spcPts val="585"/>
-              </a:spcAft>
-            </a:pPr>
-            <a:r>
-              <a:rPr sz="1500" b="1" i="0">
-                <a:solidFill>
-                  <a:srgbClr val="1C1B19"/>
-                </a:solidFill>
-                <a:latin typeface="Source Serif 4"/>
-              </a:rPr>
-              <a:t>Language and time zones.</a:t>
-            </a:r>
-          </a:p>
-          <a:p>
-            <a:pPr algn="l">
-              <a:spcAft>
-                <a:spcPts val="585"/>
-              </a:spcAft>
-            </a:pPr>
-            <a:r>
-              <a:rPr sz="1300" b="0" i="0">
-                <a:solidFill>
-                  <a:srgbClr val="1C1B19"/>
-                </a:solidFill>
-                <a:latin typeface="Source Serif 4"/>
-              </a:rPr>
-              <a:t>Some students translate for family in the evening or call relatives in other countries late at night. That time matters. The take-home sheet is in plain language a student can share at home.</a:t>
-            </a:r>
-          </a:p>
-          <a:p>
-            <a:pPr algn="l">
-              <a:spcAft>
-                <a:spcPts val="585"/>
-              </a:spcAft>
-            </a:pPr>
-            <a:r>
-              <a:rPr sz="1300" b="0" i="0">
-                <a:solidFill>
-                  <a:srgbClr val="1C1B19"/>
-                </a:solidFill>
-                <a:latin typeface="Source Serif 4"/>
-              </a:rPr>
-              <a:t/>
-            </a:r>
-          </a:p>
-        </p:txBody>
-      </p:sp>
-    </p:spTree>
-  </p:cSld>
-  <p:clrMapOvr>
-    <a:masterClrMapping/>
-  </p:clrMapOvr>
-</p:sld>
-</file>
-
-<file path=ppt/slides/slide4.xml><?xml version="1.0" encoding="utf-8"?>
-<p:sld xmlns:a="http://schemas.openxmlformats.org/drawingml/2006/main" xmlns:p="http://schemas.openxmlformats.org/presentationml/2006/main" xmlns:r="http://schemas.openxmlformats.org/officeDocument/2006/relationships" show="0">
-  <p:cSld>
-    <p:bg>
-      <p:bgPr>
-        <a:solidFill>
-          <a:srgbClr val="EEEBE4"/>
-        </a:solidFill>
-        <a:effectLst/>
-      </p:bgPr>
-    </p:bg>
-    <p:spTree>
-      <p:nvGrpSpPr>
-        <p:cNvPr id="1" name=""/>
-        <p:cNvGrpSpPr/>
-        <p:nvPr/>
-      </p:nvGrpSpPr>
-      <p:grpSpPr/>
-      <p:sp>
-        <p:nvSpPr>
-          <p:cNvPr id="2" name="Rectangle 1"/>
-          <p:cNvSpPr/>
-          <p:nvPr/>
-        </p:nvSpPr>
-        <p:spPr>
-          <a:xfrm>
-            <a:off x="0" y="0"/>
-            <a:ext cx="12191695" cy="384048"/>
-          </a:xfrm>
-          <a:prstGeom prst="rect">
-            <a:avLst/>
-          </a:prstGeom>
-          <a:solidFill>
-            <a:srgbClr val="0B2D5B"/>
-          </a:solidFill>
-          <a:ln>
-            <a:noFill/>
-          </a:ln>
-          <a:effectLst/>
-        </p:spPr>
-        <p:style>
-          <a:lnRef idx="1">
-            <a:schemeClr val="accent1"/>
-          </a:lnRef>
-          <a:fillRef idx="3">
-            <a:schemeClr val="accent1"/>
-          </a:fillRef>
-          <a:effectRef idx="2">
-            <a:schemeClr val="accent1"/>
-          </a:effectRef>
-          <a:fontRef idx="minor">
-            <a:schemeClr val="lt1"/>
-          </a:fontRef>
-        </p:style>
-        <p:txBody>
-          <a:bodyPr rtlCol="0" anchor="ctr"/>
-          <a:lstStyle/>
-          <a:p>
-            <a:pPr algn="ctr"/>
-          </a:p>
-        </p:txBody>
-      </p:sp>
-      <p:sp>
-        <p:nvSpPr>
-          <p:cNvPr id="3" name="TextBox 2"/>
-          <p:cNvSpPr txBox="1"/>
-          <p:nvPr/>
-        </p:nvSpPr>
-        <p:spPr>
-          <a:xfrm>
-            <a:off x="548640" y="100584"/>
-            <a:ext cx="10972800" cy="274320"/>
-          </a:xfrm>
-          <a:prstGeom prst="rect">
-            <a:avLst/>
-          </a:prstGeom>
-          <a:noFill/>
-        </p:spPr>
-        <p:txBody>
-          <a:bodyPr wrap="square" anchor="t" lIns="0" rIns="0" tIns="0" bIns="0">
-            <a:spAutoFit/>
-          </a:bodyPr>
-          <a:lstStyle/>
-          <a:p>
-            <a:pPr algn="l">
-              <a:spcAft>
-                <a:spcPts val="495"/>
-              </a:spcAft>
-            </a:pPr>
-            <a:r>
-              <a:rPr sz="1100" b="1" i="0">
-                <a:solidFill>
-                  <a:srgbClr val="FFFFFF"/>
-                </a:solidFill>
-                <a:latin typeface="Inter Tight"/>
-              </a:rPr>
-              <a:t>TEACHER PAGE  ·  skipped when you present  ·  Background</a:t>
-            </a:r>
-          </a:p>
-        </p:txBody>
-      </p:sp>
-      <p:sp>
-        <p:nvSpPr>
-          <p:cNvPr id="4" name="TextBox 3"/>
-          <p:cNvSpPr txBox="1"/>
-          <p:nvPr/>
-        </p:nvSpPr>
-        <p:spPr>
-          <a:xfrm>
-            <a:off x="548640" y="685800"/>
-            <a:ext cx="10972800" cy="640080"/>
-          </a:xfrm>
-          <a:prstGeom prst="rect">
-            <a:avLst/>
-          </a:prstGeom>
-          <a:noFill/>
-        </p:spPr>
-        <p:txBody>
-          <a:bodyPr wrap="square" anchor="t" lIns="0" rIns="0" tIns="0" bIns="0">
-            <a:spAutoFit/>
-          </a:bodyPr>
-          <a:lstStyle/>
-          <a:p>
-            <a:pPr algn="l">
-              <a:spcAft>
-                <a:spcPts val="1350"/>
-              </a:spcAft>
-            </a:pPr>
-            <a:r>
-              <a:rPr sz="3000" b="1" i="0">
-                <a:solidFill>
-                  <a:srgbClr val="1C1B19"/>
-                </a:solidFill>
-                <a:latin typeface="Source Serif 4"/>
-              </a:rPr>
-              <a:t>What the research says</a:t>
-            </a:r>
-          </a:p>
-        </p:txBody>
-      </p:sp>
-      <p:sp>
-        <p:nvSpPr>
-          <p:cNvPr id="5" name="TextBox 4"/>
-          <p:cNvSpPr txBox="1"/>
-          <p:nvPr/>
-        </p:nvSpPr>
-        <p:spPr>
-          <a:xfrm>
-            <a:off x="548640" y="1463040"/>
-            <a:ext cx="5394960" cy="4937760"/>
-          </a:xfrm>
-          <a:prstGeom prst="rect">
-            <a:avLst/>
-          </a:prstGeom>
-          <a:noFill/>
-        </p:spPr>
-        <p:txBody>
-          <a:bodyPr wrap="square" anchor="t" lIns="0" rIns="0" tIns="0" bIns="0">
-            <a:spAutoFit/>
-          </a:bodyPr>
-          <a:lstStyle/>
-          <a:p>
-            <a:pPr algn="l">
-              <a:spcAft>
-                <a:spcPts val="585"/>
-              </a:spcAft>
-            </a:pPr>
-            <a:r>
-              <a:rPr sz="1300" b="0" i="0">
-                <a:solidFill>
-                  <a:srgbClr val="1C1B19"/>
-                </a:solidFill>
-                <a:latin typeface="Source Serif 4"/>
-              </a:rPr>
-              <a:t>In a 1998 study of 10th graders whose school started at 7:20, 12 of 25 fell straight into dream (REM) sleep on morning nap tests, a pattern usually seen in narcolepsy. During puberty, melatonin release starts later at night.</a:t>
-            </a:r>
-          </a:p>
-          <a:p>
-            <a:pPr algn="l">
-              <a:spcAft>
-                <a:spcPts val="585"/>
-              </a:spcAft>
-            </a:pPr>
-            <a:r>
-              <a:rPr sz="1050" b="0" i="0">
-                <a:solidFill>
-                  <a:srgbClr val="5D5A54"/>
-                </a:solidFill>
-                <a:latin typeface="Inter Tight"/>
-              </a:rPr>
-              <a:t>Carskadon et al., Sleep, 1998</a:t>
-            </a:r>
-          </a:p>
-          <a:p>
-            <a:pPr algn="l">
-              <a:spcAft>
-                <a:spcPts val="585"/>
-              </a:spcAft>
-            </a:pPr>
-            <a:r>
-              <a:rPr sz="1300" b="0" i="0">
-                <a:solidFill>
-                  <a:srgbClr val="1C1B19"/>
-                </a:solidFill>
-                <a:latin typeface="Source Serif 4"/>
-              </a:rPr>
-              <a:t>Teens ages 13 to 18 need 8 to 10 hours of sleep. In 2023, about 77% of U.S. high school students got less than 8 hours on a typical school night.</a:t>
-            </a:r>
-          </a:p>
-          <a:p>
-            <a:pPr algn="l">
-              <a:spcAft>
-                <a:spcPts val="585"/>
-              </a:spcAft>
-            </a:pPr>
-            <a:r>
-              <a:rPr sz="1050" b="0" i="0">
-                <a:solidFill>
-                  <a:srgbClr val="5D5A54"/>
-                </a:solidFill>
-                <a:latin typeface="Inter Tight"/>
-              </a:rPr>
-              <a:t>American Academy of Sleep Medicine (Paruthi et al., 2016); CDC Youth Risk Behavior Survey, 2023</a:t>
-            </a:r>
-          </a:p>
-          <a:p>
-            <a:pPr algn="l">
-              <a:spcAft>
-                <a:spcPts val="585"/>
-              </a:spcAft>
-            </a:pPr>
-            <a:r>
-              <a:rPr sz="1300" b="0" i="0">
-                <a:solidFill>
-                  <a:srgbClr val="1C1B19"/>
-                </a:solidFill>
-                <a:latin typeface="Source Serif 4"/>
-              </a:rPr>
-              <a:t>When Seattle moved high school start times from 7:50 to 8:45, students got about 34 more minutes of sleep a night and median grades rose 4.5%. One district, not a randomized trial.</a:t>
-            </a:r>
-          </a:p>
-          <a:p>
-            <a:pPr algn="l">
-              <a:spcAft>
-                <a:spcPts val="585"/>
-              </a:spcAft>
-            </a:pPr>
-            <a:r>
-              <a:rPr sz="1050" b="0" i="0">
-                <a:solidFill>
-                  <a:srgbClr val="5D5A54"/>
-                </a:solidFill>
-                <a:latin typeface="Inter Tight"/>
-              </a:rPr>
-              <a:t>Dunster et al., Science Advances, 2018</a:t>
-            </a:r>
-          </a:p>
-          <a:p>
-            <a:pPr algn="l">
-              <a:spcAft>
-                <a:spcPts val="585"/>
-              </a:spcAft>
-            </a:pPr>
-            <a:r>
-              <a:rPr sz="1300" b="0" i="0">
-                <a:solidFill>
-                  <a:srgbClr val="1C1B19"/>
-                </a:solidFill>
-                <a:latin typeface="Source Serif 4"/>
-              </a:rPr>
-              <a:t>People kept awake all night were up to 40% worse at forming new memories the next day, with less hippocampus activity.</a:t>
-            </a:r>
-          </a:p>
-          <a:p>
-            <a:pPr algn="l">
-              <a:spcAft>
-                <a:spcPts val="585"/>
-              </a:spcAft>
-            </a:pPr>
-            <a:r>
-              <a:rPr sz="1050" b="0" i="0">
-                <a:solidFill>
-                  <a:srgbClr val="5D5A54"/>
-                </a:solidFill>
-                <a:latin typeface="Inter Tight"/>
-              </a:rPr>
-              <a:t>Yoo et al., Nature Neuroscience, 2007 (Harvard)</a:t>
-            </a:r>
-          </a:p>
-        </p:txBody>
-      </p:sp>
-      <p:sp>
-        <p:nvSpPr>
-          <p:cNvPr id="6" name="TextBox 5"/>
-          <p:cNvSpPr txBox="1"/>
-          <p:nvPr/>
-        </p:nvSpPr>
-        <p:spPr>
-          <a:xfrm>
-            <a:off x="6217920" y="1463040"/>
-            <a:ext cx="5394960" cy="4937760"/>
-          </a:xfrm>
-          <a:prstGeom prst="rect">
-            <a:avLst/>
-          </a:prstGeom>
-          <a:noFill/>
-        </p:spPr>
-        <p:txBody>
-          <a:bodyPr wrap="square" anchor="t" lIns="0" rIns="0" tIns="0" bIns="0">
-            <a:spAutoFit/>
-          </a:bodyPr>
-          <a:lstStyle/>
-          <a:p>
-            <a:pPr algn="l">
-              <a:spcAft>
-                <a:spcPts val="585"/>
-              </a:spcAft>
-            </a:pPr>
-            <a:r>
-              <a:rPr sz="1300" b="0" i="0">
-                <a:solidFill>
-                  <a:srgbClr val="1C1B19"/>
-                </a:solidFill>
-                <a:latin typeface="Source Serif 4"/>
-              </a:rPr>
-              <a:t>After a night without sleep, the amygdala reacted about 60% more strongly to upsetting images, and its connection to the prefrontal cortex weakened.</a:t>
-            </a:r>
-          </a:p>
-          <a:p>
-            <a:pPr algn="l">
-              <a:spcAft>
-                <a:spcPts val="585"/>
-              </a:spcAft>
-            </a:pPr>
-            <a:r>
-              <a:rPr sz="1050" b="0" i="0">
-                <a:solidFill>
-                  <a:srgbClr val="5D5A54"/>
-                </a:solidFill>
-                <a:latin typeface="Inter Tight"/>
-              </a:rPr>
-              <a:t>Yoo et al., Current Biology, 2007</a:t>
-            </a:r>
-          </a:p>
-          <a:p>
-            <a:pPr algn="l">
-              <a:spcAft>
-                <a:spcPts val="585"/>
-              </a:spcAft>
-            </a:pPr>
-            <a:r>
-              <a:rPr sz="1300" b="0" i="0">
-                <a:solidFill>
-                  <a:srgbClr val="1C1B19"/>
-                </a:solidFill>
-                <a:latin typeface="Source Serif 4"/>
-              </a:rPr>
-              <a:t>Adults on 6 hours a night for two weeks kept getting worse on attention and memory tests, while their sense of sleepiness leveled off after a few days.</a:t>
-            </a:r>
-          </a:p>
-          <a:p>
-            <a:pPr algn="l">
-              <a:spcAft>
-                <a:spcPts val="585"/>
-              </a:spcAft>
-            </a:pPr>
-            <a:r>
-              <a:rPr sz="1050" b="0" i="0">
-                <a:solidFill>
-                  <a:srgbClr val="5D5A54"/>
-                </a:solidFill>
-                <a:latin typeface="Inter Tight"/>
-              </a:rPr>
-              <a:t>Van Dongen et al., Sleep, 2003</a:t>
-            </a:r>
-          </a:p>
-          <a:p>
-            <a:pPr algn="l">
-              <a:spcAft>
-                <a:spcPts val="585"/>
-              </a:spcAft>
-            </a:pPr>
-            <a:r>
-              <a:rPr sz="1300" b="0" i="0">
-                <a:solidFill>
-                  <a:srgbClr val="1C1B19"/>
-                </a:solidFill>
-                <a:latin typeface="Source Serif 4"/>
-              </a:rPr>
-              <a:t>Caffeine taken 6 hours before bed still cost people about an hour of sleep, and they didn't notice.</a:t>
-            </a:r>
-          </a:p>
-          <a:p>
-            <a:pPr algn="l">
-              <a:spcAft>
-                <a:spcPts val="585"/>
-              </a:spcAft>
-            </a:pPr>
-            <a:r>
-              <a:rPr sz="1050" b="0" i="0">
-                <a:solidFill>
-                  <a:srgbClr val="5D5A54"/>
-                </a:solidFill>
-                <a:latin typeface="Inter Tight"/>
-              </a:rPr>
-              <a:t>Drake et al., Journal of Clinical Sleep Medicine, 2013</a:t>
-            </a:r>
-          </a:p>
-          <a:p>
-            <a:pPr algn="l">
-              <a:spcAft>
-                <a:spcPts val="585"/>
-              </a:spcAft>
-            </a:pPr>
-            <a:r>
-              <a:rPr sz="1300" b="0" i="0">
-                <a:solidFill>
-                  <a:srgbClr val="1C1B19"/>
-                </a:solidFill>
-                <a:latin typeface="Source Serif 4"/>
-              </a:rPr>
-              <a:t>Drivers who slept 4 to 5 hours had about 4 times the crash rate of those who slept 7 or more; under 4 hours, about 11 times. Melatonin gummies held 74% to 347% of the labeled dose.</a:t>
-            </a:r>
-          </a:p>
-          <a:p>
-            <a:pPr algn="l">
-              <a:spcAft>
-                <a:spcPts val="585"/>
-              </a:spcAft>
-            </a:pPr>
-            <a:r>
-              <a:rPr sz="1050" b="0" i="0">
-                <a:solidFill>
-                  <a:srgbClr val="5D5A54"/>
-                </a:solidFill>
-                <a:latin typeface="Inter Tight"/>
-              </a:rPr>
-              <a:t>Tefft, Sleep, 2018 (AAA Foundation); Cohen et al., JAMA, 2023</a:t>
-            </a:r>
-          </a:p>
-        </p:txBody>
-      </p:sp>
-    </p:spTree>
-  </p:cSld>
-  <p:clrMapOvr>
-    <a:masterClrMapping/>
-  </p:clrMapOvr>
-</p:sld>
-</file>
-
-<file path=ppt/slides/slide5.xml><?xml version="1.0" encoding="utf-8"?>
-<p:sld xmlns:a="http://schemas.openxmlformats.org/drawingml/2006/main" xmlns:p="http://schemas.openxmlformats.org/presentationml/2006/main" xmlns:r="http://schemas.openxmlformats.org/officeDocument/2006/relationships">
-  <p:cSld>
-    <p:bg>
-      <p:bgPr>
-        <a:solidFill>
-          <a:srgbClr val="0B2D5B"/>
-        </a:solidFill>
-        <a:effectLst/>
-      </p:bgPr>
-    </p:bg>
-    <p:spTree>
-      <p:nvGrpSpPr>
-        <p:cNvPr id="1" name=""/>
-        <p:cNvGrpSpPr/>
-        <p:nvPr/>
-      </p:nvGrpSpPr>
-      <p:grpSpPr/>
-      <p:sp>
-        <p:nvSpPr>
-          <p:cNvPr id="2" name="Rectangle 1"/>
-          <p:cNvSpPr/>
-          <p:nvPr/>
-        </p:nvSpPr>
-        <p:spPr>
-          <a:xfrm>
-            <a:off x="548640" y="502920"/>
-            <a:ext cx="457200" cy="54864"/>
-          </a:xfrm>
-          <a:prstGeom prst="rect">
-            <a:avLst/>
-          </a:prstGeom>
-          <a:solidFill>
-            <a:srgbClr val="F47B20"/>
-          </a:solidFill>
-          <a:ln>
-            <a:noFill/>
-          </a:ln>
-          <a:effectLst/>
-        </p:spPr>
-        <p:style>
-          <a:lnRef idx="1">
-            <a:schemeClr val="accent1"/>
-          </a:lnRef>
-          <a:fillRef idx="3">
-            <a:schemeClr val="accent1"/>
-          </a:fillRef>
-          <a:effectRef idx="2">
-            <a:schemeClr val="accent1"/>
-          </a:effectRef>
-          <a:fontRef idx="minor">
-            <a:schemeClr val="lt1"/>
-          </a:fontRef>
-        </p:style>
-        <p:txBody>
-          <a:bodyPr rtlCol="0" anchor="ctr"/>
-          <a:lstStyle/>
-          <a:p>
-            <a:pPr algn="ctr"/>
-          </a:p>
-        </p:txBody>
-      </p:sp>
-      <p:sp>
-        <p:nvSpPr>
-          <p:cNvPr id="3" name="TextBox 2"/>
-          <p:cNvSpPr txBox="1"/>
-          <p:nvPr/>
-        </p:nvSpPr>
-        <p:spPr>
-          <a:xfrm>
-            <a:off x="1143000" y="393192"/>
-            <a:ext cx="8229600" cy="274320"/>
-          </a:xfrm>
-          <a:prstGeom prst="rect">
-            <a:avLst/>
-          </a:prstGeom>
-          <a:noFill/>
-        </p:spPr>
-        <p:txBody>
-          <a:bodyPr wrap="square" anchor="t" lIns="0" rIns="0" tIns="0" bIns="0">
-            <a:spAutoFit/>
-          </a:bodyPr>
-          <a:lstStyle/>
-          <a:p>
-            <a:pPr algn="l">
-              <a:spcAft>
-                <a:spcPts val="540"/>
-              </a:spcAft>
-            </a:pPr>
-            <a:r>
-              <a:rPr sz="1200" b="1" i="0">
-                <a:solidFill>
-                  <a:srgbClr val="5D5A54"/>
-                </a:solidFill>
-                <a:latin typeface="Inter Tight"/>
-              </a:rPr>
-              <a:t>RUNNING ON EMPTY</a:t>
-            </a:r>
-          </a:p>
-        </p:txBody>
-      </p:sp>
-      <p:sp>
-        <p:nvSpPr>
-          <p:cNvPr id="4" name="TextBox 3"/>
-          <p:cNvSpPr txBox="1"/>
-          <p:nvPr/>
-        </p:nvSpPr>
-        <p:spPr>
-          <a:xfrm>
-            <a:off x="8229600" y="6400800"/>
-            <a:ext cx="3410712" cy="274320"/>
-          </a:xfrm>
-          <a:prstGeom prst="rect">
-            <a:avLst/>
-          </a:prstGeom>
-          <a:noFill/>
-        </p:spPr>
-        <p:txBody>
-          <a:bodyPr wrap="square" anchor="t" lIns="0" rIns="0" tIns="0" bIns="0">
-            <a:spAutoFit/>
-          </a:bodyPr>
-          <a:lstStyle/>
-          <a:p>
-            <a:pPr algn="r">
-              <a:spcAft>
-                <a:spcPts val="450"/>
-              </a:spcAft>
-            </a:pPr>
-            <a:r>
-              <a:rPr sz="1000" b="0" i="0">
-                <a:solidFill>
-                  <a:srgbClr val="5D5A54"/>
-                </a:solidFill>
-                <a:latin typeface="Inter Tight"/>
-              </a:rPr>
-              <a:t>Beaver Counseling</a:t>
-            </a:r>
-          </a:p>
-        </p:txBody>
-      </p:sp>
-      <p:sp>
-        <p:nvSpPr>
-          <p:cNvPr id="5" name="TextBox 4"/>
-          <p:cNvSpPr txBox="1"/>
-          <p:nvPr/>
-        </p:nvSpPr>
-        <p:spPr>
-          <a:xfrm>
-            <a:off x="822960" y="2011680"/>
-            <a:ext cx="10515600" cy="1463040"/>
-          </a:xfrm>
-          <a:prstGeom prst="rect">
-            <a:avLst/>
-          </a:prstGeom>
-          <a:noFill/>
-        </p:spPr>
-        <p:txBody>
-          <a:bodyPr wrap="square" anchor="b" lIns="0" rIns="0" tIns="0" bIns="0">
-            <a:spAutoFit/>
-          </a:bodyPr>
-          <a:lstStyle/>
-          <a:p>
-            <a:pPr algn="l">
-              <a:spcAft>
-                <a:spcPts val="2700"/>
-              </a:spcAft>
-            </a:pPr>
-            <a:r>
-              <a:rPr sz="6000" b="1" i="0">
-                <a:solidFill>
-                  <a:srgbClr val="FFFFFF"/>
-                </a:solidFill>
-                <a:latin typeface="Source Serif 4"/>
-              </a:rPr>
-              <a:t>Running on Empty</a:t>
-            </a:r>
-          </a:p>
-        </p:txBody>
-      </p:sp>
-      <p:sp>
-        <p:nvSpPr>
-          <p:cNvPr id="6" name="TextBox 5"/>
-          <p:cNvSpPr txBox="1"/>
-          <p:nvPr/>
-        </p:nvSpPr>
-        <p:spPr>
-          <a:xfrm>
-            <a:off x="822960" y="3611880"/>
-            <a:ext cx="10515600" cy="914400"/>
-          </a:xfrm>
-          <a:prstGeom prst="rect">
-            <a:avLst/>
-          </a:prstGeom>
-          <a:noFill/>
-        </p:spPr>
-        <p:txBody>
-          <a:bodyPr wrap="square" anchor="t" lIns="0" rIns="0" tIns="0" bIns="0">
-            <a:spAutoFit/>
-          </a:bodyPr>
-          <a:lstStyle/>
-          <a:p>
-            <a:pPr algn="l">
-              <a:spcAft>
-                <a:spcPts val="1080"/>
-              </a:spcAft>
-            </a:pPr>
-            <a:r>
-              <a:rPr sz="2400" b="0" i="1">
-                <a:solidFill>
-                  <a:srgbClr val="E8E4DA"/>
-                </a:solidFill>
-                <a:latin typeface="Source Serif 4"/>
-              </a:rPr>
-              <a:t>Wired at midnight. Wrecked at 7.</a:t>
-            </a:r>
-          </a:p>
-        </p:txBody>
-      </p:sp>
-      <p:sp>
-        <p:nvSpPr>
-          <p:cNvPr id="7" name="TextBox 6"/>
-          <p:cNvSpPr txBox="1"/>
-          <p:nvPr/>
-        </p:nvSpPr>
-        <p:spPr>
-          <a:xfrm>
-            <a:off x="822960" y="6035040"/>
-            <a:ext cx="7315200" cy="365760"/>
-          </a:xfrm>
-          <a:prstGeom prst="rect">
-            <a:avLst/>
-          </a:prstGeom>
-          <a:noFill/>
-        </p:spPr>
-        <p:txBody>
-          <a:bodyPr wrap="square" anchor="t" lIns="0" rIns="0" tIns="0" bIns="0">
-            <a:spAutoFit/>
-          </a:bodyPr>
-          <a:lstStyle/>
-          <a:p>
-            <a:pPr algn="l">
-              <a:spcAft>
-                <a:spcPts val="585"/>
-              </a:spcAft>
-            </a:pPr>
-            <a:r>
-              <a:rPr sz="1300" b="0" i="0">
-                <a:solidFill>
-                  <a:srgbClr val="E8E4DA"/>
-                </a:solidFill>
-                <a:latin typeface="Inter Tight"/>
-              </a:rPr>
-              <a:t>Beaver Upper School · Counseling</a:t>
+                <a:latin typeface="Source Serif 4"/>
+              </a:rPr>
+              <a:t>4 to 5 hours of sleep: about 4 times the crash rate.</a:t>
             </a:r>
           </a:p>
         </p:txBody>
@@ -9210,7 +8722,7 @@
                 </a:solidFill>
                 <a:latin typeface="Inter Tight"/>
               </a:rPr>
-              <a:t>QUICK TALLY</a:t>
+              <a:t>THE SNEAKY PART</a:t>
             </a:r>
           </a:p>
         </p:txBody>
@@ -9256,58 +8768,14 @@
       </p:sp>
       <p:sp>
         <p:nvSpPr>
-          <p:cNvPr id="5" name="Rectangle 4"/>
-          <p:cNvSpPr/>
-          <p:nvPr/>
-        </p:nvSpPr>
-        <p:spPr>
-          <a:xfrm>
-            <a:off x="822960" y="1371600"/>
-            <a:ext cx="73152" cy="3566160"/>
-          </a:xfrm>
-          <a:prstGeom prst="rect">
-            <a:avLst/>
-          </a:prstGeom>
-          <a:solidFill>
-            <a:srgbClr val="F47B20"/>
-          </a:solidFill>
-          <a:ln>
-            <a:noFill/>
-          </a:ln>
-          <a:effectLst/>
-        </p:spPr>
-        <p:style>
-          <a:lnRef idx="1">
-            <a:schemeClr val="accent1"/>
-          </a:lnRef>
-          <a:fillRef idx="3">
-            <a:schemeClr val="accent1"/>
-          </a:fillRef>
-          <a:effectRef idx="2">
-            <a:schemeClr val="accent1"/>
-          </a:effectRef>
-          <a:fontRef idx="minor">
-            <a:schemeClr val="lt1"/>
-          </a:fontRef>
-        </p:style>
-        <p:txBody>
-          <a:bodyPr rtlCol="0" anchor="ctr"/>
-          <a:lstStyle/>
-          <a:p>
-            <a:pPr algn="ctr"/>
-          </a:p>
-        </p:txBody>
-      </p:sp>
-      <p:sp>
-        <p:nvSpPr>
-          <p:cNvPr id="6" name="TextBox 5"/>
+          <p:cNvPr id="5" name="TextBox 4"/>
           <p:cNvSpPr txBox="1"/>
           <p:nvPr/>
         </p:nvSpPr>
         <p:spPr>
           <a:xfrm>
-            <a:off x="1188720" y="1371600"/>
-            <a:ext cx="10058400" cy="3566160"/>
+            <a:off x="822960" y="1463040"/>
+            <a:ext cx="10515600" cy="3291840"/>
           </a:xfrm>
           <a:prstGeom prst="rect">
             <a:avLst/>
@@ -9322,31 +8790,31 @@
           <a:p>
             <a:pPr algn="l">
               <a:spcAft>
-                <a:spcPts val="1800"/>
-              </a:spcAft>
-            </a:pPr>
-            <a:r>
-              <a:rPr sz="4000" b="0" i="1">
+                <a:spcPts val="2070"/>
+              </a:spcAft>
+            </a:pPr>
+            <a:r>
+              <a:rPr sz="4600" b="1" i="0">
                 <a:solidFill>
                   <a:srgbClr val="1C1B19"/>
                 </a:solidFill>
                 <a:latin typeface="Source Serif 4"/>
               </a:rPr>
-              <a:t>How many hours did you sleep last night?</a:t>
-            </a:r>
-          </a:p>
-        </p:txBody>
-      </p:sp>
-      <p:sp>
-        <p:nvSpPr>
-          <p:cNvPr id="7" name="TextBox 6"/>
+              <a:t>You stop noticing.</a:t>
+            </a:r>
+          </a:p>
+        </p:txBody>
+      </p:sp>
+      <p:sp>
+        <p:nvSpPr>
+          <p:cNvPr id="6" name="TextBox 5"/>
           <p:cNvSpPr txBox="1"/>
           <p:nvPr/>
         </p:nvSpPr>
         <p:spPr>
           <a:xfrm>
-            <a:off x="1188720" y="5120640"/>
-            <a:ext cx="10058400" cy="914400"/>
+            <a:off x="822960" y="4846320"/>
+            <a:ext cx="10515600" cy="1097280"/>
           </a:xfrm>
           <a:prstGeom prst="rect">
             <a:avLst/>
@@ -9361,17 +8829,17 @@
           <a:p>
             <a:pPr algn="l">
               <a:spcAft>
-                <a:spcPts val="810"/>
-              </a:spcAft>
-            </a:pPr>
-            <a:r>
-              <a:rPr sz="1800" b="0" i="0">
+                <a:spcPts val="990"/>
+              </a:spcAft>
+            </a:pPr>
+            <a:r>
+              <a:rPr sz="2200" b="0" i="1">
                 <a:solidFill>
                   <a:srgbClr val="5D5A54"/>
                 </a:solidFill>
-                <a:latin typeface="Inter Tight"/>
-              </a:rPr>
-              <a:t>Write a number on your scrap. No names. Fold it.</a:t>
+                <a:latin typeface="Source Serif 4"/>
+              </a:rPr>
+              <a:t>On 6 hours a night, people felt used to it after a few days. Their test scores kept dropping.</a:t>
             </a:r>
           </a:p>
         </p:txBody>
@@ -9480,7 +8948,7 @@
                 </a:solidFill>
                 <a:latin typeface="Inter Tight"/>
               </a:rPr>
-              <a:t>THIS IS BIOLOGY</a:t>
+              <a:t>THE WEEKEND LOOP</a:t>
             </a:r>
           </a:p>
         </p:txBody>
@@ -9532,8 +9000,93 @@
         </p:nvSpPr>
         <p:spPr>
           <a:xfrm>
-            <a:off x="822960" y="1463040"/>
-            <a:ext cx="10515600" cy="3291840"/>
+            <a:off x="822960" y="1005840"/>
+            <a:ext cx="10515600" cy="914400"/>
+          </a:xfrm>
+          <a:prstGeom prst="rect">
+            <a:avLst/>
+          </a:prstGeom>
+          <a:noFill/>
+        </p:spPr>
+        <p:txBody>
+          <a:bodyPr wrap="square" anchor="t" lIns="0" rIns="0" tIns="0" bIns="0">
+            <a:spAutoFit/>
+          </a:bodyPr>
+          <a:lstStyle/>
+          <a:p>
+            <a:pPr algn="l">
+              <a:spcAft>
+                <a:spcPts val="1530"/>
+              </a:spcAft>
+            </a:pPr>
+            <a:r>
+              <a:rPr sz="3400" b="1" i="0">
+                <a:solidFill>
+                  <a:srgbClr val="1C1B19"/>
+                </a:solidFill>
+                <a:latin typeface="Source Serif 4"/>
+              </a:rPr>
+              <a:t>Why Monday feels like jet lag</a:t>
+            </a:r>
+          </a:p>
+        </p:txBody>
+      </p:sp>
+      <p:sp>
+        <p:nvSpPr>
+          <p:cNvPr id="6" name="Rectangle 5"/>
+          <p:cNvSpPr/>
+          <p:nvPr/>
+        </p:nvSpPr>
+        <p:spPr>
+          <a:xfrm>
+            <a:off x="822960" y="2743200"/>
+            <a:ext cx="1874519" cy="1005840"/>
+          </a:xfrm>
+          <a:prstGeom prst="rect">
+            <a:avLst/>
+          </a:prstGeom>
+          <a:solidFill>
+            <a:srgbClr val="FFFFFF"/>
+          </a:solidFill>
+          <a:ln w="15875">
+            <a:solidFill>
+              <a:srgbClr val="0B2D5B"/>
+            </a:solidFill>
+          </a:ln>
+          <a:effectLst/>
+        </p:spPr>
+        <p:style>
+          <a:lnRef idx="1">
+            <a:schemeClr val="accent1"/>
+          </a:lnRef>
+          <a:fillRef idx="3">
+            <a:schemeClr val="accent1"/>
+          </a:fillRef>
+          <a:effectRef idx="2">
+            <a:schemeClr val="accent1"/>
+          </a:effectRef>
+          <a:fontRef idx="minor">
+            <a:schemeClr val="lt1"/>
+          </a:fontRef>
+        </p:style>
+        <p:txBody>
+          <a:bodyPr rtlCol="0" anchor="ctr"/>
+          <a:lstStyle/>
+          <a:p>
+            <a:pPr algn="ctr"/>
+          </a:p>
+        </p:txBody>
+      </p:sp>
+      <p:sp>
+        <p:nvSpPr>
+          <p:cNvPr id="7" name="TextBox 6"/>
+          <p:cNvSpPr txBox="1"/>
+          <p:nvPr/>
+        </p:nvSpPr>
+        <p:spPr>
+          <a:xfrm>
+            <a:off x="822960" y="2743200"/>
+            <a:ext cx="1874519" cy="1005840"/>
           </a:xfrm>
           <a:prstGeom prst="rect">
             <a:avLst/>
@@ -9546,33 +9099,517 @@
           </a:bodyPr>
           <a:lstStyle/>
           <a:p>
-            <a:pPr algn="l">
-              <a:spcAft>
-                <a:spcPts val="2070"/>
-              </a:spcAft>
-            </a:pPr>
-            <a:r>
-              <a:rPr sz="4600" b="1" i="0">
+            <a:pPr algn="ctr">
+              <a:spcAft>
+                <a:spcPts val="900"/>
+              </a:spcAft>
+            </a:pPr>
+            <a:r>
+              <a:rPr sz="2000" b="1" i="0">
                 <a:solidFill>
                   <a:srgbClr val="1C1B19"/>
                 </a:solidFill>
                 <a:latin typeface="Source Serif 4"/>
               </a:rPr>
-              <a:t>Your clock really did move.</a:t>
-            </a:r>
-          </a:p>
-        </p:txBody>
-      </p:sp>
-      <p:sp>
-        <p:nvSpPr>
-          <p:cNvPr id="6" name="TextBox 5"/>
+              <a:t>Late Friday</a:t>
+            </a:r>
+          </a:p>
+        </p:txBody>
+      </p:sp>
+      <p:cxnSp>
+        <p:nvCxnSpPr>
+          <p:cNvPr id="8" name="Connector 7"/>
+          <p:cNvCxnSpPr/>
+          <p:nvPr/>
+        </p:nvCxnSpPr>
+        <p:spPr>
+          <a:xfrm>
+            <a:off x="2752344" y="3246120"/>
+            <a:ext cx="176021" cy="0"/>
+          </a:xfrm>
+          <a:prstGeom prst="line">
+            <a:avLst/>
+          </a:prstGeom>
+          <a:ln w="31750">
+            <a:solidFill>
+              <a:srgbClr val="F47B20"/>
+            </a:solidFill>
+            <a:tailEnd type="triangle"/>
+          </a:ln>
+        </p:spPr>
+        <p:style>
+          <a:lnRef idx="2">
+            <a:schemeClr val="accent1"/>
+          </a:lnRef>
+          <a:fillRef idx="0">
+            <a:schemeClr val="accent1"/>
+          </a:fillRef>
+          <a:effectRef idx="1">
+            <a:schemeClr val="accent1"/>
+          </a:effectRef>
+          <a:fontRef idx="minor">
+            <a:schemeClr val="tx1"/>
+          </a:fontRef>
+        </p:style>
+      </p:cxnSp>
+      <p:sp>
+        <p:nvSpPr>
+          <p:cNvPr id="9" name="Rectangle 8"/>
+          <p:cNvSpPr/>
+          <p:nvPr/>
+        </p:nvSpPr>
+        <p:spPr>
+          <a:xfrm>
+            <a:off x="2983229" y="2743200"/>
+            <a:ext cx="1874519" cy="1005840"/>
+          </a:xfrm>
+          <a:prstGeom prst="rect">
+            <a:avLst/>
+          </a:prstGeom>
+          <a:solidFill>
+            <a:srgbClr val="FFFFFF"/>
+          </a:solidFill>
+          <a:ln w="15875">
+            <a:solidFill>
+              <a:srgbClr val="0B2D5B"/>
+            </a:solidFill>
+          </a:ln>
+          <a:effectLst/>
+        </p:spPr>
+        <p:style>
+          <a:lnRef idx="1">
+            <a:schemeClr val="accent1"/>
+          </a:lnRef>
+          <a:fillRef idx="3">
+            <a:schemeClr val="accent1"/>
+          </a:fillRef>
+          <a:effectRef idx="2">
+            <a:schemeClr val="accent1"/>
+          </a:effectRef>
+          <a:fontRef idx="minor">
+            <a:schemeClr val="lt1"/>
+          </a:fontRef>
+        </p:style>
+        <p:txBody>
+          <a:bodyPr rtlCol="0" anchor="ctr"/>
+          <a:lstStyle/>
+          <a:p>
+            <a:pPr algn="ctr"/>
+          </a:p>
+        </p:txBody>
+      </p:sp>
+      <p:sp>
+        <p:nvSpPr>
+          <p:cNvPr id="10" name="TextBox 9"/>
           <p:cNvSpPr txBox="1"/>
           <p:nvPr/>
         </p:nvSpPr>
         <p:spPr>
           <a:xfrm>
-            <a:off x="822960" y="4846320"/>
-            <a:ext cx="10515600" cy="1097280"/>
+            <a:off x="2983229" y="2743200"/>
+            <a:ext cx="1874519" cy="1005840"/>
+          </a:xfrm>
+          <a:prstGeom prst="rect">
+            <a:avLst/>
+          </a:prstGeom>
+          <a:noFill/>
+        </p:spPr>
+        <p:txBody>
+          <a:bodyPr wrap="square" anchor="ctr" lIns="0" rIns="0" tIns="0" bIns="0">
+            <a:spAutoFit/>
+          </a:bodyPr>
+          <a:lstStyle/>
+          <a:p>
+            <a:pPr algn="ctr">
+              <a:spcAft>
+                <a:spcPts val="900"/>
+              </a:spcAft>
+            </a:pPr>
+            <a:r>
+              <a:rPr sz="2000" b="1" i="0">
+                <a:solidFill>
+                  <a:srgbClr val="1C1B19"/>
+                </a:solidFill>
+                <a:latin typeface="Source Serif 4"/>
+              </a:rPr>
+              <a:t>Sleep until 1</a:t>
+            </a:r>
+          </a:p>
+        </p:txBody>
+      </p:sp>
+      <p:cxnSp>
+        <p:nvCxnSpPr>
+          <p:cNvPr id="11" name="Connector 10"/>
+          <p:cNvCxnSpPr/>
+          <p:nvPr/>
+        </p:nvCxnSpPr>
+        <p:spPr>
+          <a:xfrm>
+            <a:off x="4912614" y="3246120"/>
+            <a:ext cx="176022" cy="0"/>
+          </a:xfrm>
+          <a:prstGeom prst="line">
+            <a:avLst/>
+          </a:prstGeom>
+          <a:ln w="31750">
+            <a:solidFill>
+              <a:srgbClr val="F47B20"/>
+            </a:solidFill>
+            <a:tailEnd type="triangle"/>
+          </a:ln>
+        </p:spPr>
+        <p:style>
+          <a:lnRef idx="2">
+            <a:schemeClr val="accent1"/>
+          </a:lnRef>
+          <a:fillRef idx="0">
+            <a:schemeClr val="accent1"/>
+          </a:fillRef>
+          <a:effectRef idx="1">
+            <a:schemeClr val="accent1"/>
+          </a:effectRef>
+          <a:fontRef idx="minor">
+            <a:schemeClr val="tx1"/>
+          </a:fontRef>
+        </p:style>
+      </p:cxnSp>
+      <p:sp>
+        <p:nvSpPr>
+          <p:cNvPr id="12" name="Rectangle 11"/>
+          <p:cNvSpPr/>
+          <p:nvPr/>
+        </p:nvSpPr>
+        <p:spPr>
+          <a:xfrm>
+            <a:off x="5143500" y="2743200"/>
+            <a:ext cx="1874519" cy="1005840"/>
+          </a:xfrm>
+          <a:prstGeom prst="rect">
+            <a:avLst/>
+          </a:prstGeom>
+          <a:solidFill>
+            <a:srgbClr val="FFFFFF"/>
+          </a:solidFill>
+          <a:ln w="15875">
+            <a:solidFill>
+              <a:srgbClr val="0B2D5B"/>
+            </a:solidFill>
+          </a:ln>
+          <a:effectLst/>
+        </p:spPr>
+        <p:style>
+          <a:lnRef idx="1">
+            <a:schemeClr val="accent1"/>
+          </a:lnRef>
+          <a:fillRef idx="3">
+            <a:schemeClr val="accent1"/>
+          </a:fillRef>
+          <a:effectRef idx="2">
+            <a:schemeClr val="accent1"/>
+          </a:effectRef>
+          <a:fontRef idx="minor">
+            <a:schemeClr val="lt1"/>
+          </a:fontRef>
+        </p:style>
+        <p:txBody>
+          <a:bodyPr rtlCol="0" anchor="ctr"/>
+          <a:lstStyle/>
+          <a:p>
+            <a:pPr algn="ctr"/>
+          </a:p>
+        </p:txBody>
+      </p:sp>
+      <p:sp>
+        <p:nvSpPr>
+          <p:cNvPr id="13" name="TextBox 12"/>
+          <p:cNvSpPr txBox="1"/>
+          <p:nvPr/>
+        </p:nvSpPr>
+        <p:spPr>
+          <a:xfrm>
+            <a:off x="5143500" y="2743200"/>
+            <a:ext cx="1874519" cy="1005840"/>
+          </a:xfrm>
+          <a:prstGeom prst="rect">
+            <a:avLst/>
+          </a:prstGeom>
+          <a:noFill/>
+        </p:spPr>
+        <p:txBody>
+          <a:bodyPr wrap="square" anchor="ctr" lIns="0" rIns="0" tIns="0" bIns="0">
+            <a:spAutoFit/>
+          </a:bodyPr>
+          <a:lstStyle/>
+          <a:p>
+            <a:pPr algn="ctr">
+              <a:spcAft>
+                <a:spcPts val="900"/>
+              </a:spcAft>
+            </a:pPr>
+            <a:r>
+              <a:rPr sz="2000" b="1" i="0">
+                <a:solidFill>
+                  <a:srgbClr val="1C1B19"/>
+                </a:solidFill>
+                <a:latin typeface="Source Serif 4"/>
+              </a:rPr>
+              <a:t>Clock shifts later</a:t>
+            </a:r>
+          </a:p>
+        </p:txBody>
+      </p:sp>
+      <p:cxnSp>
+        <p:nvCxnSpPr>
+          <p:cNvPr id="14" name="Connector 13"/>
+          <p:cNvCxnSpPr/>
+          <p:nvPr/>
+        </p:nvCxnSpPr>
+        <p:spPr>
+          <a:xfrm>
+            <a:off x="7072883" y="3246120"/>
+            <a:ext cx="176023" cy="0"/>
+          </a:xfrm>
+          <a:prstGeom prst="line">
+            <a:avLst/>
+          </a:prstGeom>
+          <a:ln w="31750">
+            <a:solidFill>
+              <a:srgbClr val="F47B20"/>
+            </a:solidFill>
+            <a:tailEnd type="triangle"/>
+          </a:ln>
+        </p:spPr>
+        <p:style>
+          <a:lnRef idx="2">
+            <a:schemeClr val="accent1"/>
+          </a:lnRef>
+          <a:fillRef idx="0">
+            <a:schemeClr val="accent1"/>
+          </a:fillRef>
+          <a:effectRef idx="1">
+            <a:schemeClr val="accent1"/>
+          </a:effectRef>
+          <a:fontRef idx="minor">
+            <a:schemeClr val="tx1"/>
+          </a:fontRef>
+        </p:style>
+      </p:cxnSp>
+      <p:sp>
+        <p:nvSpPr>
+          <p:cNvPr id="15" name="Rectangle 14"/>
+          <p:cNvSpPr/>
+          <p:nvPr/>
+        </p:nvSpPr>
+        <p:spPr>
+          <a:xfrm>
+            <a:off x="7303770" y="2743200"/>
+            <a:ext cx="1874519" cy="1005840"/>
+          </a:xfrm>
+          <a:prstGeom prst="rect">
+            <a:avLst/>
+          </a:prstGeom>
+          <a:solidFill>
+            <a:srgbClr val="FFFFFF"/>
+          </a:solidFill>
+          <a:ln w="15875">
+            <a:solidFill>
+              <a:srgbClr val="0B2D5B"/>
+            </a:solidFill>
+          </a:ln>
+          <a:effectLst/>
+        </p:spPr>
+        <p:style>
+          <a:lnRef idx="1">
+            <a:schemeClr val="accent1"/>
+          </a:lnRef>
+          <a:fillRef idx="3">
+            <a:schemeClr val="accent1"/>
+          </a:fillRef>
+          <a:effectRef idx="2">
+            <a:schemeClr val="accent1"/>
+          </a:effectRef>
+          <a:fontRef idx="minor">
+            <a:schemeClr val="lt1"/>
+          </a:fontRef>
+        </p:style>
+        <p:txBody>
+          <a:bodyPr rtlCol="0" anchor="ctr"/>
+          <a:lstStyle/>
+          <a:p>
+            <a:pPr algn="ctr"/>
+          </a:p>
+        </p:txBody>
+      </p:sp>
+      <p:sp>
+        <p:nvSpPr>
+          <p:cNvPr id="16" name="TextBox 15"/>
+          <p:cNvSpPr txBox="1"/>
+          <p:nvPr/>
+        </p:nvSpPr>
+        <p:spPr>
+          <a:xfrm>
+            <a:off x="7303770" y="2743200"/>
+            <a:ext cx="1874519" cy="1005840"/>
+          </a:xfrm>
+          <a:prstGeom prst="rect">
+            <a:avLst/>
+          </a:prstGeom>
+          <a:noFill/>
+        </p:spPr>
+        <p:txBody>
+          <a:bodyPr wrap="square" anchor="ctr" lIns="0" rIns="0" tIns="0" bIns="0">
+            <a:spAutoFit/>
+          </a:bodyPr>
+          <a:lstStyle/>
+          <a:p>
+            <a:pPr algn="ctr">
+              <a:spcAft>
+                <a:spcPts val="900"/>
+              </a:spcAft>
+            </a:pPr>
+            <a:r>
+              <a:rPr sz="2000" b="1" i="0">
+                <a:solidFill>
+                  <a:srgbClr val="1C1B19"/>
+                </a:solidFill>
+                <a:latin typeface="Source Serif 4"/>
+              </a:rPr>
+              <a:t>Wide awake Sunday</a:t>
+            </a:r>
+          </a:p>
+        </p:txBody>
+      </p:sp>
+      <p:cxnSp>
+        <p:nvCxnSpPr>
+          <p:cNvPr id="17" name="Connector 16"/>
+          <p:cNvCxnSpPr/>
+          <p:nvPr/>
+        </p:nvCxnSpPr>
+        <p:spPr>
+          <a:xfrm>
+            <a:off x="9233154" y="3246120"/>
+            <a:ext cx="176022" cy="0"/>
+          </a:xfrm>
+          <a:prstGeom prst="line">
+            <a:avLst/>
+          </a:prstGeom>
+          <a:ln w="31750">
+            <a:solidFill>
+              <a:srgbClr val="F47B20"/>
+            </a:solidFill>
+            <a:tailEnd type="triangle"/>
+          </a:ln>
+        </p:spPr>
+        <p:style>
+          <a:lnRef idx="2">
+            <a:schemeClr val="accent1"/>
+          </a:lnRef>
+          <a:fillRef idx="0">
+            <a:schemeClr val="accent1"/>
+          </a:fillRef>
+          <a:effectRef idx="1">
+            <a:schemeClr val="accent1"/>
+          </a:effectRef>
+          <a:fontRef idx="minor">
+            <a:schemeClr val="tx1"/>
+          </a:fontRef>
+        </p:style>
+      </p:cxnSp>
+      <p:sp>
+        <p:nvSpPr>
+          <p:cNvPr id="18" name="Rectangle 17"/>
+          <p:cNvSpPr/>
+          <p:nvPr/>
+        </p:nvSpPr>
+        <p:spPr>
+          <a:xfrm>
+            <a:off x="9464040" y="2743200"/>
+            <a:ext cx="1874519" cy="1005840"/>
+          </a:xfrm>
+          <a:prstGeom prst="rect">
+            <a:avLst/>
+          </a:prstGeom>
+          <a:solidFill>
+            <a:srgbClr val="FFFFFF"/>
+          </a:solidFill>
+          <a:ln w="15875">
+            <a:solidFill>
+              <a:srgbClr val="0B2D5B"/>
+            </a:solidFill>
+          </a:ln>
+          <a:effectLst/>
+        </p:spPr>
+        <p:style>
+          <a:lnRef idx="1">
+            <a:schemeClr val="accent1"/>
+          </a:lnRef>
+          <a:fillRef idx="3">
+            <a:schemeClr val="accent1"/>
+          </a:fillRef>
+          <a:effectRef idx="2">
+            <a:schemeClr val="accent1"/>
+          </a:effectRef>
+          <a:fontRef idx="minor">
+            <a:schemeClr val="lt1"/>
+          </a:fontRef>
+        </p:style>
+        <p:txBody>
+          <a:bodyPr rtlCol="0" anchor="ctr"/>
+          <a:lstStyle/>
+          <a:p>
+            <a:pPr algn="ctr"/>
+          </a:p>
+        </p:txBody>
+      </p:sp>
+      <p:sp>
+        <p:nvSpPr>
+          <p:cNvPr id="19" name="TextBox 18"/>
+          <p:cNvSpPr txBox="1"/>
+          <p:nvPr/>
+        </p:nvSpPr>
+        <p:spPr>
+          <a:xfrm>
+            <a:off x="9464040" y="2743200"/>
+            <a:ext cx="1874519" cy="1005840"/>
+          </a:xfrm>
+          <a:prstGeom prst="rect">
+            <a:avLst/>
+          </a:prstGeom>
+          <a:noFill/>
+        </p:spPr>
+        <p:txBody>
+          <a:bodyPr wrap="square" anchor="ctr" lIns="0" rIns="0" tIns="0" bIns="0">
+            <a:spAutoFit/>
+          </a:bodyPr>
+          <a:lstStyle/>
+          <a:p>
+            <a:pPr algn="ctr">
+              <a:spcAft>
+                <a:spcPts val="900"/>
+              </a:spcAft>
+            </a:pPr>
+            <a:r>
+              <a:rPr sz="2000" b="1" i="0">
+                <a:solidFill>
+                  <a:srgbClr val="1C1B19"/>
+                </a:solidFill>
+                <a:latin typeface="Source Serif 4"/>
+              </a:rPr>
+              <a:t>Wrecked Monday</a:t>
+            </a:r>
+          </a:p>
+        </p:txBody>
+      </p:sp>
+      <p:sp>
+        <p:nvSpPr>
+          <p:cNvPr id="20" name="TextBox 19"/>
+          <p:cNvSpPr txBox="1"/>
+          <p:nvPr/>
+        </p:nvSpPr>
+        <p:spPr>
+          <a:xfrm>
+            <a:off x="822960" y="4160520"/>
+            <a:ext cx="10515600" cy="457200"/>
           </a:xfrm>
           <a:prstGeom prst="rect">
             <a:avLst/>
@@ -9585,19 +9622,58 @@
           </a:bodyPr>
           <a:lstStyle/>
           <a:p>
-            <a:pPr algn="l">
-              <a:spcAft>
-                <a:spcPts val="990"/>
-              </a:spcAft>
-            </a:pPr>
-            <a:r>
-              <a:rPr sz="2200" b="0" i="1">
+            <a:pPr algn="ctr">
+              <a:spcAft>
+                <a:spcPts val="810"/>
+              </a:spcAft>
+            </a:pPr>
+            <a:r>
+              <a:rPr sz="1800" b="1" i="0">
+                <a:solidFill>
+                  <a:srgbClr val="F47B20"/>
+                </a:solidFill>
+                <a:latin typeface="Inter Tight"/>
+              </a:rPr>
+              <a:t>↺  and around again</a:t>
+            </a:r>
+          </a:p>
+        </p:txBody>
+      </p:sp>
+      <p:sp>
+        <p:nvSpPr>
+          <p:cNvPr id="21" name="TextBox 20"/>
+          <p:cNvSpPr txBox="1"/>
+          <p:nvPr/>
+        </p:nvSpPr>
+        <p:spPr>
+          <a:xfrm>
+            <a:off x="822960" y="4846320"/>
+            <a:ext cx="10515600" cy="1188720"/>
+          </a:xfrm>
+          <a:prstGeom prst="rect">
+            <a:avLst/>
+          </a:prstGeom>
+          <a:noFill/>
+        </p:spPr>
+        <p:txBody>
+          <a:bodyPr wrap="square" anchor="t" lIns="0" rIns="0" tIns="0" bIns="0">
+            <a:spAutoFit/>
+          </a:bodyPr>
+          <a:lstStyle/>
+          <a:p>
+            <a:pPr algn="ctr">
+              <a:spcAft>
+                <a:spcPts val="900"/>
+              </a:spcAft>
+            </a:pPr>
+            <a:r>
+              <a:rPr sz="2000" b="0" i="1">
                 <a:solidFill>
                   <a:srgbClr val="5D5A54"/>
                 </a:solidFill>
                 <a:latin typeface="Source Serif 4"/>
               </a:rPr>
-              <a:t>In puberty, your brain sends its sleepy signal later at night. That's why you're not tired at 10 anymore.</a:t>
+              <a:t>A little extra sleep helps. Sleeping into the afternoon is like flying a few time zones west.</a:t>
             </a:r>
           </a:p>
         </p:txBody>
@@ -9706,7 +9782,7 @@
                 </a:solidFill>
                 <a:latin typeface="Inter Tight"/>
               </a:rPr>
-              <a:t>WHAT A SHORT NIGHT COSTS</a:t>
+              <a:t>THE LEVERS</a:t>
             </a:r>
           </a:p>
         </p:txBody>
@@ -9784,7 +9860,7 @@
                 </a:solidFill>
                 <a:latin typeface="Source Serif 4"/>
               </a:rPr>
-              <a:t>A tired brain on a school day</a:t>
+              <a:t>What you control, even when your schedule doesn't bend</a:t>
             </a:r>
           </a:p>
         </p:txBody>
@@ -9862,7 +9938,7 @@
                 </a:solidFill>
                 <a:latin typeface="Source Serif 4"/>
               </a:rPr>
-              <a:t>Memory</a:t>
+              <a:t>Morning light.</a:t>
             </a:r>
           </a:p>
           <a:p>
@@ -9878,7 +9954,7 @@
                 </a:solidFill>
                 <a:latin typeface="Source Serif 4"/>
               </a:rPr>
-              <a:t>Up to 40% worse at learning new things after an all-nighter.</a:t>
+              <a:t>Outside if you can, in the first hour after waking.</a:t>
             </a:r>
           </a:p>
         </p:txBody>
@@ -9956,7 +10032,7 @@
                 </a:solidFill>
                 <a:latin typeface="Source Serif 4"/>
               </a:rPr>
-              <a:t>Mood</a:t>
+              <a:t>A wake-up anchor.</a:t>
             </a:r>
           </a:p>
           <a:p>
@@ -9972,7 +10048,7 @@
                 </a:solidFill>
                 <a:latin typeface="Source Serif 4"/>
               </a:rPr>
-              <a:t>The threat detector reacted about 60% more strongly.</a:t>
+              <a:t>Weekends within about two hours of school days.</a:t>
             </a:r>
           </a:p>
         </p:txBody>
@@ -10050,7 +10126,7 @@
                 </a:solidFill>
                 <a:latin typeface="Source Serif 4"/>
               </a:rPr>
-              <a:t>Judgment</a:t>
+              <a:t>A caffeine cutoff.</a:t>
             </a:r>
           </a:p>
           <a:p>
@@ -10066,7 +10142,7 @@
                 </a:solidFill>
                 <a:latin typeface="Source Serif 4"/>
               </a:rPr>
-              <a:t>Focus and patience are among the first to fade.</a:t>
+              <a:t>Stop by early afternoon. It lasts longer than you feel.</a:t>
             </a:r>
           </a:p>
         </p:txBody>
@@ -10144,7 +10220,7 @@
                 </a:solidFill>
                 <a:latin typeface="Source Serif 4"/>
               </a:rPr>
-              <a:t>Safety</a:t>
+              <a:t>The phone's bedtime.</a:t>
             </a:r>
           </a:p>
           <a:p>
@@ -10160,7 +10236,7 @@
                 </a:solidFill>
                 <a:latin typeface="Source Serif 4"/>
               </a:rPr>
-              <a:t>4 to 5 hours of sleep: about 4 times the crash rate.</a:t>
+              <a:t>Charge it outside your room, or across it on Do Not Disturb.</a:t>
             </a:r>
           </a:p>
         </p:txBody>
@@ -10269,7 +10345,7 @@
                 </a:solidFill>
                 <a:latin typeface="Inter Tight"/>
               </a:rPr>
-              <a:t>THE SNEAKY PART</a:t>
+              <a:t>THREE TIRED STUDENTS</a:t>
             </a:r>
           </a:p>
         </p:txBody>
@@ -10321,47 +10397,8 @@
         </p:nvSpPr>
         <p:spPr>
           <a:xfrm>
-            <a:off x="822960" y="1463040"/>
-            <a:ext cx="10515600" cy="3291840"/>
-          </a:xfrm>
-          <a:prstGeom prst="rect">
-            <a:avLst/>
-          </a:prstGeom>
-          <a:noFill/>
-        </p:spPr>
-        <p:txBody>
-          <a:bodyPr wrap="square" anchor="ctr" lIns="0" rIns="0" tIns="0" bIns="0">
-            <a:spAutoFit/>
-          </a:bodyPr>
-          <a:lstStyle/>
-          <a:p>
-            <a:pPr algn="l">
-              <a:spcAft>
-                <a:spcPts val="2070"/>
-              </a:spcAft>
-            </a:pPr>
-            <a:r>
-              <a:rPr sz="4600" b="1" i="0">
-                <a:solidFill>
-                  <a:srgbClr val="1C1B19"/>
-                </a:solidFill>
-                <a:latin typeface="Source Serif 4"/>
-              </a:rPr>
-              <a:t>You stop noticing.</a:t>
-            </a:r>
-          </a:p>
-        </p:txBody>
-      </p:sp>
-      <p:sp>
-        <p:nvSpPr>
-          <p:cNvPr id="6" name="TextBox 5"/>
-          <p:cNvSpPr txBox="1"/>
-          <p:nvPr/>
-        </p:nvSpPr>
-        <p:spPr>
-          <a:xfrm>
-            <a:off x="822960" y="4846320"/>
-            <a:ext cx="10515600" cy="1097280"/>
+            <a:off x="822960" y="1005840"/>
+            <a:ext cx="10515600" cy="914400"/>
           </a:xfrm>
           <a:prstGeom prst="rect">
             <a:avLst/>
@@ -10376,17 +10413,389 @@
           <a:p>
             <a:pPr algn="l">
               <a:spcAft>
-                <a:spcPts val="990"/>
-              </a:spcAft>
-            </a:pPr>
-            <a:r>
-              <a:rPr sz="2200" b="0" i="1">
-                <a:solidFill>
-                  <a:srgbClr val="5D5A54"/>
-                </a:solidFill>
-                <a:latin typeface="Source Serif 4"/>
-              </a:rPr>
-              <a:t>On 6 hours a night, people felt used to it after a few days. Their test scores kept dropping.</a:t>
+                <a:spcPts val="1530"/>
+              </a:spcAft>
+            </a:pPr>
+            <a:r>
+              <a:rPr sz="3400" b="1" i="0">
+                <a:solidFill>
+                  <a:srgbClr val="1C1B19"/>
+                </a:solidFill>
+                <a:latin typeface="Source Serif 4"/>
+              </a:rPr>
+              <a:t>What's the smart move?</a:t>
+            </a:r>
+          </a:p>
+        </p:txBody>
+      </p:sp>
+      <p:sp>
+        <p:nvSpPr>
+          <p:cNvPr id="6" name="Rectangle 5"/>
+          <p:cNvSpPr/>
+          <p:nvPr/>
+        </p:nvSpPr>
+        <p:spPr>
+          <a:xfrm>
+            <a:off x="822960" y="2103120"/>
+            <a:ext cx="3322320" cy="3840480"/>
+          </a:xfrm>
+          <a:prstGeom prst="rect">
+            <a:avLst/>
+          </a:prstGeom>
+          <a:solidFill>
+            <a:srgbClr val="FFFFFF"/>
+          </a:solidFill>
+          <a:ln w="15875">
+            <a:solidFill>
+              <a:srgbClr val="D8D2C6"/>
+            </a:solidFill>
+          </a:ln>
+          <a:effectLst/>
+        </p:spPr>
+        <p:style>
+          <a:lnRef idx="1">
+            <a:schemeClr val="accent1"/>
+          </a:lnRef>
+          <a:fillRef idx="3">
+            <a:schemeClr val="accent1"/>
+          </a:fillRef>
+          <a:effectRef idx="2">
+            <a:schemeClr val="accent1"/>
+          </a:effectRef>
+          <a:fontRef idx="minor">
+            <a:schemeClr val="lt1"/>
+          </a:fontRef>
+        </p:style>
+        <p:txBody>
+          <a:bodyPr rtlCol="0" anchor="ctr"/>
+          <a:lstStyle/>
+          <a:p>
+            <a:pPr algn="ctr"/>
+          </a:p>
+        </p:txBody>
+      </p:sp>
+      <p:sp>
+        <p:nvSpPr>
+          <p:cNvPr id="7" name="TextBox 6"/>
+          <p:cNvSpPr txBox="1"/>
+          <p:nvPr/>
+        </p:nvSpPr>
+        <p:spPr>
+          <a:xfrm>
+            <a:off x="1051560" y="2286000"/>
+            <a:ext cx="2865120" cy="365760"/>
+          </a:xfrm>
+          <a:prstGeom prst="rect">
+            <a:avLst/>
+          </a:prstGeom>
+          <a:noFill/>
+        </p:spPr>
+        <p:txBody>
+          <a:bodyPr wrap="square" anchor="t" lIns="0" rIns="0" tIns="0" bIns="0">
+            <a:spAutoFit/>
+          </a:bodyPr>
+          <a:lstStyle/>
+          <a:p>
+            <a:pPr algn="l">
+              <a:spcAft>
+                <a:spcPts val="585"/>
+              </a:spcAft>
+            </a:pPr>
+            <a:r>
+              <a:rPr sz="1300" b="1" i="0">
+                <a:solidFill>
+                  <a:srgbClr val="0B2D5B"/>
+                </a:solidFill>
+                <a:latin typeface="Inter Tight"/>
+              </a:rPr>
+              <a:t>DEV</a:t>
+            </a:r>
+          </a:p>
+        </p:txBody>
+      </p:sp>
+      <p:sp>
+        <p:nvSpPr>
+          <p:cNvPr id="8" name="TextBox 7"/>
+          <p:cNvSpPr txBox="1"/>
+          <p:nvPr/>
+        </p:nvSpPr>
+        <p:spPr>
+          <a:xfrm>
+            <a:off x="1051560" y="2743200"/>
+            <a:ext cx="2865120" cy="3017520"/>
+          </a:xfrm>
+          <a:prstGeom prst="rect">
+            <a:avLst/>
+          </a:prstGeom>
+          <a:noFill/>
+        </p:spPr>
+        <p:txBody>
+          <a:bodyPr wrap="square" anchor="t" lIns="0" rIns="0" tIns="0" bIns="0">
+            <a:spAutoFit/>
+          </a:bodyPr>
+          <a:lstStyle/>
+          <a:p>
+            <a:pPr algn="l">
+              <a:spcAft>
+                <a:spcPts val="810"/>
+              </a:spcAft>
+            </a:pPr>
+            <a:r>
+              <a:rPr sz="1800" b="0" i="0">
+                <a:solidFill>
+                  <a:srgbClr val="1C1B19"/>
+                </a:solidFill>
+                <a:latin typeface="Source Serif 4"/>
+              </a:rPr>
+              <a:t>Practice ends at 6. He watches his little brothers while his mom works nights, then starts homework at 10 and is up until 1.</a:t>
+            </a:r>
+          </a:p>
+        </p:txBody>
+      </p:sp>
+      <p:sp>
+        <p:nvSpPr>
+          <p:cNvPr id="9" name="Rectangle 8"/>
+          <p:cNvSpPr/>
+          <p:nvPr/>
+        </p:nvSpPr>
+        <p:spPr>
+          <a:xfrm>
+            <a:off x="4419600" y="2103120"/>
+            <a:ext cx="3322320" cy="3840480"/>
+          </a:xfrm>
+          <a:prstGeom prst="rect">
+            <a:avLst/>
+          </a:prstGeom>
+          <a:solidFill>
+            <a:srgbClr val="FFFFFF"/>
+          </a:solidFill>
+          <a:ln w="15875">
+            <a:solidFill>
+              <a:srgbClr val="D8D2C6"/>
+            </a:solidFill>
+          </a:ln>
+          <a:effectLst/>
+        </p:spPr>
+        <p:style>
+          <a:lnRef idx="1">
+            <a:schemeClr val="accent1"/>
+          </a:lnRef>
+          <a:fillRef idx="3">
+            <a:schemeClr val="accent1"/>
+          </a:fillRef>
+          <a:effectRef idx="2">
+            <a:schemeClr val="accent1"/>
+          </a:effectRef>
+          <a:fontRef idx="minor">
+            <a:schemeClr val="lt1"/>
+          </a:fontRef>
+        </p:style>
+        <p:txBody>
+          <a:bodyPr rtlCol="0" anchor="ctr"/>
+          <a:lstStyle/>
+          <a:p>
+            <a:pPr algn="ctr"/>
+          </a:p>
+        </p:txBody>
+      </p:sp>
+      <p:sp>
+        <p:nvSpPr>
+          <p:cNvPr id="10" name="TextBox 9"/>
+          <p:cNvSpPr txBox="1"/>
+          <p:nvPr/>
+        </p:nvSpPr>
+        <p:spPr>
+          <a:xfrm>
+            <a:off x="4648200" y="2286000"/>
+            <a:ext cx="2865120" cy="365760"/>
+          </a:xfrm>
+          <a:prstGeom prst="rect">
+            <a:avLst/>
+          </a:prstGeom>
+          <a:noFill/>
+        </p:spPr>
+        <p:txBody>
+          <a:bodyPr wrap="square" anchor="t" lIns="0" rIns="0" tIns="0" bIns="0">
+            <a:spAutoFit/>
+          </a:bodyPr>
+          <a:lstStyle/>
+          <a:p>
+            <a:pPr algn="l">
+              <a:spcAft>
+                <a:spcPts val="585"/>
+              </a:spcAft>
+            </a:pPr>
+            <a:r>
+              <a:rPr sz="1300" b="1" i="0">
+                <a:solidFill>
+                  <a:srgbClr val="0B2D5B"/>
+                </a:solidFill>
+                <a:latin typeface="Inter Tight"/>
+              </a:rPr>
+              <a:t>AMARA</a:t>
+            </a:r>
+          </a:p>
+        </p:txBody>
+      </p:sp>
+      <p:sp>
+        <p:nvSpPr>
+          <p:cNvPr id="11" name="TextBox 10"/>
+          <p:cNvSpPr txBox="1"/>
+          <p:nvPr/>
+        </p:nvSpPr>
+        <p:spPr>
+          <a:xfrm>
+            <a:off x="4648200" y="2743200"/>
+            <a:ext cx="2865120" cy="3017520"/>
+          </a:xfrm>
+          <a:prstGeom prst="rect">
+            <a:avLst/>
+          </a:prstGeom>
+          <a:noFill/>
+        </p:spPr>
+        <p:txBody>
+          <a:bodyPr wrap="square" anchor="t" lIns="0" rIns="0" tIns="0" bIns="0">
+            <a:spAutoFit/>
+          </a:bodyPr>
+          <a:lstStyle/>
+          <a:p>
+            <a:pPr algn="l">
+              <a:spcAft>
+                <a:spcPts val="810"/>
+              </a:spcAft>
+            </a:pPr>
+            <a:r>
+              <a:rPr sz="1800" b="0" i="0">
+                <a:solidFill>
+                  <a:srgbClr val="1C1B19"/>
+                </a:solidFill>
+                <a:latin typeface="Source Serif 4"/>
+              </a:rPr>
+              <a:t>Biology test at 8am. It's 12:30am and she still has two units to review.</a:t>
+            </a:r>
+          </a:p>
+        </p:txBody>
+      </p:sp>
+      <p:sp>
+        <p:nvSpPr>
+          <p:cNvPr id="12" name="Rectangle 11"/>
+          <p:cNvSpPr/>
+          <p:nvPr/>
+        </p:nvSpPr>
+        <p:spPr>
+          <a:xfrm>
+            <a:off x="8016239" y="2103120"/>
+            <a:ext cx="3322320" cy="3840480"/>
+          </a:xfrm>
+          <a:prstGeom prst="rect">
+            <a:avLst/>
+          </a:prstGeom>
+          <a:solidFill>
+            <a:srgbClr val="FFFFFF"/>
+          </a:solidFill>
+          <a:ln w="15875">
+            <a:solidFill>
+              <a:srgbClr val="D8D2C6"/>
+            </a:solidFill>
+          </a:ln>
+          <a:effectLst/>
+        </p:spPr>
+        <p:style>
+          <a:lnRef idx="1">
+            <a:schemeClr val="accent1"/>
+          </a:lnRef>
+          <a:fillRef idx="3">
+            <a:schemeClr val="accent1"/>
+          </a:fillRef>
+          <a:effectRef idx="2">
+            <a:schemeClr val="accent1"/>
+          </a:effectRef>
+          <a:fontRef idx="minor">
+            <a:schemeClr val="lt1"/>
+          </a:fontRef>
+        </p:style>
+        <p:txBody>
+          <a:bodyPr rtlCol="0" anchor="ctr"/>
+          <a:lstStyle/>
+          <a:p>
+            <a:pPr algn="ctr"/>
+          </a:p>
+        </p:txBody>
+      </p:sp>
+      <p:sp>
+        <p:nvSpPr>
+          <p:cNvPr id="13" name="TextBox 12"/>
+          <p:cNvSpPr txBox="1"/>
+          <p:nvPr/>
+        </p:nvSpPr>
+        <p:spPr>
+          <a:xfrm>
+            <a:off x="8244839" y="2286000"/>
+            <a:ext cx="2865120" cy="365760"/>
+          </a:xfrm>
+          <a:prstGeom prst="rect">
+            <a:avLst/>
+          </a:prstGeom>
+          <a:noFill/>
+        </p:spPr>
+        <p:txBody>
+          <a:bodyPr wrap="square" anchor="t" lIns="0" rIns="0" tIns="0" bIns="0">
+            <a:spAutoFit/>
+          </a:bodyPr>
+          <a:lstStyle/>
+          <a:p>
+            <a:pPr algn="l">
+              <a:spcAft>
+                <a:spcPts val="585"/>
+              </a:spcAft>
+            </a:pPr>
+            <a:r>
+              <a:rPr sz="1300" b="1" i="0">
+                <a:solidFill>
+                  <a:srgbClr val="0B2D5B"/>
+                </a:solidFill>
+                <a:latin typeface="Inter Tight"/>
+              </a:rPr>
+              <a:t>LUIS</a:t>
+            </a:r>
+          </a:p>
+        </p:txBody>
+      </p:sp>
+      <p:sp>
+        <p:nvSpPr>
+          <p:cNvPr id="14" name="TextBox 13"/>
+          <p:cNvSpPr txBox="1"/>
+          <p:nvPr/>
+        </p:nvSpPr>
+        <p:spPr>
+          <a:xfrm>
+            <a:off x="8244839" y="2743200"/>
+            <a:ext cx="2865120" cy="3017520"/>
+          </a:xfrm>
+          <a:prstGeom prst="rect">
+            <a:avLst/>
+          </a:prstGeom>
+          <a:noFill/>
+        </p:spPr>
+        <p:txBody>
+          <a:bodyPr wrap="square" anchor="t" lIns="0" rIns="0" tIns="0" bIns="0">
+            <a:spAutoFit/>
+          </a:bodyPr>
+          <a:lstStyle/>
+          <a:p>
+            <a:pPr algn="l">
+              <a:spcAft>
+                <a:spcPts val="810"/>
+              </a:spcAft>
+            </a:pPr>
+            <a:r>
+              <a:rPr sz="1800" b="0" i="0">
+                <a:solidFill>
+                  <a:srgbClr val="1C1B19"/>
+                </a:solidFill>
+                <a:latin typeface="Source Serif 4"/>
+              </a:rPr>
+              <a:t>His ride to a 6am lift is an older teammate who slept five hours. At a red light, Luis sees him drifting.</a:t>
             </a:r>
           </a:p>
         </p:txBody>

--- a/decks/running-on-empty-lesson-v2.pptx
+++ b/decks/running-on-empty-lesson-v2.pptx
@@ -7555,6 +7555,45 @@
                 <a:latin typeface="Inter Tight"/>
               </a:rPr>
               <a:t>Beaver Upper School · Counseling</a:t>
+            </a:r>
+          </a:p>
+        </p:txBody>
+      </p:sp>
+      <p:sp>
+        <p:nvSpPr>
+          <p:cNvPr id="8" name="TextBox 7"/>
+          <p:cNvSpPr txBox="1"/>
+          <p:nvPr/>
+        </p:nvSpPr>
+        <p:spPr>
+          <a:xfrm>
+            <a:off x="6766560" y="5897880"/>
+            <a:ext cx="4846320" cy="640080"/>
+          </a:xfrm>
+          <a:prstGeom prst="rect">
+            <a:avLst/>
+          </a:prstGeom>
+          <a:noFill/>
+        </p:spPr>
+        <p:txBody>
+          <a:bodyPr wrap="square" anchor="t" lIns="0" rIns="0" tIns="0" bIns="0">
+            <a:spAutoFit/>
+          </a:bodyPr>
+          <a:lstStyle/>
+          <a:p>
+            <a:pPr algn="r">
+              <a:spcAft>
+                <a:spcPts val="495"/>
+              </a:spcAft>
+            </a:pPr>
+            <a:r>
+              <a:rPr sz="1100" b="0" i="0">
+                <a:solidFill>
+                  <a:srgbClr val="E8E4DA"/>
+                </a:solidFill>
+                <a:latin typeface="Inter Tight"/>
+              </a:rPr>
+              <a:t>Written by Dr. Rick Wilson, with AI-assisted drafting. Every lesson is reviewed and edited by Dr. Wilson.</a:t>
             </a:r>
           </a:p>
         </p:txBody>
